--- a/resources/figures.pptx
+++ b/resources/figures.pptx
@@ -104,6 +104,11 @@
       </a:defRPr>
     </a:lvl9pPr>
   </p:defaultTextStyle>
+  <p:extLst>
+    <p:ext uri="{EFAFB233-063F-42B5-8137-9DF3F51BA10A}">
+      <p15:sldGuideLst xmlns:p15="http://schemas.microsoft.com/office/powerpoint/2012/main"/>
+    </p:ext>
+  </p:extLst>
 </p:presentation>
 </file>
 
@@ -3649,7 +3654,9 @@
               <a:ext cx="1800000" cy="1800000"/>
             </a:xfrm>
             <a:prstGeom prst="roundRect">
-              <a:avLst/>
+              <a:avLst>
+                <a:gd name="adj" fmla="val 5038"/>
+              </a:avLst>
             </a:prstGeom>
             <a:solidFill>
               <a:srgbClr val="00387D"/>
@@ -4060,10 +4067,10 @@
       </p:grpSp>
       <p:grpSp>
         <p:nvGrpSpPr>
-          <p:cNvPr id="16" name="グループ化 15">
-            <a:extLst>
-              <a:ext uri="{FF2B5EF4-FFF2-40B4-BE49-F238E27FC236}">
-                <a16:creationId xmlns:a16="http://schemas.microsoft.com/office/drawing/2014/main" id="{0EC31F58-6106-2D42-6975-264E1A1BAB86}"/>
+          <p:cNvPr id="2" name="グループ化 1">
+            <a:extLst>
+              <a:ext uri="{FF2B5EF4-FFF2-40B4-BE49-F238E27FC236}">
+                <a16:creationId xmlns:a16="http://schemas.microsoft.com/office/drawing/2014/main" id="{666CA945-81C8-C5B1-54AF-AB7DC6EDA8A6}"/>
               </a:ext>
             </a:extLst>
           </p:cNvPr>
@@ -4072,18 +4079,21 @@
         </p:nvGrpSpPr>
         <p:grpSpPr>
           <a:xfrm>
-            <a:off x="5864970" y="1142976"/>
+            <a:off x="6072940" y="1142976"/>
             <a:ext cx="1800000" cy="1800000"/>
             <a:chOff x="3299783" y="1142976"/>
             <a:chExt cx="1800000" cy="1800000"/>
           </a:xfrm>
+          <a:solidFill>
+            <a:srgbClr val="00387D"/>
+          </a:solidFill>
         </p:grpSpPr>
         <p:sp>
           <p:nvSpPr>
-            <p:cNvPr id="17" name="角丸四角形 16">
+            <p:cNvPr id="3" name="角丸四角形 2">
               <a:extLst>
                 <a:ext uri="{FF2B5EF4-FFF2-40B4-BE49-F238E27FC236}">
-                  <a16:creationId xmlns:a16="http://schemas.microsoft.com/office/drawing/2014/main" id="{FBB3D4A2-9131-AC76-F1A5-5409810C11B7}"/>
+                  <a16:creationId xmlns:a16="http://schemas.microsoft.com/office/drawing/2014/main" id="{4CC4B70B-15EB-B356-4E45-FFDF8AF0A017}"/>
                 </a:ext>
               </a:extLst>
             </p:cNvPr>
@@ -4098,7 +4108,9 @@
               <a:ext cx="1800000" cy="1800000"/>
             </a:xfrm>
             <a:prstGeom prst="roundRect">
-              <a:avLst/>
+              <a:avLst>
+                <a:gd name="adj" fmla="val 5038"/>
+              </a:avLst>
             </a:prstGeom>
             <a:solidFill>
               <a:schemeClr val="bg1"/>
@@ -4134,10 +4146,10 @@
         </p:sp>
         <p:sp>
           <p:nvSpPr>
-            <p:cNvPr id="18" name="テキスト ボックス 17">
+            <p:cNvPr id="5" name="テキスト ボックス 4">
               <a:extLst>
                 <a:ext uri="{FF2B5EF4-FFF2-40B4-BE49-F238E27FC236}">
-                  <a16:creationId xmlns:a16="http://schemas.microsoft.com/office/drawing/2014/main" id="{A4AC216F-B30E-0866-DB95-2CB74095872C}"/>
+                  <a16:creationId xmlns:a16="http://schemas.microsoft.com/office/drawing/2014/main" id="{7BD19939-6142-D9D2-3E59-AC988D088672}"/>
                 </a:ext>
               </a:extLst>
             </p:cNvPr>
@@ -4183,10 +4195,10 @@
         </p:sp>
         <p:grpSp>
           <p:nvGrpSpPr>
-            <p:cNvPr id="19" name="グループ化 18">
+            <p:cNvPr id="13" name="グループ化 12">
               <a:extLst>
                 <a:ext uri="{FF2B5EF4-FFF2-40B4-BE49-F238E27FC236}">
-                  <a16:creationId xmlns:a16="http://schemas.microsoft.com/office/drawing/2014/main" id="{E1CFA870-1D67-518F-2743-CF6BE7D9211E}"/>
+                  <a16:creationId xmlns:a16="http://schemas.microsoft.com/office/drawing/2014/main" id="{06D18BD2-1A46-5617-6CA7-CC7D6B6B38EB}"/>
                 </a:ext>
               </a:extLst>
             </p:cNvPr>
@@ -4200,13 +4212,14 @@
               <a:chOff x="2199817" y="1443209"/>
               <a:chExt cx="1080000" cy="1080000"/>
             </a:xfrm>
+            <a:grpFill/>
           </p:grpSpPr>
           <p:sp>
             <p:nvSpPr>
-              <p:cNvPr id="21" name="ドーナツ 20">
+              <p:cNvPr id="27" name="ドーナツ 26">
                 <a:extLst>
                   <a:ext uri="{FF2B5EF4-FFF2-40B4-BE49-F238E27FC236}">
-                    <a16:creationId xmlns:a16="http://schemas.microsoft.com/office/drawing/2014/main" id="{CDEE05B0-B050-66A5-D45E-8BEC72F386D4}"/>
+                    <a16:creationId xmlns:a16="http://schemas.microsoft.com/office/drawing/2014/main" id="{844FB3DD-E071-463E-45E9-D0AD8C5EAFE7}"/>
                   </a:ext>
                 </a:extLst>
               </p:cNvPr>
@@ -4225,9 +4238,7 @@
                   <a:gd name="adj" fmla="val 7149"/>
                 </a:avLst>
               </a:prstGeom>
-              <a:solidFill>
-                <a:srgbClr val="00387D"/>
-              </a:solidFill>
+              <a:grpFill/>
               <a:ln>
                 <a:noFill/>
               </a:ln>
@@ -4263,10 +4274,10 @@
           </p:sp>
           <p:sp>
             <p:nvSpPr>
-              <p:cNvPr id="22" name="角丸四角形 21">
+              <p:cNvPr id="28" name="角丸四角形 27">
                 <a:extLst>
                   <a:ext uri="{FF2B5EF4-FFF2-40B4-BE49-F238E27FC236}">
-                    <a16:creationId xmlns:a16="http://schemas.microsoft.com/office/drawing/2014/main" id="{C38E757D-0AC5-107F-685F-932A161174D4}"/>
+                    <a16:creationId xmlns:a16="http://schemas.microsoft.com/office/drawing/2014/main" id="{BB6EB6EE-1787-85A1-93C0-BA3EDE852CAA}"/>
                   </a:ext>
                 </a:extLst>
               </p:cNvPr>
@@ -4281,9 +4292,7 @@
               <a:prstGeom prst="roundRect">
                 <a:avLst/>
               </a:prstGeom>
-              <a:solidFill>
-                <a:srgbClr val="00387D"/>
-              </a:solidFill>
+              <a:grpFill/>
               <a:ln>
                 <a:noFill/>
               </a:ln>
@@ -4315,10 +4324,10 @@
           </p:sp>
           <p:sp>
             <p:nvSpPr>
-              <p:cNvPr id="23" name="角丸四角形 22">
+              <p:cNvPr id="29" name="角丸四角形 28">
                 <a:extLst>
                   <a:ext uri="{FF2B5EF4-FFF2-40B4-BE49-F238E27FC236}">
-                    <a16:creationId xmlns:a16="http://schemas.microsoft.com/office/drawing/2014/main" id="{E797F1DE-B6BE-8960-8329-CD04410AE865}"/>
+                    <a16:creationId xmlns:a16="http://schemas.microsoft.com/office/drawing/2014/main" id="{B7063A7E-8242-BBFA-DD02-70823212FD09}"/>
                   </a:ext>
                 </a:extLst>
               </p:cNvPr>
@@ -4333,9 +4342,7 @@
               <a:prstGeom prst="roundRect">
                 <a:avLst/>
               </a:prstGeom>
-              <a:solidFill>
-                <a:srgbClr val="00387D"/>
-              </a:solidFill>
+              <a:grpFill/>
               <a:ln>
                 <a:noFill/>
               </a:ln>
@@ -4367,10 +4374,10 @@
           </p:sp>
           <p:sp>
             <p:nvSpPr>
-              <p:cNvPr id="24" name="角丸四角形 23">
+              <p:cNvPr id="30" name="角丸四角形 29">
                 <a:extLst>
                   <a:ext uri="{FF2B5EF4-FFF2-40B4-BE49-F238E27FC236}">
-                    <a16:creationId xmlns:a16="http://schemas.microsoft.com/office/drawing/2014/main" id="{1288F596-2F92-4DB7-5398-B06FCC6C268B}"/>
+                    <a16:creationId xmlns:a16="http://schemas.microsoft.com/office/drawing/2014/main" id="{06D3921B-65C1-ED71-A55E-DC5F3508DE44}"/>
                   </a:ext>
                 </a:extLst>
               </p:cNvPr>
@@ -4385,9 +4392,7 @@
               <a:prstGeom prst="roundRect">
                 <a:avLst/>
               </a:prstGeom>
-              <a:solidFill>
-                <a:srgbClr val="00387D"/>
-              </a:solidFill>
+              <a:grpFill/>
               <a:ln>
                 <a:noFill/>
               </a:ln>
@@ -4419,10 +4424,10 @@
           </p:sp>
           <p:sp>
             <p:nvSpPr>
-              <p:cNvPr id="25" name="角丸四角形 24">
+              <p:cNvPr id="31" name="角丸四角形 30">
                 <a:extLst>
                   <a:ext uri="{FF2B5EF4-FFF2-40B4-BE49-F238E27FC236}">
-                    <a16:creationId xmlns:a16="http://schemas.microsoft.com/office/drawing/2014/main" id="{FD3FCAD0-7421-9317-6005-EE1AD4E807FC}"/>
+                    <a16:creationId xmlns:a16="http://schemas.microsoft.com/office/drawing/2014/main" id="{D3024756-69AA-8304-90CB-3FA8DE22B5B1}"/>
                   </a:ext>
                 </a:extLst>
               </p:cNvPr>
@@ -4437,9 +4442,7 @@
               <a:prstGeom prst="roundRect">
                 <a:avLst/>
               </a:prstGeom>
-              <a:solidFill>
-                <a:srgbClr val="00387D"/>
-              </a:solidFill>
+              <a:grpFill/>
               <a:ln>
                 <a:noFill/>
               </a:ln>
@@ -4472,10 +4475,10 @@
         </p:grpSp>
         <p:pic>
           <p:nvPicPr>
-            <p:cNvPr id="20" name="グラフィックス 19">
+            <p:cNvPr id="26" name="グラフィックス 25">
               <a:extLst>
                 <a:ext uri="{FF2B5EF4-FFF2-40B4-BE49-F238E27FC236}">
-                  <a16:creationId xmlns:a16="http://schemas.microsoft.com/office/drawing/2014/main" id="{975B3A30-D566-4232-002A-4015DDD5D26F}"/>
+                  <a16:creationId xmlns:a16="http://schemas.microsoft.com/office/drawing/2014/main" id="{82745E80-282B-8BF8-29AE-6E780217275E}"/>
                 </a:ext>
               </a:extLst>
             </p:cNvPr>

--- a/resources/figures.pptx
+++ b/resources/figures.pptx
@@ -259,7 +259,7 @@
           <a:p>
             <a:fld id="{D2CE5F5D-CBC0-9A47-80CC-E2A0D4A9A78B}" type="datetimeFigureOut">
               <a:rPr kumimoji="1" lang="ja-JP" altLang="en-US" smtClean="0"/>
-              <a:t>2026/5/18</a:t>
+              <a:t>2026/5/19</a:t>
             </a:fld>
             <a:endParaRPr kumimoji="1" lang="ja-JP" altLang="en-US"/>
           </a:p>
@@ -489,7 +489,7 @@
           <a:p>
             <a:fld id="{D2CE5F5D-CBC0-9A47-80CC-E2A0D4A9A78B}" type="datetimeFigureOut">
               <a:rPr kumimoji="1" lang="ja-JP" altLang="en-US" smtClean="0"/>
-              <a:t>2026/5/18</a:t>
+              <a:t>2026/5/19</a:t>
             </a:fld>
             <a:endParaRPr kumimoji="1" lang="ja-JP" altLang="en-US"/>
           </a:p>
@@ -729,7 +729,7 @@
           <a:p>
             <a:fld id="{D2CE5F5D-CBC0-9A47-80CC-E2A0D4A9A78B}" type="datetimeFigureOut">
               <a:rPr kumimoji="1" lang="ja-JP" altLang="en-US" smtClean="0"/>
-              <a:t>2026/5/18</a:t>
+              <a:t>2026/5/19</a:t>
             </a:fld>
             <a:endParaRPr kumimoji="1" lang="ja-JP" altLang="en-US"/>
           </a:p>
@@ -959,7 +959,7 @@
           <a:p>
             <a:fld id="{D2CE5F5D-CBC0-9A47-80CC-E2A0D4A9A78B}" type="datetimeFigureOut">
               <a:rPr kumimoji="1" lang="ja-JP" altLang="en-US" smtClean="0"/>
-              <a:t>2026/5/18</a:t>
+              <a:t>2026/5/19</a:t>
             </a:fld>
             <a:endParaRPr kumimoji="1" lang="ja-JP" altLang="en-US"/>
           </a:p>
@@ -1234,7 +1234,7 @@
           <a:p>
             <a:fld id="{D2CE5F5D-CBC0-9A47-80CC-E2A0D4A9A78B}" type="datetimeFigureOut">
               <a:rPr kumimoji="1" lang="ja-JP" altLang="en-US" smtClean="0"/>
-              <a:t>2026/5/18</a:t>
+              <a:t>2026/5/19</a:t>
             </a:fld>
             <a:endParaRPr kumimoji="1" lang="ja-JP" altLang="en-US"/>
           </a:p>
@@ -1563,7 +1563,7 @@
           <a:p>
             <a:fld id="{D2CE5F5D-CBC0-9A47-80CC-E2A0D4A9A78B}" type="datetimeFigureOut">
               <a:rPr kumimoji="1" lang="ja-JP" altLang="en-US" smtClean="0"/>
-              <a:t>2026/5/18</a:t>
+              <a:t>2026/5/19</a:t>
             </a:fld>
             <a:endParaRPr kumimoji="1" lang="ja-JP" altLang="en-US"/>
           </a:p>
@@ -2039,7 +2039,7 @@
           <a:p>
             <a:fld id="{D2CE5F5D-CBC0-9A47-80CC-E2A0D4A9A78B}" type="datetimeFigureOut">
               <a:rPr kumimoji="1" lang="ja-JP" altLang="en-US" smtClean="0"/>
-              <a:t>2026/5/18</a:t>
+              <a:t>2026/5/19</a:t>
             </a:fld>
             <a:endParaRPr kumimoji="1" lang="ja-JP" altLang="en-US"/>
           </a:p>
@@ -2180,7 +2180,7 @@
           <a:p>
             <a:fld id="{D2CE5F5D-CBC0-9A47-80CC-E2A0D4A9A78B}" type="datetimeFigureOut">
               <a:rPr kumimoji="1" lang="ja-JP" altLang="en-US" smtClean="0"/>
-              <a:t>2026/5/18</a:t>
+              <a:t>2026/5/19</a:t>
             </a:fld>
             <a:endParaRPr kumimoji="1" lang="ja-JP" altLang="en-US"/>
           </a:p>
@@ -2293,7 +2293,7 @@
           <a:p>
             <a:fld id="{D2CE5F5D-CBC0-9A47-80CC-E2A0D4A9A78B}" type="datetimeFigureOut">
               <a:rPr kumimoji="1" lang="ja-JP" altLang="en-US" smtClean="0"/>
-              <a:t>2026/5/18</a:t>
+              <a:t>2026/5/19</a:t>
             </a:fld>
             <a:endParaRPr kumimoji="1" lang="ja-JP" altLang="en-US"/>
           </a:p>
@@ -2636,7 +2636,7 @@
           <a:p>
             <a:fld id="{D2CE5F5D-CBC0-9A47-80CC-E2A0D4A9A78B}" type="datetimeFigureOut">
               <a:rPr kumimoji="1" lang="ja-JP" altLang="en-US" smtClean="0"/>
-              <a:t>2026/5/18</a:t>
+              <a:t>2026/5/19</a:t>
             </a:fld>
             <a:endParaRPr kumimoji="1" lang="ja-JP" altLang="en-US"/>
           </a:p>
@@ -2924,7 +2924,7 @@
           <a:p>
             <a:fld id="{D2CE5F5D-CBC0-9A47-80CC-E2A0D4A9A78B}" type="datetimeFigureOut">
               <a:rPr kumimoji="1" lang="ja-JP" altLang="en-US" smtClean="0"/>
-              <a:t>2026/5/18</a:t>
+              <a:t>2026/5/19</a:t>
             </a:fld>
             <a:endParaRPr kumimoji="1" lang="ja-JP" altLang="en-US"/>
           </a:p>
@@ -3197,7 +3197,7 @@
           <a:p>
             <a:fld id="{D2CE5F5D-CBC0-9A47-80CC-E2A0D4A9A78B}" type="datetimeFigureOut">
               <a:rPr kumimoji="1" lang="ja-JP" altLang="en-US" smtClean="0"/>
-              <a:t>2026/5/18</a:t>
+              <a:t>2026/5/19</a:t>
             </a:fld>
             <a:endParaRPr kumimoji="1" lang="ja-JP" altLang="en-US"/>
           </a:p>
@@ -3628,7 +3628,7 @@
         </p:nvGrpSpPr>
         <p:grpSpPr>
           <a:xfrm>
-            <a:off x="3299783" y="1142976"/>
+            <a:off x="343065" y="684168"/>
             <a:ext cx="1800000" cy="1800000"/>
             <a:chOff x="3299783" y="1142976"/>
             <a:chExt cx="1800000" cy="1800000"/>
@@ -3687,55 +3687,6 @@
             <a:p>
               <a:pPr algn="ctr"/>
               <a:endParaRPr kumimoji="1" lang="ja-JP" altLang="en-US"/>
-            </a:p>
-          </p:txBody>
-        </p:sp>
-        <p:sp>
-          <p:nvSpPr>
-            <p:cNvPr id="7" name="テキスト ボックス 6">
-              <a:extLst>
-                <a:ext uri="{FF2B5EF4-FFF2-40B4-BE49-F238E27FC236}">
-                  <a16:creationId xmlns:a16="http://schemas.microsoft.com/office/drawing/2014/main" id="{DD0D22B0-E65E-7375-B58E-3886997CDC57}"/>
-                </a:ext>
-              </a:extLst>
-            </p:cNvPr>
-            <p:cNvSpPr txBox="1"/>
-            <p:nvPr/>
-          </p:nvSpPr>
-          <p:spPr>
-            <a:xfrm>
-              <a:off x="3645785" y="2296645"/>
-              <a:ext cx="1107996" cy="646331"/>
-            </a:xfrm>
-            <a:prstGeom prst="rect">
-              <a:avLst/>
-            </a:prstGeom>
-            <a:noFill/>
-          </p:spPr>
-          <p:txBody>
-            <a:bodyPr wrap="none" rtlCol="0">
-              <a:spAutoFit/>
-            </a:bodyPr>
-            <a:lstStyle/>
-            <a:p>
-              <a:pPr algn="ctr"/>
-              <a:r>
-                <a:rPr kumimoji="1" lang="en-US" altLang="ja-JP" sz="3600" dirty="0">
-                  <a:solidFill>
-                    <a:schemeClr val="bg1"/>
-                  </a:solidFill>
-                  <a:latin typeface="Times New Roman" panose="02020603050405020304" pitchFamily="18" charset="0"/>
-                  <a:cs typeface="Times New Roman" panose="02020603050405020304" pitchFamily="18" charset="0"/>
-                </a:rPr>
-                <a:t>KSU</a:t>
-              </a:r>
-              <a:endParaRPr kumimoji="1" lang="ja-JP" altLang="en-US" sz="3600">
-                <a:solidFill>
-                  <a:schemeClr val="bg1"/>
-                </a:solidFill>
-                <a:latin typeface="Times New Roman" panose="02020603050405020304" pitchFamily="18" charset="0"/>
-                <a:cs typeface="Times New Roman" panose="02020603050405020304" pitchFamily="18" charset="0"/>
-              </a:endParaRPr>
             </a:p>
           </p:txBody>
         </p:sp>
@@ -4503,6 +4454,5686 @@
             <a:xfrm>
               <a:off x="3862835" y="1477212"/>
               <a:ext cx="720000" cy="720000"/>
+            </a:xfrm>
+            <a:prstGeom prst="rect">
+              <a:avLst/>
+            </a:prstGeom>
+          </p:spPr>
+        </p:pic>
+      </p:grpSp>
+      <p:sp>
+        <p:nvSpPr>
+          <p:cNvPr id="17" name="角丸四角形 16">
+            <a:extLst>
+              <a:ext uri="{FF2B5EF4-FFF2-40B4-BE49-F238E27FC236}">
+                <a16:creationId xmlns:a16="http://schemas.microsoft.com/office/drawing/2014/main" id="{7E1195F4-268D-C30E-1410-AF276B81DB09}"/>
+              </a:ext>
+            </a:extLst>
+          </p:cNvPr>
+          <p:cNvSpPr>
+            <a:spLocks noChangeAspect="1"/>
+          </p:cNvSpPr>
+          <p:nvPr/>
+        </p:nvSpPr>
+        <p:spPr>
+          <a:xfrm>
+            <a:off x="1538868" y="4650059"/>
+            <a:ext cx="1080000" cy="1080000"/>
+          </a:xfrm>
+          <a:prstGeom prst="roundRect">
+            <a:avLst>
+              <a:gd name="adj" fmla="val 7374"/>
+            </a:avLst>
+          </a:prstGeom>
+          <a:solidFill>
+            <a:schemeClr val="bg1"/>
+          </a:solidFill>
+          <a:ln>
+            <a:solidFill>
+              <a:srgbClr val="00387D"/>
+            </a:solidFill>
+          </a:ln>
+        </p:spPr>
+        <p:style>
+          <a:lnRef idx="2">
+            <a:schemeClr val="accent1">
+              <a:shade val="15000"/>
+            </a:schemeClr>
+          </a:lnRef>
+          <a:fillRef idx="1">
+            <a:schemeClr val="accent1"/>
+          </a:fillRef>
+          <a:effectRef idx="0">
+            <a:schemeClr val="accent1"/>
+          </a:effectRef>
+          <a:fontRef idx="minor">
+            <a:schemeClr val="lt1"/>
+          </a:fontRef>
+        </p:style>
+        <p:txBody>
+          <a:bodyPr rtlCol="0" anchor="ctr"/>
+          <a:lstStyle/>
+          <a:p>
+            <a:pPr algn="ctr"/>
+            <a:endParaRPr kumimoji="1" lang="ja-JP" altLang="en-US"/>
+          </a:p>
+        </p:txBody>
+      </p:sp>
+      <p:grpSp>
+        <p:nvGrpSpPr>
+          <p:cNvPr id="36" name="グループ化 35">
+            <a:extLst>
+              <a:ext uri="{FF2B5EF4-FFF2-40B4-BE49-F238E27FC236}">
+                <a16:creationId xmlns:a16="http://schemas.microsoft.com/office/drawing/2014/main" id="{226AD7EC-6FED-A46C-0F98-11B576728E0B}"/>
+              </a:ext>
+            </a:extLst>
+          </p:cNvPr>
+          <p:cNvGrpSpPr/>
+          <p:nvPr/>
+        </p:nvGrpSpPr>
+        <p:grpSpPr>
+          <a:xfrm>
+            <a:off x="1630675" y="4794059"/>
+            <a:ext cx="896386" cy="792000"/>
+            <a:chOff x="1672682" y="4783874"/>
+            <a:chExt cx="896386" cy="792000"/>
+          </a:xfrm>
+        </p:grpSpPr>
+        <p:grpSp>
+          <p:nvGrpSpPr>
+            <p:cNvPr id="23" name="グループ化 22">
+              <a:extLst>
+                <a:ext uri="{FF2B5EF4-FFF2-40B4-BE49-F238E27FC236}">
+                  <a16:creationId xmlns:a16="http://schemas.microsoft.com/office/drawing/2014/main" id="{A4D540D3-8261-DC6C-1C49-BC78F8471F20}"/>
+                </a:ext>
+              </a:extLst>
+            </p:cNvPr>
+            <p:cNvGrpSpPr/>
+            <p:nvPr/>
+          </p:nvGrpSpPr>
+          <p:grpSpPr>
+            <a:xfrm>
+              <a:off x="1672682" y="4783874"/>
+              <a:ext cx="252000" cy="792000"/>
+              <a:chOff x="1672682" y="4783874"/>
+              <a:chExt cx="252000" cy="792000"/>
+            </a:xfrm>
+          </p:grpSpPr>
+          <p:sp>
+            <p:nvSpPr>
+              <p:cNvPr id="18" name="円/楕円 17">
+                <a:extLst>
+                  <a:ext uri="{FF2B5EF4-FFF2-40B4-BE49-F238E27FC236}">
+                    <a16:creationId xmlns:a16="http://schemas.microsoft.com/office/drawing/2014/main" id="{ED59A18A-7934-8B4B-BF4B-50B8CF490715}"/>
+                  </a:ext>
+                </a:extLst>
+              </p:cNvPr>
+              <p:cNvSpPr>
+                <a:spLocks noChangeAspect="1"/>
+              </p:cNvSpPr>
+              <p:nvPr/>
+            </p:nvSpPr>
+            <p:spPr>
+              <a:xfrm>
+                <a:off x="1672682" y="4783874"/>
+                <a:ext cx="252000" cy="252000"/>
+              </a:xfrm>
+              <a:prstGeom prst="ellipse">
+                <a:avLst/>
+              </a:prstGeom>
+              <a:solidFill>
+                <a:srgbClr val="00387D"/>
+              </a:solidFill>
+              <a:ln>
+                <a:noFill/>
+              </a:ln>
+            </p:spPr>
+            <p:style>
+              <a:lnRef idx="2">
+                <a:schemeClr val="accent1">
+                  <a:shade val="15000"/>
+                </a:schemeClr>
+              </a:lnRef>
+              <a:fillRef idx="1">
+                <a:schemeClr val="accent1"/>
+              </a:fillRef>
+              <a:effectRef idx="0">
+                <a:schemeClr val="accent1"/>
+              </a:effectRef>
+              <a:fontRef idx="minor">
+                <a:schemeClr val="lt1"/>
+              </a:fontRef>
+            </p:style>
+            <p:txBody>
+              <a:bodyPr rtlCol="0" anchor="ctr"/>
+              <a:lstStyle/>
+              <a:p>
+                <a:pPr algn="ctr"/>
+                <a:endParaRPr kumimoji="1" lang="ja-JP" altLang="en-US"/>
+              </a:p>
+            </p:txBody>
+          </p:sp>
+          <p:sp>
+            <p:nvSpPr>
+              <p:cNvPr id="22" name="片側の 2 つの角を丸めた四角形 21">
+                <a:extLst>
+                  <a:ext uri="{FF2B5EF4-FFF2-40B4-BE49-F238E27FC236}">
+                    <a16:creationId xmlns:a16="http://schemas.microsoft.com/office/drawing/2014/main" id="{E306AFE6-2992-5008-BB56-F5C621FD3CC9}"/>
+                  </a:ext>
+                </a:extLst>
+              </p:cNvPr>
+              <p:cNvSpPr/>
+              <p:nvPr/>
+            </p:nvSpPr>
+            <p:spPr>
+              <a:xfrm>
+                <a:off x="1672682" y="5035874"/>
+                <a:ext cx="252000" cy="540000"/>
+              </a:xfrm>
+              <a:prstGeom prst="round2SameRect">
+                <a:avLst>
+                  <a:gd name="adj1" fmla="val 48873"/>
+                  <a:gd name="adj2" fmla="val 0"/>
+                </a:avLst>
+              </a:prstGeom>
+              <a:solidFill>
+                <a:srgbClr val="00387D"/>
+              </a:solidFill>
+              <a:ln>
+                <a:noFill/>
+              </a:ln>
+            </p:spPr>
+            <p:style>
+              <a:lnRef idx="2">
+                <a:schemeClr val="accent1">
+                  <a:shade val="15000"/>
+                </a:schemeClr>
+              </a:lnRef>
+              <a:fillRef idx="1">
+                <a:schemeClr val="accent1"/>
+              </a:fillRef>
+              <a:effectRef idx="0">
+                <a:schemeClr val="accent1"/>
+              </a:effectRef>
+              <a:fontRef idx="minor">
+                <a:schemeClr val="lt1"/>
+              </a:fontRef>
+            </p:style>
+            <p:txBody>
+              <a:bodyPr rtlCol="0" anchor="ctr"/>
+              <a:lstStyle/>
+              <a:p>
+                <a:pPr algn="ctr"/>
+                <a:endParaRPr kumimoji="1" lang="ja-JP" altLang="en-US"/>
+              </a:p>
+            </p:txBody>
+          </p:sp>
+        </p:grpSp>
+        <p:grpSp>
+          <p:nvGrpSpPr>
+            <p:cNvPr id="24" name="グループ化 23">
+              <a:extLst>
+                <a:ext uri="{FF2B5EF4-FFF2-40B4-BE49-F238E27FC236}">
+                  <a16:creationId xmlns:a16="http://schemas.microsoft.com/office/drawing/2014/main" id="{A690B9A9-563D-9E32-8AA8-138D5074D980}"/>
+                </a:ext>
+              </a:extLst>
+            </p:cNvPr>
+            <p:cNvGrpSpPr/>
+            <p:nvPr/>
+          </p:nvGrpSpPr>
+          <p:grpSpPr>
+            <a:xfrm>
+              <a:off x="1994875" y="4783874"/>
+              <a:ext cx="252000" cy="792000"/>
+              <a:chOff x="1672682" y="4783874"/>
+              <a:chExt cx="252000" cy="792000"/>
+            </a:xfrm>
+          </p:grpSpPr>
+          <p:sp>
+            <p:nvSpPr>
+              <p:cNvPr id="25" name="円/楕円 24">
+                <a:extLst>
+                  <a:ext uri="{FF2B5EF4-FFF2-40B4-BE49-F238E27FC236}">
+                    <a16:creationId xmlns:a16="http://schemas.microsoft.com/office/drawing/2014/main" id="{9D61C9A9-CEA8-854F-DE59-34CFFA7B76AF}"/>
+                  </a:ext>
+                </a:extLst>
+              </p:cNvPr>
+              <p:cNvSpPr>
+                <a:spLocks noChangeAspect="1"/>
+              </p:cNvSpPr>
+              <p:nvPr/>
+            </p:nvSpPr>
+            <p:spPr>
+              <a:xfrm>
+                <a:off x="1672682" y="4783874"/>
+                <a:ext cx="252000" cy="252000"/>
+              </a:xfrm>
+              <a:prstGeom prst="ellipse">
+                <a:avLst/>
+              </a:prstGeom>
+              <a:solidFill>
+                <a:srgbClr val="00387D"/>
+              </a:solidFill>
+              <a:ln>
+                <a:noFill/>
+              </a:ln>
+            </p:spPr>
+            <p:style>
+              <a:lnRef idx="2">
+                <a:schemeClr val="accent1">
+                  <a:shade val="15000"/>
+                </a:schemeClr>
+              </a:lnRef>
+              <a:fillRef idx="1">
+                <a:schemeClr val="accent1"/>
+              </a:fillRef>
+              <a:effectRef idx="0">
+                <a:schemeClr val="accent1"/>
+              </a:effectRef>
+              <a:fontRef idx="minor">
+                <a:schemeClr val="lt1"/>
+              </a:fontRef>
+            </p:style>
+            <p:txBody>
+              <a:bodyPr rtlCol="0" anchor="ctr"/>
+              <a:lstStyle/>
+              <a:p>
+                <a:pPr algn="ctr"/>
+                <a:endParaRPr kumimoji="1" lang="ja-JP" altLang="en-US"/>
+              </a:p>
+            </p:txBody>
+          </p:sp>
+          <p:sp>
+            <p:nvSpPr>
+              <p:cNvPr id="32" name="片側の 2 つの角を丸めた四角形 31">
+                <a:extLst>
+                  <a:ext uri="{FF2B5EF4-FFF2-40B4-BE49-F238E27FC236}">
+                    <a16:creationId xmlns:a16="http://schemas.microsoft.com/office/drawing/2014/main" id="{0FB3BCAE-7A10-3020-FA96-17ADB6E5632E}"/>
+                  </a:ext>
+                </a:extLst>
+              </p:cNvPr>
+              <p:cNvSpPr/>
+              <p:nvPr/>
+            </p:nvSpPr>
+            <p:spPr>
+              <a:xfrm>
+                <a:off x="1672682" y="5035874"/>
+                <a:ext cx="252000" cy="540000"/>
+              </a:xfrm>
+              <a:prstGeom prst="round2SameRect">
+                <a:avLst>
+                  <a:gd name="adj1" fmla="val 48873"/>
+                  <a:gd name="adj2" fmla="val 0"/>
+                </a:avLst>
+              </a:prstGeom>
+              <a:solidFill>
+                <a:srgbClr val="00387D"/>
+              </a:solidFill>
+              <a:ln>
+                <a:noFill/>
+              </a:ln>
+            </p:spPr>
+            <p:style>
+              <a:lnRef idx="2">
+                <a:schemeClr val="accent1">
+                  <a:shade val="15000"/>
+                </a:schemeClr>
+              </a:lnRef>
+              <a:fillRef idx="1">
+                <a:schemeClr val="accent1"/>
+              </a:fillRef>
+              <a:effectRef idx="0">
+                <a:schemeClr val="accent1"/>
+              </a:effectRef>
+              <a:fontRef idx="minor">
+                <a:schemeClr val="lt1"/>
+              </a:fontRef>
+            </p:style>
+            <p:txBody>
+              <a:bodyPr rtlCol="0" anchor="ctr"/>
+              <a:lstStyle/>
+              <a:p>
+                <a:pPr algn="ctr"/>
+                <a:endParaRPr kumimoji="1" lang="ja-JP" altLang="en-US"/>
+              </a:p>
+            </p:txBody>
+          </p:sp>
+        </p:grpSp>
+        <p:grpSp>
+          <p:nvGrpSpPr>
+            <p:cNvPr id="33" name="グループ化 32">
+              <a:extLst>
+                <a:ext uri="{FF2B5EF4-FFF2-40B4-BE49-F238E27FC236}">
+                  <a16:creationId xmlns:a16="http://schemas.microsoft.com/office/drawing/2014/main" id="{6CB3C9C2-D427-67B0-E048-B508D8935E2D}"/>
+                </a:ext>
+              </a:extLst>
+            </p:cNvPr>
+            <p:cNvGrpSpPr/>
+            <p:nvPr/>
+          </p:nvGrpSpPr>
+          <p:grpSpPr>
+            <a:xfrm>
+              <a:off x="2317068" y="4783874"/>
+              <a:ext cx="252000" cy="792000"/>
+              <a:chOff x="1672682" y="4783874"/>
+              <a:chExt cx="252000" cy="792000"/>
+            </a:xfrm>
+          </p:grpSpPr>
+          <p:sp>
+            <p:nvSpPr>
+              <p:cNvPr id="34" name="円/楕円 33">
+                <a:extLst>
+                  <a:ext uri="{FF2B5EF4-FFF2-40B4-BE49-F238E27FC236}">
+                    <a16:creationId xmlns:a16="http://schemas.microsoft.com/office/drawing/2014/main" id="{A37FC1EF-59A5-5D73-ED7A-4DC4FE09254B}"/>
+                  </a:ext>
+                </a:extLst>
+              </p:cNvPr>
+              <p:cNvSpPr>
+                <a:spLocks noChangeAspect="1"/>
+              </p:cNvSpPr>
+              <p:nvPr/>
+            </p:nvSpPr>
+            <p:spPr>
+              <a:xfrm>
+                <a:off x="1672682" y="4783874"/>
+                <a:ext cx="252000" cy="252000"/>
+              </a:xfrm>
+              <a:prstGeom prst="ellipse">
+                <a:avLst/>
+              </a:prstGeom>
+              <a:solidFill>
+                <a:srgbClr val="00387D"/>
+              </a:solidFill>
+              <a:ln>
+                <a:noFill/>
+              </a:ln>
+            </p:spPr>
+            <p:style>
+              <a:lnRef idx="2">
+                <a:schemeClr val="accent1">
+                  <a:shade val="15000"/>
+                </a:schemeClr>
+              </a:lnRef>
+              <a:fillRef idx="1">
+                <a:schemeClr val="accent1"/>
+              </a:fillRef>
+              <a:effectRef idx="0">
+                <a:schemeClr val="accent1"/>
+              </a:effectRef>
+              <a:fontRef idx="minor">
+                <a:schemeClr val="lt1"/>
+              </a:fontRef>
+            </p:style>
+            <p:txBody>
+              <a:bodyPr rtlCol="0" anchor="ctr"/>
+              <a:lstStyle/>
+              <a:p>
+                <a:pPr algn="ctr"/>
+                <a:endParaRPr kumimoji="1" lang="ja-JP" altLang="en-US"/>
+              </a:p>
+            </p:txBody>
+          </p:sp>
+          <p:sp>
+            <p:nvSpPr>
+              <p:cNvPr id="35" name="片側の 2 つの角を丸めた四角形 34">
+                <a:extLst>
+                  <a:ext uri="{FF2B5EF4-FFF2-40B4-BE49-F238E27FC236}">
+                    <a16:creationId xmlns:a16="http://schemas.microsoft.com/office/drawing/2014/main" id="{CD2259AE-C0B3-BBF8-9282-92A96579785C}"/>
+                  </a:ext>
+                </a:extLst>
+              </p:cNvPr>
+              <p:cNvSpPr/>
+              <p:nvPr/>
+            </p:nvSpPr>
+            <p:spPr>
+              <a:xfrm>
+                <a:off x="1672682" y="5035874"/>
+                <a:ext cx="252000" cy="540000"/>
+              </a:xfrm>
+              <a:prstGeom prst="round2SameRect">
+                <a:avLst>
+                  <a:gd name="adj1" fmla="val 48873"/>
+                  <a:gd name="adj2" fmla="val 0"/>
+                </a:avLst>
+              </a:prstGeom>
+              <a:solidFill>
+                <a:srgbClr val="00387D"/>
+              </a:solidFill>
+              <a:ln>
+                <a:noFill/>
+              </a:ln>
+            </p:spPr>
+            <p:style>
+              <a:lnRef idx="2">
+                <a:schemeClr val="accent1">
+                  <a:shade val="15000"/>
+                </a:schemeClr>
+              </a:lnRef>
+              <a:fillRef idx="1">
+                <a:schemeClr val="accent1"/>
+              </a:fillRef>
+              <a:effectRef idx="0">
+                <a:schemeClr val="accent1"/>
+              </a:effectRef>
+              <a:fontRef idx="minor">
+                <a:schemeClr val="lt1"/>
+              </a:fontRef>
+            </p:style>
+            <p:txBody>
+              <a:bodyPr rtlCol="0" anchor="ctr"/>
+              <a:lstStyle/>
+              <a:p>
+                <a:pPr algn="ctr"/>
+                <a:endParaRPr kumimoji="1" lang="ja-JP" altLang="en-US"/>
+              </a:p>
+            </p:txBody>
+          </p:sp>
+        </p:grpSp>
+      </p:grpSp>
+      <p:sp>
+        <p:nvSpPr>
+          <p:cNvPr id="37" name="角丸四角形 36">
+            <a:extLst>
+              <a:ext uri="{FF2B5EF4-FFF2-40B4-BE49-F238E27FC236}">
+                <a16:creationId xmlns:a16="http://schemas.microsoft.com/office/drawing/2014/main" id="{DB5580FF-71D2-20E2-CEFA-5AD127C2BF92}"/>
+              </a:ext>
+            </a:extLst>
+          </p:cNvPr>
+          <p:cNvSpPr>
+            <a:spLocks noChangeAspect="1"/>
+          </p:cNvSpPr>
+          <p:nvPr/>
+        </p:nvSpPr>
+        <p:spPr>
+          <a:xfrm>
+            <a:off x="2827505" y="4650059"/>
+            <a:ext cx="1080000" cy="1080000"/>
+          </a:xfrm>
+          <a:prstGeom prst="roundRect">
+            <a:avLst>
+              <a:gd name="adj" fmla="val 7374"/>
+            </a:avLst>
+          </a:prstGeom>
+          <a:solidFill>
+            <a:schemeClr val="bg1"/>
+          </a:solidFill>
+          <a:ln>
+            <a:solidFill>
+              <a:srgbClr val="00387D"/>
+            </a:solidFill>
+          </a:ln>
+        </p:spPr>
+        <p:style>
+          <a:lnRef idx="2">
+            <a:schemeClr val="accent1">
+              <a:shade val="15000"/>
+            </a:schemeClr>
+          </a:lnRef>
+          <a:fillRef idx="1">
+            <a:schemeClr val="accent1"/>
+          </a:fillRef>
+          <a:effectRef idx="0">
+            <a:schemeClr val="accent1"/>
+          </a:effectRef>
+          <a:fontRef idx="minor">
+            <a:schemeClr val="lt1"/>
+          </a:fontRef>
+        </p:style>
+        <p:txBody>
+          <a:bodyPr rtlCol="0" anchor="ctr"/>
+          <a:lstStyle/>
+          <a:p>
+            <a:pPr algn="ctr"/>
+            <a:endParaRPr kumimoji="1" lang="ja-JP" altLang="en-US"/>
+          </a:p>
+        </p:txBody>
+      </p:sp>
+      <p:grpSp>
+        <p:nvGrpSpPr>
+          <p:cNvPr id="38" name="グループ化 37">
+            <a:extLst>
+              <a:ext uri="{FF2B5EF4-FFF2-40B4-BE49-F238E27FC236}">
+                <a16:creationId xmlns:a16="http://schemas.microsoft.com/office/drawing/2014/main" id="{EC2DF077-C833-D8B1-C947-C42453EC3F35}"/>
+              </a:ext>
+            </a:extLst>
+          </p:cNvPr>
+          <p:cNvGrpSpPr/>
+          <p:nvPr/>
+        </p:nvGrpSpPr>
+        <p:grpSpPr>
+          <a:xfrm>
+            <a:off x="2919312" y="4794059"/>
+            <a:ext cx="896386" cy="792000"/>
+            <a:chOff x="1672682" y="4783874"/>
+            <a:chExt cx="896386" cy="792000"/>
+          </a:xfrm>
+        </p:grpSpPr>
+        <p:grpSp>
+          <p:nvGrpSpPr>
+            <p:cNvPr id="39" name="グループ化 38">
+              <a:extLst>
+                <a:ext uri="{FF2B5EF4-FFF2-40B4-BE49-F238E27FC236}">
+                  <a16:creationId xmlns:a16="http://schemas.microsoft.com/office/drawing/2014/main" id="{F4D42457-F9C1-2D44-15B5-26C7D19AF449}"/>
+                </a:ext>
+              </a:extLst>
+            </p:cNvPr>
+            <p:cNvGrpSpPr/>
+            <p:nvPr/>
+          </p:nvGrpSpPr>
+          <p:grpSpPr>
+            <a:xfrm>
+              <a:off x="1672682" y="4783874"/>
+              <a:ext cx="252000" cy="792000"/>
+              <a:chOff x="1672682" y="4783874"/>
+              <a:chExt cx="252000" cy="792000"/>
+            </a:xfrm>
+          </p:grpSpPr>
+          <p:sp>
+            <p:nvSpPr>
+              <p:cNvPr id="46" name="円/楕円 45">
+                <a:extLst>
+                  <a:ext uri="{FF2B5EF4-FFF2-40B4-BE49-F238E27FC236}">
+                    <a16:creationId xmlns:a16="http://schemas.microsoft.com/office/drawing/2014/main" id="{DD7012CC-F0BB-9ECD-233B-D15A5E540BCA}"/>
+                  </a:ext>
+                </a:extLst>
+              </p:cNvPr>
+              <p:cNvSpPr>
+                <a:spLocks noChangeAspect="1"/>
+              </p:cNvSpPr>
+              <p:nvPr/>
+            </p:nvSpPr>
+            <p:spPr>
+              <a:xfrm>
+                <a:off x="1672682" y="4783874"/>
+                <a:ext cx="252000" cy="252000"/>
+              </a:xfrm>
+              <a:prstGeom prst="ellipse">
+                <a:avLst/>
+              </a:prstGeom>
+              <a:solidFill>
+                <a:srgbClr val="00387D"/>
+              </a:solidFill>
+              <a:ln>
+                <a:noFill/>
+              </a:ln>
+            </p:spPr>
+            <p:style>
+              <a:lnRef idx="2">
+                <a:schemeClr val="accent1">
+                  <a:shade val="15000"/>
+                </a:schemeClr>
+              </a:lnRef>
+              <a:fillRef idx="1">
+                <a:schemeClr val="accent1"/>
+              </a:fillRef>
+              <a:effectRef idx="0">
+                <a:schemeClr val="accent1"/>
+              </a:effectRef>
+              <a:fontRef idx="minor">
+                <a:schemeClr val="lt1"/>
+              </a:fontRef>
+            </p:style>
+            <p:txBody>
+              <a:bodyPr rtlCol="0" anchor="ctr"/>
+              <a:lstStyle/>
+              <a:p>
+                <a:pPr algn="ctr"/>
+                <a:endParaRPr kumimoji="1" lang="ja-JP" altLang="en-US"/>
+              </a:p>
+            </p:txBody>
+          </p:sp>
+          <p:sp>
+            <p:nvSpPr>
+              <p:cNvPr id="47" name="片側の 2 つの角を丸めた四角形 46">
+                <a:extLst>
+                  <a:ext uri="{FF2B5EF4-FFF2-40B4-BE49-F238E27FC236}">
+                    <a16:creationId xmlns:a16="http://schemas.microsoft.com/office/drawing/2014/main" id="{8694A5D6-58B9-726B-4B62-05105F1C2D68}"/>
+                  </a:ext>
+                </a:extLst>
+              </p:cNvPr>
+              <p:cNvSpPr/>
+              <p:nvPr/>
+            </p:nvSpPr>
+            <p:spPr>
+              <a:xfrm>
+                <a:off x="1672682" y="5035874"/>
+                <a:ext cx="252000" cy="540000"/>
+              </a:xfrm>
+              <a:prstGeom prst="round2SameRect">
+                <a:avLst>
+                  <a:gd name="adj1" fmla="val 48873"/>
+                  <a:gd name="adj2" fmla="val 0"/>
+                </a:avLst>
+              </a:prstGeom>
+              <a:solidFill>
+                <a:srgbClr val="00387D"/>
+              </a:solidFill>
+              <a:ln>
+                <a:noFill/>
+              </a:ln>
+            </p:spPr>
+            <p:style>
+              <a:lnRef idx="2">
+                <a:schemeClr val="accent1">
+                  <a:shade val="15000"/>
+                </a:schemeClr>
+              </a:lnRef>
+              <a:fillRef idx="1">
+                <a:schemeClr val="accent1"/>
+              </a:fillRef>
+              <a:effectRef idx="0">
+                <a:schemeClr val="accent1"/>
+              </a:effectRef>
+              <a:fontRef idx="minor">
+                <a:schemeClr val="lt1"/>
+              </a:fontRef>
+            </p:style>
+            <p:txBody>
+              <a:bodyPr rtlCol="0" anchor="ctr"/>
+              <a:lstStyle/>
+              <a:p>
+                <a:pPr algn="ctr"/>
+                <a:endParaRPr kumimoji="1" lang="ja-JP" altLang="en-US"/>
+              </a:p>
+            </p:txBody>
+          </p:sp>
+        </p:grpSp>
+        <p:grpSp>
+          <p:nvGrpSpPr>
+            <p:cNvPr id="40" name="グループ化 39">
+              <a:extLst>
+                <a:ext uri="{FF2B5EF4-FFF2-40B4-BE49-F238E27FC236}">
+                  <a16:creationId xmlns:a16="http://schemas.microsoft.com/office/drawing/2014/main" id="{4ACFC37A-FC29-9FAA-D2E9-2FBEA681F7F1}"/>
+                </a:ext>
+              </a:extLst>
+            </p:cNvPr>
+            <p:cNvGrpSpPr/>
+            <p:nvPr/>
+          </p:nvGrpSpPr>
+          <p:grpSpPr>
+            <a:xfrm>
+              <a:off x="1994875" y="4783874"/>
+              <a:ext cx="252000" cy="792000"/>
+              <a:chOff x="1672682" y="4783874"/>
+              <a:chExt cx="252000" cy="792000"/>
+            </a:xfrm>
+          </p:grpSpPr>
+          <p:sp>
+            <p:nvSpPr>
+              <p:cNvPr id="44" name="円/楕円 43">
+                <a:extLst>
+                  <a:ext uri="{FF2B5EF4-FFF2-40B4-BE49-F238E27FC236}">
+                    <a16:creationId xmlns:a16="http://schemas.microsoft.com/office/drawing/2014/main" id="{F61A2E89-9733-EFB8-53B2-B273078F5268}"/>
+                  </a:ext>
+                </a:extLst>
+              </p:cNvPr>
+              <p:cNvSpPr>
+                <a:spLocks noChangeAspect="1"/>
+              </p:cNvSpPr>
+              <p:nvPr/>
+            </p:nvSpPr>
+            <p:spPr>
+              <a:xfrm>
+                <a:off x="1672682" y="4783874"/>
+                <a:ext cx="252000" cy="252000"/>
+              </a:xfrm>
+              <a:prstGeom prst="ellipse">
+                <a:avLst/>
+              </a:prstGeom>
+              <a:solidFill>
+                <a:srgbClr val="00387D"/>
+              </a:solidFill>
+              <a:ln>
+                <a:noFill/>
+              </a:ln>
+            </p:spPr>
+            <p:style>
+              <a:lnRef idx="2">
+                <a:schemeClr val="accent1">
+                  <a:shade val="15000"/>
+                </a:schemeClr>
+              </a:lnRef>
+              <a:fillRef idx="1">
+                <a:schemeClr val="accent1"/>
+              </a:fillRef>
+              <a:effectRef idx="0">
+                <a:schemeClr val="accent1"/>
+              </a:effectRef>
+              <a:fontRef idx="minor">
+                <a:schemeClr val="lt1"/>
+              </a:fontRef>
+            </p:style>
+            <p:txBody>
+              <a:bodyPr rtlCol="0" anchor="ctr"/>
+              <a:lstStyle/>
+              <a:p>
+                <a:pPr algn="ctr"/>
+                <a:endParaRPr kumimoji="1" lang="ja-JP" altLang="en-US"/>
+              </a:p>
+            </p:txBody>
+          </p:sp>
+          <p:sp>
+            <p:nvSpPr>
+              <p:cNvPr id="45" name="片側の 2 つの角を丸めた四角形 44">
+                <a:extLst>
+                  <a:ext uri="{FF2B5EF4-FFF2-40B4-BE49-F238E27FC236}">
+                    <a16:creationId xmlns:a16="http://schemas.microsoft.com/office/drawing/2014/main" id="{2DE2A8CD-53A5-D2A1-0C28-8A7F72F027B7}"/>
+                  </a:ext>
+                </a:extLst>
+              </p:cNvPr>
+              <p:cNvSpPr/>
+              <p:nvPr/>
+            </p:nvSpPr>
+            <p:spPr>
+              <a:xfrm>
+                <a:off x="1672682" y="5035874"/>
+                <a:ext cx="252000" cy="540000"/>
+              </a:xfrm>
+              <a:prstGeom prst="round2SameRect">
+                <a:avLst>
+                  <a:gd name="adj1" fmla="val 48873"/>
+                  <a:gd name="adj2" fmla="val 0"/>
+                </a:avLst>
+              </a:prstGeom>
+              <a:solidFill>
+                <a:srgbClr val="00387D"/>
+              </a:solidFill>
+              <a:ln>
+                <a:noFill/>
+              </a:ln>
+            </p:spPr>
+            <p:style>
+              <a:lnRef idx="2">
+                <a:schemeClr val="accent1">
+                  <a:shade val="15000"/>
+                </a:schemeClr>
+              </a:lnRef>
+              <a:fillRef idx="1">
+                <a:schemeClr val="accent1"/>
+              </a:fillRef>
+              <a:effectRef idx="0">
+                <a:schemeClr val="accent1"/>
+              </a:effectRef>
+              <a:fontRef idx="minor">
+                <a:schemeClr val="lt1"/>
+              </a:fontRef>
+            </p:style>
+            <p:txBody>
+              <a:bodyPr rtlCol="0" anchor="ctr"/>
+              <a:lstStyle/>
+              <a:p>
+                <a:pPr algn="ctr"/>
+                <a:endParaRPr kumimoji="1" lang="ja-JP" altLang="en-US"/>
+              </a:p>
+            </p:txBody>
+          </p:sp>
+        </p:grpSp>
+        <p:grpSp>
+          <p:nvGrpSpPr>
+            <p:cNvPr id="41" name="グループ化 40">
+              <a:extLst>
+                <a:ext uri="{FF2B5EF4-FFF2-40B4-BE49-F238E27FC236}">
+                  <a16:creationId xmlns:a16="http://schemas.microsoft.com/office/drawing/2014/main" id="{8127FA06-8711-B046-3D5E-929F0AA2D736}"/>
+                </a:ext>
+              </a:extLst>
+            </p:cNvPr>
+            <p:cNvGrpSpPr/>
+            <p:nvPr/>
+          </p:nvGrpSpPr>
+          <p:grpSpPr>
+            <a:xfrm>
+              <a:off x="2317068" y="4783874"/>
+              <a:ext cx="252000" cy="792000"/>
+              <a:chOff x="1672682" y="4783874"/>
+              <a:chExt cx="252000" cy="792000"/>
+            </a:xfrm>
+          </p:grpSpPr>
+          <p:sp>
+            <p:nvSpPr>
+              <p:cNvPr id="42" name="円/楕円 41">
+                <a:extLst>
+                  <a:ext uri="{FF2B5EF4-FFF2-40B4-BE49-F238E27FC236}">
+                    <a16:creationId xmlns:a16="http://schemas.microsoft.com/office/drawing/2014/main" id="{FFA0D19A-8E19-741F-A0A4-23F0647526C5}"/>
+                  </a:ext>
+                </a:extLst>
+              </p:cNvPr>
+              <p:cNvSpPr>
+                <a:spLocks noChangeAspect="1"/>
+              </p:cNvSpPr>
+              <p:nvPr/>
+            </p:nvSpPr>
+            <p:spPr>
+              <a:xfrm>
+                <a:off x="1672682" y="4783874"/>
+                <a:ext cx="252000" cy="252000"/>
+              </a:xfrm>
+              <a:prstGeom prst="ellipse">
+                <a:avLst/>
+              </a:prstGeom>
+              <a:solidFill>
+                <a:srgbClr val="00387D"/>
+              </a:solidFill>
+              <a:ln>
+                <a:noFill/>
+              </a:ln>
+            </p:spPr>
+            <p:style>
+              <a:lnRef idx="2">
+                <a:schemeClr val="accent1">
+                  <a:shade val="15000"/>
+                </a:schemeClr>
+              </a:lnRef>
+              <a:fillRef idx="1">
+                <a:schemeClr val="accent1"/>
+              </a:fillRef>
+              <a:effectRef idx="0">
+                <a:schemeClr val="accent1"/>
+              </a:effectRef>
+              <a:fontRef idx="minor">
+                <a:schemeClr val="lt1"/>
+              </a:fontRef>
+            </p:style>
+            <p:txBody>
+              <a:bodyPr rtlCol="0" anchor="ctr"/>
+              <a:lstStyle/>
+              <a:p>
+                <a:pPr algn="ctr"/>
+                <a:endParaRPr kumimoji="1" lang="ja-JP" altLang="en-US"/>
+              </a:p>
+            </p:txBody>
+          </p:sp>
+          <p:sp>
+            <p:nvSpPr>
+              <p:cNvPr id="43" name="片側の 2 つの角を丸めた四角形 42">
+                <a:extLst>
+                  <a:ext uri="{FF2B5EF4-FFF2-40B4-BE49-F238E27FC236}">
+                    <a16:creationId xmlns:a16="http://schemas.microsoft.com/office/drawing/2014/main" id="{CBDD02BF-CD66-6D7C-E68B-959991B06C85}"/>
+                  </a:ext>
+                </a:extLst>
+              </p:cNvPr>
+              <p:cNvSpPr/>
+              <p:nvPr/>
+            </p:nvSpPr>
+            <p:spPr>
+              <a:xfrm>
+                <a:off x="1672682" y="5035874"/>
+                <a:ext cx="252000" cy="540000"/>
+              </a:xfrm>
+              <a:prstGeom prst="round2SameRect">
+                <a:avLst>
+                  <a:gd name="adj1" fmla="val 48873"/>
+                  <a:gd name="adj2" fmla="val 0"/>
+                </a:avLst>
+              </a:prstGeom>
+              <a:solidFill>
+                <a:srgbClr val="00387D"/>
+              </a:solidFill>
+              <a:ln>
+                <a:noFill/>
+              </a:ln>
+            </p:spPr>
+            <p:style>
+              <a:lnRef idx="2">
+                <a:schemeClr val="accent1">
+                  <a:shade val="15000"/>
+                </a:schemeClr>
+              </a:lnRef>
+              <a:fillRef idx="1">
+                <a:schemeClr val="accent1"/>
+              </a:fillRef>
+              <a:effectRef idx="0">
+                <a:schemeClr val="accent1"/>
+              </a:effectRef>
+              <a:fontRef idx="minor">
+                <a:schemeClr val="lt1"/>
+              </a:fontRef>
+            </p:style>
+            <p:txBody>
+              <a:bodyPr rtlCol="0" anchor="ctr"/>
+              <a:lstStyle/>
+              <a:p>
+                <a:pPr algn="ctr"/>
+                <a:endParaRPr kumimoji="1" lang="ja-JP" altLang="en-US"/>
+              </a:p>
+            </p:txBody>
+          </p:sp>
+        </p:grpSp>
+      </p:grpSp>
+      <p:sp>
+        <p:nvSpPr>
+          <p:cNvPr id="48" name="角丸四角形 47">
+            <a:extLst>
+              <a:ext uri="{FF2B5EF4-FFF2-40B4-BE49-F238E27FC236}">
+                <a16:creationId xmlns:a16="http://schemas.microsoft.com/office/drawing/2014/main" id="{EAA0A984-90F6-38BF-FF71-24A998CE67BD}"/>
+              </a:ext>
+            </a:extLst>
+          </p:cNvPr>
+          <p:cNvSpPr>
+            <a:spLocks noChangeAspect="1"/>
+          </p:cNvSpPr>
+          <p:nvPr/>
+        </p:nvSpPr>
+        <p:spPr>
+          <a:xfrm>
+            <a:off x="4116142" y="4650059"/>
+            <a:ext cx="1080000" cy="1080000"/>
+          </a:xfrm>
+          <a:prstGeom prst="roundRect">
+            <a:avLst>
+              <a:gd name="adj" fmla="val 7374"/>
+            </a:avLst>
+          </a:prstGeom>
+          <a:solidFill>
+            <a:schemeClr val="bg1"/>
+          </a:solidFill>
+          <a:ln>
+            <a:solidFill>
+              <a:srgbClr val="00387D"/>
+            </a:solidFill>
+          </a:ln>
+        </p:spPr>
+        <p:style>
+          <a:lnRef idx="2">
+            <a:schemeClr val="accent1">
+              <a:shade val="15000"/>
+            </a:schemeClr>
+          </a:lnRef>
+          <a:fillRef idx="1">
+            <a:schemeClr val="accent1"/>
+          </a:fillRef>
+          <a:effectRef idx="0">
+            <a:schemeClr val="accent1"/>
+          </a:effectRef>
+          <a:fontRef idx="minor">
+            <a:schemeClr val="lt1"/>
+          </a:fontRef>
+        </p:style>
+        <p:txBody>
+          <a:bodyPr rtlCol="0" anchor="ctr"/>
+          <a:lstStyle/>
+          <a:p>
+            <a:pPr algn="ctr"/>
+            <a:endParaRPr kumimoji="1" lang="ja-JP" altLang="en-US"/>
+          </a:p>
+        </p:txBody>
+      </p:sp>
+      <p:grpSp>
+        <p:nvGrpSpPr>
+          <p:cNvPr id="49" name="グループ化 48">
+            <a:extLst>
+              <a:ext uri="{FF2B5EF4-FFF2-40B4-BE49-F238E27FC236}">
+                <a16:creationId xmlns:a16="http://schemas.microsoft.com/office/drawing/2014/main" id="{465456A1-F624-A979-1A8A-454E3E225FA6}"/>
+              </a:ext>
+            </a:extLst>
+          </p:cNvPr>
+          <p:cNvGrpSpPr/>
+          <p:nvPr/>
+        </p:nvGrpSpPr>
+        <p:grpSpPr>
+          <a:xfrm>
+            <a:off x="4207949" y="4794059"/>
+            <a:ext cx="896386" cy="792000"/>
+            <a:chOff x="1672682" y="4783874"/>
+            <a:chExt cx="896386" cy="792000"/>
+          </a:xfrm>
+        </p:grpSpPr>
+        <p:grpSp>
+          <p:nvGrpSpPr>
+            <p:cNvPr id="50" name="グループ化 49">
+              <a:extLst>
+                <a:ext uri="{FF2B5EF4-FFF2-40B4-BE49-F238E27FC236}">
+                  <a16:creationId xmlns:a16="http://schemas.microsoft.com/office/drawing/2014/main" id="{D6DD1CA1-ED1B-545E-4974-1AC757371C83}"/>
+                </a:ext>
+              </a:extLst>
+            </p:cNvPr>
+            <p:cNvGrpSpPr/>
+            <p:nvPr/>
+          </p:nvGrpSpPr>
+          <p:grpSpPr>
+            <a:xfrm>
+              <a:off x="1672682" y="4783874"/>
+              <a:ext cx="252000" cy="792000"/>
+              <a:chOff x="1672682" y="4783874"/>
+              <a:chExt cx="252000" cy="792000"/>
+            </a:xfrm>
+          </p:grpSpPr>
+          <p:sp>
+            <p:nvSpPr>
+              <p:cNvPr id="57" name="円/楕円 56">
+                <a:extLst>
+                  <a:ext uri="{FF2B5EF4-FFF2-40B4-BE49-F238E27FC236}">
+                    <a16:creationId xmlns:a16="http://schemas.microsoft.com/office/drawing/2014/main" id="{E4D16F12-D350-2900-DB83-F2056654DF94}"/>
+                  </a:ext>
+                </a:extLst>
+              </p:cNvPr>
+              <p:cNvSpPr>
+                <a:spLocks noChangeAspect="1"/>
+              </p:cNvSpPr>
+              <p:nvPr/>
+            </p:nvSpPr>
+            <p:spPr>
+              <a:xfrm>
+                <a:off x="1672682" y="4783874"/>
+                <a:ext cx="252000" cy="252000"/>
+              </a:xfrm>
+              <a:prstGeom prst="ellipse">
+                <a:avLst/>
+              </a:prstGeom>
+              <a:solidFill>
+                <a:srgbClr val="00387D"/>
+              </a:solidFill>
+              <a:ln>
+                <a:noFill/>
+              </a:ln>
+            </p:spPr>
+            <p:style>
+              <a:lnRef idx="2">
+                <a:schemeClr val="accent1">
+                  <a:shade val="15000"/>
+                </a:schemeClr>
+              </a:lnRef>
+              <a:fillRef idx="1">
+                <a:schemeClr val="accent1"/>
+              </a:fillRef>
+              <a:effectRef idx="0">
+                <a:schemeClr val="accent1"/>
+              </a:effectRef>
+              <a:fontRef idx="minor">
+                <a:schemeClr val="lt1"/>
+              </a:fontRef>
+            </p:style>
+            <p:txBody>
+              <a:bodyPr rtlCol="0" anchor="ctr"/>
+              <a:lstStyle/>
+              <a:p>
+                <a:pPr algn="ctr"/>
+                <a:endParaRPr kumimoji="1" lang="ja-JP" altLang="en-US"/>
+              </a:p>
+            </p:txBody>
+          </p:sp>
+          <p:sp>
+            <p:nvSpPr>
+              <p:cNvPr id="58" name="片側の 2 つの角を丸めた四角形 57">
+                <a:extLst>
+                  <a:ext uri="{FF2B5EF4-FFF2-40B4-BE49-F238E27FC236}">
+                    <a16:creationId xmlns:a16="http://schemas.microsoft.com/office/drawing/2014/main" id="{C64847BB-1375-7F11-7FDB-56FC23998E7E}"/>
+                  </a:ext>
+                </a:extLst>
+              </p:cNvPr>
+              <p:cNvSpPr/>
+              <p:nvPr/>
+            </p:nvSpPr>
+            <p:spPr>
+              <a:xfrm>
+                <a:off x="1672682" y="5035874"/>
+                <a:ext cx="252000" cy="540000"/>
+              </a:xfrm>
+              <a:prstGeom prst="round2SameRect">
+                <a:avLst>
+                  <a:gd name="adj1" fmla="val 48873"/>
+                  <a:gd name="adj2" fmla="val 0"/>
+                </a:avLst>
+              </a:prstGeom>
+              <a:solidFill>
+                <a:srgbClr val="00387D"/>
+              </a:solidFill>
+              <a:ln>
+                <a:noFill/>
+              </a:ln>
+            </p:spPr>
+            <p:style>
+              <a:lnRef idx="2">
+                <a:schemeClr val="accent1">
+                  <a:shade val="15000"/>
+                </a:schemeClr>
+              </a:lnRef>
+              <a:fillRef idx="1">
+                <a:schemeClr val="accent1"/>
+              </a:fillRef>
+              <a:effectRef idx="0">
+                <a:schemeClr val="accent1"/>
+              </a:effectRef>
+              <a:fontRef idx="minor">
+                <a:schemeClr val="lt1"/>
+              </a:fontRef>
+            </p:style>
+            <p:txBody>
+              <a:bodyPr rtlCol="0" anchor="ctr"/>
+              <a:lstStyle/>
+              <a:p>
+                <a:pPr algn="ctr"/>
+                <a:endParaRPr kumimoji="1" lang="ja-JP" altLang="en-US"/>
+              </a:p>
+            </p:txBody>
+          </p:sp>
+        </p:grpSp>
+        <p:grpSp>
+          <p:nvGrpSpPr>
+            <p:cNvPr id="51" name="グループ化 50">
+              <a:extLst>
+                <a:ext uri="{FF2B5EF4-FFF2-40B4-BE49-F238E27FC236}">
+                  <a16:creationId xmlns:a16="http://schemas.microsoft.com/office/drawing/2014/main" id="{CE2FE8F2-1ED1-A646-11CA-4FFE71076078}"/>
+                </a:ext>
+              </a:extLst>
+            </p:cNvPr>
+            <p:cNvGrpSpPr/>
+            <p:nvPr/>
+          </p:nvGrpSpPr>
+          <p:grpSpPr>
+            <a:xfrm>
+              <a:off x="1994875" y="4783874"/>
+              <a:ext cx="252000" cy="792000"/>
+              <a:chOff x="1672682" y="4783874"/>
+              <a:chExt cx="252000" cy="792000"/>
+            </a:xfrm>
+          </p:grpSpPr>
+          <p:sp>
+            <p:nvSpPr>
+              <p:cNvPr id="55" name="円/楕円 54">
+                <a:extLst>
+                  <a:ext uri="{FF2B5EF4-FFF2-40B4-BE49-F238E27FC236}">
+                    <a16:creationId xmlns:a16="http://schemas.microsoft.com/office/drawing/2014/main" id="{05AB9E3E-1EAF-1451-6A03-E665982A2ACA}"/>
+                  </a:ext>
+                </a:extLst>
+              </p:cNvPr>
+              <p:cNvSpPr>
+                <a:spLocks noChangeAspect="1"/>
+              </p:cNvSpPr>
+              <p:nvPr/>
+            </p:nvSpPr>
+            <p:spPr>
+              <a:xfrm>
+                <a:off x="1672682" y="4783874"/>
+                <a:ext cx="252000" cy="252000"/>
+              </a:xfrm>
+              <a:prstGeom prst="ellipse">
+                <a:avLst/>
+              </a:prstGeom>
+              <a:solidFill>
+                <a:srgbClr val="00387D"/>
+              </a:solidFill>
+              <a:ln>
+                <a:noFill/>
+              </a:ln>
+            </p:spPr>
+            <p:style>
+              <a:lnRef idx="2">
+                <a:schemeClr val="accent1">
+                  <a:shade val="15000"/>
+                </a:schemeClr>
+              </a:lnRef>
+              <a:fillRef idx="1">
+                <a:schemeClr val="accent1"/>
+              </a:fillRef>
+              <a:effectRef idx="0">
+                <a:schemeClr val="accent1"/>
+              </a:effectRef>
+              <a:fontRef idx="minor">
+                <a:schemeClr val="lt1"/>
+              </a:fontRef>
+            </p:style>
+            <p:txBody>
+              <a:bodyPr rtlCol="0" anchor="ctr"/>
+              <a:lstStyle/>
+              <a:p>
+                <a:pPr algn="ctr"/>
+                <a:endParaRPr kumimoji="1" lang="ja-JP" altLang="en-US"/>
+              </a:p>
+            </p:txBody>
+          </p:sp>
+          <p:sp>
+            <p:nvSpPr>
+              <p:cNvPr id="56" name="片側の 2 つの角を丸めた四角形 55">
+                <a:extLst>
+                  <a:ext uri="{FF2B5EF4-FFF2-40B4-BE49-F238E27FC236}">
+                    <a16:creationId xmlns:a16="http://schemas.microsoft.com/office/drawing/2014/main" id="{C8DF88FB-DE04-ADBD-1A02-FD6DE8528519}"/>
+                  </a:ext>
+                </a:extLst>
+              </p:cNvPr>
+              <p:cNvSpPr/>
+              <p:nvPr/>
+            </p:nvSpPr>
+            <p:spPr>
+              <a:xfrm>
+                <a:off x="1672682" y="5035874"/>
+                <a:ext cx="252000" cy="540000"/>
+              </a:xfrm>
+              <a:prstGeom prst="round2SameRect">
+                <a:avLst>
+                  <a:gd name="adj1" fmla="val 48873"/>
+                  <a:gd name="adj2" fmla="val 0"/>
+                </a:avLst>
+              </a:prstGeom>
+              <a:solidFill>
+                <a:srgbClr val="00387D"/>
+              </a:solidFill>
+              <a:ln>
+                <a:noFill/>
+              </a:ln>
+            </p:spPr>
+            <p:style>
+              <a:lnRef idx="2">
+                <a:schemeClr val="accent1">
+                  <a:shade val="15000"/>
+                </a:schemeClr>
+              </a:lnRef>
+              <a:fillRef idx="1">
+                <a:schemeClr val="accent1"/>
+              </a:fillRef>
+              <a:effectRef idx="0">
+                <a:schemeClr val="accent1"/>
+              </a:effectRef>
+              <a:fontRef idx="minor">
+                <a:schemeClr val="lt1"/>
+              </a:fontRef>
+            </p:style>
+            <p:txBody>
+              <a:bodyPr rtlCol="0" anchor="ctr"/>
+              <a:lstStyle/>
+              <a:p>
+                <a:pPr algn="ctr"/>
+                <a:endParaRPr kumimoji="1" lang="ja-JP" altLang="en-US"/>
+              </a:p>
+            </p:txBody>
+          </p:sp>
+        </p:grpSp>
+        <p:grpSp>
+          <p:nvGrpSpPr>
+            <p:cNvPr id="52" name="グループ化 51">
+              <a:extLst>
+                <a:ext uri="{FF2B5EF4-FFF2-40B4-BE49-F238E27FC236}">
+                  <a16:creationId xmlns:a16="http://schemas.microsoft.com/office/drawing/2014/main" id="{678F856B-15DD-A102-5F6C-0BA42C6264E9}"/>
+                </a:ext>
+              </a:extLst>
+            </p:cNvPr>
+            <p:cNvGrpSpPr/>
+            <p:nvPr/>
+          </p:nvGrpSpPr>
+          <p:grpSpPr>
+            <a:xfrm>
+              <a:off x="2317068" y="4783874"/>
+              <a:ext cx="252000" cy="792000"/>
+              <a:chOff x="1672682" y="4783874"/>
+              <a:chExt cx="252000" cy="792000"/>
+            </a:xfrm>
+          </p:grpSpPr>
+          <p:sp>
+            <p:nvSpPr>
+              <p:cNvPr id="53" name="円/楕円 52">
+                <a:extLst>
+                  <a:ext uri="{FF2B5EF4-FFF2-40B4-BE49-F238E27FC236}">
+                    <a16:creationId xmlns:a16="http://schemas.microsoft.com/office/drawing/2014/main" id="{B79AA4B7-9C1D-43AA-64B2-4ACB5BE09424}"/>
+                  </a:ext>
+                </a:extLst>
+              </p:cNvPr>
+              <p:cNvSpPr>
+                <a:spLocks noChangeAspect="1"/>
+              </p:cNvSpPr>
+              <p:nvPr/>
+            </p:nvSpPr>
+            <p:spPr>
+              <a:xfrm>
+                <a:off x="1672682" y="4783874"/>
+                <a:ext cx="252000" cy="252000"/>
+              </a:xfrm>
+              <a:prstGeom prst="ellipse">
+                <a:avLst/>
+              </a:prstGeom>
+              <a:solidFill>
+                <a:srgbClr val="00387D"/>
+              </a:solidFill>
+              <a:ln>
+                <a:noFill/>
+              </a:ln>
+            </p:spPr>
+            <p:style>
+              <a:lnRef idx="2">
+                <a:schemeClr val="accent1">
+                  <a:shade val="15000"/>
+                </a:schemeClr>
+              </a:lnRef>
+              <a:fillRef idx="1">
+                <a:schemeClr val="accent1"/>
+              </a:fillRef>
+              <a:effectRef idx="0">
+                <a:schemeClr val="accent1"/>
+              </a:effectRef>
+              <a:fontRef idx="minor">
+                <a:schemeClr val="lt1"/>
+              </a:fontRef>
+            </p:style>
+            <p:txBody>
+              <a:bodyPr rtlCol="0" anchor="ctr"/>
+              <a:lstStyle/>
+              <a:p>
+                <a:pPr algn="ctr"/>
+                <a:endParaRPr kumimoji="1" lang="ja-JP" altLang="en-US"/>
+              </a:p>
+            </p:txBody>
+          </p:sp>
+          <p:sp>
+            <p:nvSpPr>
+              <p:cNvPr id="54" name="片側の 2 つの角を丸めた四角形 53">
+                <a:extLst>
+                  <a:ext uri="{FF2B5EF4-FFF2-40B4-BE49-F238E27FC236}">
+                    <a16:creationId xmlns:a16="http://schemas.microsoft.com/office/drawing/2014/main" id="{20890BF4-0EA9-3D28-3194-35A8346D8FDF}"/>
+                  </a:ext>
+                </a:extLst>
+              </p:cNvPr>
+              <p:cNvSpPr/>
+              <p:nvPr/>
+            </p:nvSpPr>
+            <p:spPr>
+              <a:xfrm>
+                <a:off x="1672682" y="5035874"/>
+                <a:ext cx="252000" cy="540000"/>
+              </a:xfrm>
+              <a:prstGeom prst="round2SameRect">
+                <a:avLst>
+                  <a:gd name="adj1" fmla="val 48873"/>
+                  <a:gd name="adj2" fmla="val 0"/>
+                </a:avLst>
+              </a:prstGeom>
+              <a:solidFill>
+                <a:srgbClr val="00387D"/>
+              </a:solidFill>
+              <a:ln>
+                <a:noFill/>
+              </a:ln>
+            </p:spPr>
+            <p:style>
+              <a:lnRef idx="2">
+                <a:schemeClr val="accent1">
+                  <a:shade val="15000"/>
+                </a:schemeClr>
+              </a:lnRef>
+              <a:fillRef idx="1">
+                <a:schemeClr val="accent1"/>
+              </a:fillRef>
+              <a:effectRef idx="0">
+                <a:schemeClr val="accent1"/>
+              </a:effectRef>
+              <a:fontRef idx="minor">
+                <a:schemeClr val="lt1"/>
+              </a:fontRef>
+            </p:style>
+            <p:txBody>
+              <a:bodyPr rtlCol="0" anchor="ctr"/>
+              <a:lstStyle/>
+              <a:p>
+                <a:pPr algn="ctr"/>
+                <a:endParaRPr kumimoji="1" lang="ja-JP" altLang="en-US"/>
+              </a:p>
+            </p:txBody>
+          </p:sp>
+        </p:grpSp>
+      </p:grpSp>
+      <p:sp>
+        <p:nvSpPr>
+          <p:cNvPr id="59" name="正方形/長方形 58">
+            <a:extLst>
+              <a:ext uri="{FF2B5EF4-FFF2-40B4-BE49-F238E27FC236}">
+                <a16:creationId xmlns:a16="http://schemas.microsoft.com/office/drawing/2014/main" id="{11CED497-16D6-354E-11EB-BD7552AAECCE}"/>
+              </a:ext>
+            </a:extLst>
+          </p:cNvPr>
+          <p:cNvSpPr/>
+          <p:nvPr/>
+        </p:nvSpPr>
+        <p:spPr>
+          <a:xfrm>
+            <a:off x="1934719" y="4732859"/>
+            <a:ext cx="646161" cy="914400"/>
+          </a:xfrm>
+          <a:prstGeom prst="rect">
+            <a:avLst/>
+          </a:prstGeom>
+          <a:solidFill>
+            <a:srgbClr val="FFFFFF">
+              <a:alpha val="69804"/>
+            </a:srgbClr>
+          </a:solidFill>
+          <a:ln>
+            <a:noFill/>
+          </a:ln>
+        </p:spPr>
+        <p:style>
+          <a:lnRef idx="2">
+            <a:schemeClr val="accent1">
+              <a:shade val="15000"/>
+            </a:schemeClr>
+          </a:lnRef>
+          <a:fillRef idx="1">
+            <a:schemeClr val="accent1"/>
+          </a:fillRef>
+          <a:effectRef idx="0">
+            <a:schemeClr val="accent1"/>
+          </a:effectRef>
+          <a:fontRef idx="minor">
+            <a:schemeClr val="lt1"/>
+          </a:fontRef>
+        </p:style>
+        <p:txBody>
+          <a:bodyPr rtlCol="0" anchor="ctr"/>
+          <a:lstStyle/>
+          <a:p>
+            <a:pPr algn="ctr"/>
+            <a:endParaRPr kumimoji="1" lang="ja-JP" altLang="en-US"/>
+          </a:p>
+        </p:txBody>
+      </p:sp>
+      <p:sp>
+        <p:nvSpPr>
+          <p:cNvPr id="60" name="正方形/長方形 59">
+            <a:extLst>
+              <a:ext uri="{FF2B5EF4-FFF2-40B4-BE49-F238E27FC236}">
+                <a16:creationId xmlns:a16="http://schemas.microsoft.com/office/drawing/2014/main" id="{E5958383-0B6E-B789-2135-B538AFBEB114}"/>
+              </a:ext>
+            </a:extLst>
+          </p:cNvPr>
+          <p:cNvSpPr/>
+          <p:nvPr/>
+        </p:nvSpPr>
+        <p:spPr>
+          <a:xfrm>
+            <a:off x="3525971" y="4732859"/>
+            <a:ext cx="330045" cy="914400"/>
+          </a:xfrm>
+          <a:prstGeom prst="rect">
+            <a:avLst/>
+          </a:prstGeom>
+          <a:solidFill>
+            <a:srgbClr val="FFFFFF">
+              <a:alpha val="69804"/>
+            </a:srgbClr>
+          </a:solidFill>
+          <a:ln>
+            <a:noFill/>
+          </a:ln>
+        </p:spPr>
+        <p:style>
+          <a:lnRef idx="2">
+            <a:schemeClr val="accent1">
+              <a:shade val="15000"/>
+            </a:schemeClr>
+          </a:lnRef>
+          <a:fillRef idx="1">
+            <a:schemeClr val="accent1"/>
+          </a:fillRef>
+          <a:effectRef idx="0">
+            <a:schemeClr val="accent1"/>
+          </a:effectRef>
+          <a:fontRef idx="minor">
+            <a:schemeClr val="lt1"/>
+          </a:fontRef>
+        </p:style>
+        <p:txBody>
+          <a:bodyPr rtlCol="0" anchor="ctr"/>
+          <a:lstStyle/>
+          <a:p>
+            <a:pPr algn="ctr"/>
+            <a:endParaRPr kumimoji="1" lang="ja-JP" altLang="en-US"/>
+          </a:p>
+        </p:txBody>
+      </p:sp>
+      <p:grpSp>
+        <p:nvGrpSpPr>
+          <p:cNvPr id="69" name="グループ化 68">
+            <a:extLst>
+              <a:ext uri="{FF2B5EF4-FFF2-40B4-BE49-F238E27FC236}">
+                <a16:creationId xmlns:a16="http://schemas.microsoft.com/office/drawing/2014/main" id="{C3B2AD97-3E2E-E1E1-2387-CE3E62B91A98}"/>
+              </a:ext>
+            </a:extLst>
+          </p:cNvPr>
+          <p:cNvGrpSpPr/>
+          <p:nvPr/>
+        </p:nvGrpSpPr>
+        <p:grpSpPr>
+          <a:xfrm>
+            <a:off x="5892940" y="4650059"/>
+            <a:ext cx="1080000" cy="1080000"/>
+            <a:chOff x="5892940" y="4650059"/>
+            <a:chExt cx="1080000" cy="1080000"/>
+          </a:xfrm>
+        </p:grpSpPr>
+        <p:sp>
+          <p:nvSpPr>
+            <p:cNvPr id="61" name="角丸四角形 60">
+              <a:extLst>
+                <a:ext uri="{FF2B5EF4-FFF2-40B4-BE49-F238E27FC236}">
+                  <a16:creationId xmlns:a16="http://schemas.microsoft.com/office/drawing/2014/main" id="{C8A5C4B7-A490-E604-DDE8-B5BD7A5EA165}"/>
+                </a:ext>
+              </a:extLst>
+            </p:cNvPr>
+            <p:cNvSpPr>
+              <a:spLocks noChangeAspect="1"/>
+            </p:cNvSpPr>
+            <p:nvPr/>
+          </p:nvSpPr>
+          <p:spPr>
+            <a:xfrm>
+              <a:off x="5892940" y="4650059"/>
+              <a:ext cx="1080000" cy="1080000"/>
+            </a:xfrm>
+            <a:prstGeom prst="roundRect">
+              <a:avLst>
+                <a:gd name="adj" fmla="val 7374"/>
+              </a:avLst>
+            </a:prstGeom>
+            <a:solidFill>
+              <a:schemeClr val="bg1"/>
+            </a:solidFill>
+            <a:ln>
+              <a:solidFill>
+                <a:srgbClr val="00387D"/>
+              </a:solidFill>
+            </a:ln>
+          </p:spPr>
+          <p:style>
+            <a:lnRef idx="2">
+              <a:schemeClr val="accent1">
+                <a:shade val="15000"/>
+              </a:schemeClr>
+            </a:lnRef>
+            <a:fillRef idx="1">
+              <a:schemeClr val="accent1"/>
+            </a:fillRef>
+            <a:effectRef idx="0">
+              <a:schemeClr val="accent1"/>
+            </a:effectRef>
+            <a:fontRef idx="minor">
+              <a:schemeClr val="lt1"/>
+            </a:fontRef>
+          </p:style>
+          <p:txBody>
+            <a:bodyPr rtlCol="0" anchor="ctr"/>
+            <a:lstStyle/>
+            <a:p>
+              <a:pPr algn="ctr"/>
+              <a:endParaRPr kumimoji="1" lang="ja-JP" altLang="en-US"/>
+            </a:p>
+          </p:txBody>
+        </p:sp>
+        <p:sp>
+          <p:nvSpPr>
+            <p:cNvPr id="62" name="正方形/長方形 61">
+              <a:extLst>
+                <a:ext uri="{FF2B5EF4-FFF2-40B4-BE49-F238E27FC236}">
+                  <a16:creationId xmlns:a16="http://schemas.microsoft.com/office/drawing/2014/main" id="{C000A3BD-D5A3-9E37-EDDC-EEFB39BE97E4}"/>
+                </a:ext>
+              </a:extLst>
+            </p:cNvPr>
+            <p:cNvSpPr/>
+            <p:nvPr/>
+          </p:nvSpPr>
+          <p:spPr>
+            <a:xfrm>
+              <a:off x="5982940" y="5334445"/>
+              <a:ext cx="900000" cy="252000"/>
+            </a:xfrm>
+            <a:prstGeom prst="rect">
+              <a:avLst/>
+            </a:prstGeom>
+            <a:solidFill>
+              <a:srgbClr val="00387D"/>
+            </a:solidFill>
+            <a:ln>
+              <a:solidFill>
+                <a:srgbClr val="00387D"/>
+              </a:solidFill>
+            </a:ln>
+          </p:spPr>
+          <p:style>
+            <a:lnRef idx="2">
+              <a:schemeClr val="accent1">
+                <a:shade val="15000"/>
+              </a:schemeClr>
+            </a:lnRef>
+            <a:fillRef idx="1">
+              <a:schemeClr val="accent1"/>
+            </a:fillRef>
+            <a:effectRef idx="0">
+              <a:schemeClr val="accent1"/>
+            </a:effectRef>
+            <a:fontRef idx="minor">
+              <a:schemeClr val="lt1"/>
+            </a:fontRef>
+          </p:style>
+          <p:txBody>
+            <a:bodyPr rtlCol="0" anchor="ctr"/>
+            <a:lstStyle/>
+            <a:p>
+              <a:pPr algn="ctr"/>
+              <a:endParaRPr kumimoji="1" lang="ja-JP" altLang="en-US"/>
+            </a:p>
+          </p:txBody>
+        </p:sp>
+        <p:sp>
+          <p:nvSpPr>
+            <p:cNvPr id="63" name="台形 62">
+              <a:extLst>
+                <a:ext uri="{FF2B5EF4-FFF2-40B4-BE49-F238E27FC236}">
+                  <a16:creationId xmlns:a16="http://schemas.microsoft.com/office/drawing/2014/main" id="{824D4DE3-C2E3-BF63-C607-C12C93AE375A}"/>
+                </a:ext>
+              </a:extLst>
+            </p:cNvPr>
+            <p:cNvSpPr/>
+            <p:nvPr/>
+          </p:nvSpPr>
+          <p:spPr>
+            <a:xfrm>
+              <a:off x="5982940" y="4956059"/>
+              <a:ext cx="900000" cy="360000"/>
+            </a:xfrm>
+            <a:prstGeom prst="trapezoid">
+              <a:avLst/>
+            </a:prstGeom>
+            <a:solidFill>
+              <a:schemeClr val="bg1"/>
+            </a:solidFill>
+            <a:ln>
+              <a:solidFill>
+                <a:srgbClr val="00387D"/>
+              </a:solidFill>
+            </a:ln>
+          </p:spPr>
+          <p:style>
+            <a:lnRef idx="2">
+              <a:schemeClr val="accent1">
+                <a:shade val="15000"/>
+              </a:schemeClr>
+            </a:lnRef>
+            <a:fillRef idx="1">
+              <a:schemeClr val="accent1"/>
+            </a:fillRef>
+            <a:effectRef idx="0">
+              <a:schemeClr val="accent1"/>
+            </a:effectRef>
+            <a:fontRef idx="minor">
+              <a:schemeClr val="lt1"/>
+            </a:fontRef>
+          </p:style>
+          <p:txBody>
+            <a:bodyPr rtlCol="0" anchor="ctr"/>
+            <a:lstStyle/>
+            <a:p>
+              <a:pPr algn="ctr"/>
+              <a:endParaRPr kumimoji="1" lang="ja-JP" altLang="en-US"/>
+            </a:p>
+          </p:txBody>
+        </p:sp>
+        <p:sp>
+          <p:nvSpPr>
+            <p:cNvPr id="66" name="角丸四角形 65">
+              <a:extLst>
+                <a:ext uri="{FF2B5EF4-FFF2-40B4-BE49-F238E27FC236}">
+                  <a16:creationId xmlns:a16="http://schemas.microsoft.com/office/drawing/2014/main" id="{851125C4-CBE5-2CC4-197A-502660306BFF}"/>
+                </a:ext>
+              </a:extLst>
+            </p:cNvPr>
+            <p:cNvSpPr/>
+            <p:nvPr/>
+          </p:nvSpPr>
+          <p:spPr>
+            <a:xfrm rot="1800000">
+              <a:off x="6306940" y="4813039"/>
+              <a:ext cx="252000" cy="360000"/>
+            </a:xfrm>
+            <a:prstGeom prst="roundRect">
+              <a:avLst/>
+            </a:prstGeom>
+            <a:solidFill>
+              <a:srgbClr val="00387D"/>
+            </a:solidFill>
+            <a:ln>
+              <a:solidFill>
+                <a:schemeClr val="bg1"/>
+              </a:solidFill>
+            </a:ln>
+          </p:spPr>
+          <p:style>
+            <a:lnRef idx="2">
+              <a:schemeClr val="accent1">
+                <a:shade val="15000"/>
+              </a:schemeClr>
+            </a:lnRef>
+            <a:fillRef idx="1">
+              <a:schemeClr val="accent1"/>
+            </a:fillRef>
+            <a:effectRef idx="0">
+              <a:schemeClr val="accent1"/>
+            </a:effectRef>
+            <a:fontRef idx="minor">
+              <a:schemeClr val="lt1"/>
+            </a:fontRef>
+          </p:style>
+          <p:txBody>
+            <a:bodyPr rtlCol="0" anchor="ctr"/>
+            <a:lstStyle/>
+            <a:p>
+              <a:pPr algn="ctr"/>
+              <a:endParaRPr kumimoji="1" lang="ja-JP" altLang="en-US"/>
+            </a:p>
+          </p:txBody>
+        </p:sp>
+        <p:sp>
+          <p:nvSpPr>
+            <p:cNvPr id="67" name="正方形/長方形 66">
+              <a:extLst>
+                <a:ext uri="{FF2B5EF4-FFF2-40B4-BE49-F238E27FC236}">
+                  <a16:creationId xmlns:a16="http://schemas.microsoft.com/office/drawing/2014/main" id="{4260BD11-B14F-93E2-5244-8049E2B828D9}"/>
+                </a:ext>
+              </a:extLst>
+            </p:cNvPr>
+            <p:cNvSpPr/>
+            <p:nvPr/>
+          </p:nvSpPr>
+          <p:spPr>
+            <a:xfrm>
+              <a:off x="6252940" y="5136059"/>
+              <a:ext cx="360000" cy="36000"/>
+            </a:xfrm>
+            <a:prstGeom prst="rect">
+              <a:avLst/>
+            </a:prstGeom>
+            <a:solidFill>
+              <a:srgbClr val="00387D"/>
+            </a:solidFill>
+            <a:ln>
+              <a:solidFill>
+                <a:schemeClr val="bg1"/>
+              </a:solidFill>
+            </a:ln>
+          </p:spPr>
+          <p:style>
+            <a:lnRef idx="2">
+              <a:schemeClr val="accent1">
+                <a:shade val="15000"/>
+              </a:schemeClr>
+            </a:lnRef>
+            <a:fillRef idx="1">
+              <a:schemeClr val="accent1"/>
+            </a:fillRef>
+            <a:effectRef idx="0">
+              <a:schemeClr val="accent1"/>
+            </a:effectRef>
+            <a:fontRef idx="minor">
+              <a:schemeClr val="lt1"/>
+            </a:fontRef>
+          </p:style>
+          <p:txBody>
+            <a:bodyPr rtlCol="0" anchor="ctr"/>
+            <a:lstStyle/>
+            <a:p>
+              <a:pPr algn="ctr"/>
+              <a:endParaRPr kumimoji="1" lang="ja-JP" altLang="en-US"/>
+            </a:p>
+          </p:txBody>
+        </p:sp>
+        <p:sp>
+          <p:nvSpPr>
+            <p:cNvPr id="68" name="正方形/長方形 67">
+              <a:extLst>
+                <a:ext uri="{FF2B5EF4-FFF2-40B4-BE49-F238E27FC236}">
+                  <a16:creationId xmlns:a16="http://schemas.microsoft.com/office/drawing/2014/main" id="{11D02958-B9DB-FF99-2C78-C6481A26B2B9}"/>
+                </a:ext>
+              </a:extLst>
+            </p:cNvPr>
+            <p:cNvSpPr/>
+            <p:nvPr/>
+          </p:nvSpPr>
+          <p:spPr>
+            <a:xfrm>
+              <a:off x="6346474" y="5180716"/>
+              <a:ext cx="180000" cy="72000"/>
+            </a:xfrm>
+            <a:prstGeom prst="rect">
+              <a:avLst/>
+            </a:prstGeom>
+            <a:solidFill>
+              <a:schemeClr val="bg1"/>
+            </a:solidFill>
+            <a:ln>
+              <a:noFill/>
+            </a:ln>
+          </p:spPr>
+          <p:style>
+            <a:lnRef idx="2">
+              <a:schemeClr val="accent1">
+                <a:shade val="15000"/>
+              </a:schemeClr>
+            </a:lnRef>
+            <a:fillRef idx="1">
+              <a:schemeClr val="accent1"/>
+            </a:fillRef>
+            <a:effectRef idx="0">
+              <a:schemeClr val="accent1"/>
+            </a:effectRef>
+            <a:fontRef idx="minor">
+              <a:schemeClr val="lt1"/>
+            </a:fontRef>
+          </p:style>
+          <p:txBody>
+            <a:bodyPr rtlCol="0" anchor="ctr"/>
+            <a:lstStyle/>
+            <a:p>
+              <a:pPr algn="ctr"/>
+              <a:endParaRPr kumimoji="1" lang="ja-JP" altLang="en-US"/>
+            </a:p>
+          </p:txBody>
+        </p:sp>
+      </p:grpSp>
+      <p:sp>
+        <p:nvSpPr>
+          <p:cNvPr id="105" name="角丸四角形 104">
+            <a:extLst>
+              <a:ext uri="{FF2B5EF4-FFF2-40B4-BE49-F238E27FC236}">
+                <a16:creationId xmlns:a16="http://schemas.microsoft.com/office/drawing/2014/main" id="{51EBF47B-5484-8295-3BE5-1E3C2C2CA284}"/>
+              </a:ext>
+            </a:extLst>
+          </p:cNvPr>
+          <p:cNvSpPr>
+            <a:spLocks noChangeAspect="1"/>
+          </p:cNvSpPr>
+          <p:nvPr/>
+        </p:nvSpPr>
+        <p:spPr>
+          <a:xfrm>
+            <a:off x="1538868" y="3313136"/>
+            <a:ext cx="1080000" cy="1080000"/>
+          </a:xfrm>
+          <a:prstGeom prst="roundRect">
+            <a:avLst>
+              <a:gd name="adj" fmla="val 7374"/>
+            </a:avLst>
+          </a:prstGeom>
+          <a:solidFill>
+            <a:srgbClr val="00387D"/>
+          </a:solidFill>
+          <a:ln>
+            <a:solidFill>
+              <a:srgbClr val="00387D"/>
+            </a:solidFill>
+          </a:ln>
+        </p:spPr>
+        <p:style>
+          <a:lnRef idx="2">
+            <a:schemeClr val="accent1">
+              <a:shade val="15000"/>
+            </a:schemeClr>
+          </a:lnRef>
+          <a:fillRef idx="1">
+            <a:schemeClr val="accent1"/>
+          </a:fillRef>
+          <a:effectRef idx="0">
+            <a:schemeClr val="accent1"/>
+          </a:effectRef>
+          <a:fontRef idx="minor">
+            <a:schemeClr val="lt1"/>
+          </a:fontRef>
+        </p:style>
+        <p:txBody>
+          <a:bodyPr rtlCol="0" anchor="ctr"/>
+          <a:lstStyle/>
+          <a:p>
+            <a:pPr algn="ctr"/>
+            <a:endParaRPr kumimoji="1" lang="ja-JP" altLang="en-US"/>
+          </a:p>
+        </p:txBody>
+      </p:sp>
+      <p:grpSp>
+        <p:nvGrpSpPr>
+          <p:cNvPr id="106" name="グループ化 105">
+            <a:extLst>
+              <a:ext uri="{FF2B5EF4-FFF2-40B4-BE49-F238E27FC236}">
+                <a16:creationId xmlns:a16="http://schemas.microsoft.com/office/drawing/2014/main" id="{226D53D2-447F-0FFC-28B3-B24331076904}"/>
+              </a:ext>
+            </a:extLst>
+          </p:cNvPr>
+          <p:cNvGrpSpPr/>
+          <p:nvPr/>
+        </p:nvGrpSpPr>
+        <p:grpSpPr>
+          <a:xfrm>
+            <a:off x="1630675" y="3457136"/>
+            <a:ext cx="896386" cy="792000"/>
+            <a:chOff x="1672682" y="4783874"/>
+            <a:chExt cx="896386" cy="792000"/>
+          </a:xfrm>
+          <a:solidFill>
+            <a:schemeClr val="bg1"/>
+          </a:solidFill>
+        </p:grpSpPr>
+        <p:grpSp>
+          <p:nvGrpSpPr>
+            <p:cNvPr id="107" name="グループ化 106">
+              <a:extLst>
+                <a:ext uri="{FF2B5EF4-FFF2-40B4-BE49-F238E27FC236}">
+                  <a16:creationId xmlns:a16="http://schemas.microsoft.com/office/drawing/2014/main" id="{49C71C36-E9F6-10B3-F8AB-32FFB22DF0FA}"/>
+                </a:ext>
+              </a:extLst>
+            </p:cNvPr>
+            <p:cNvGrpSpPr/>
+            <p:nvPr/>
+          </p:nvGrpSpPr>
+          <p:grpSpPr>
+            <a:xfrm>
+              <a:off x="1672682" y="4783874"/>
+              <a:ext cx="252000" cy="792000"/>
+              <a:chOff x="1672682" y="4783874"/>
+              <a:chExt cx="252000" cy="792000"/>
+            </a:xfrm>
+            <a:grpFill/>
+          </p:grpSpPr>
+          <p:sp>
+            <p:nvSpPr>
+              <p:cNvPr id="114" name="円/楕円 113">
+                <a:extLst>
+                  <a:ext uri="{FF2B5EF4-FFF2-40B4-BE49-F238E27FC236}">
+                    <a16:creationId xmlns:a16="http://schemas.microsoft.com/office/drawing/2014/main" id="{EB54CB50-9E98-4ABC-1D5F-E6F4EE27A542}"/>
+                  </a:ext>
+                </a:extLst>
+              </p:cNvPr>
+              <p:cNvSpPr>
+                <a:spLocks noChangeAspect="1"/>
+              </p:cNvSpPr>
+              <p:nvPr/>
+            </p:nvSpPr>
+            <p:spPr>
+              <a:xfrm>
+                <a:off x="1672682" y="4783874"/>
+                <a:ext cx="252000" cy="252000"/>
+              </a:xfrm>
+              <a:prstGeom prst="ellipse">
+                <a:avLst/>
+              </a:prstGeom>
+              <a:grpFill/>
+              <a:ln>
+                <a:noFill/>
+              </a:ln>
+            </p:spPr>
+            <p:style>
+              <a:lnRef idx="2">
+                <a:schemeClr val="accent1">
+                  <a:shade val="15000"/>
+                </a:schemeClr>
+              </a:lnRef>
+              <a:fillRef idx="1">
+                <a:schemeClr val="accent1"/>
+              </a:fillRef>
+              <a:effectRef idx="0">
+                <a:schemeClr val="accent1"/>
+              </a:effectRef>
+              <a:fontRef idx="minor">
+                <a:schemeClr val="lt1"/>
+              </a:fontRef>
+            </p:style>
+            <p:txBody>
+              <a:bodyPr rtlCol="0" anchor="ctr"/>
+              <a:lstStyle/>
+              <a:p>
+                <a:pPr algn="ctr"/>
+                <a:endParaRPr kumimoji="1" lang="ja-JP" altLang="en-US"/>
+              </a:p>
+            </p:txBody>
+          </p:sp>
+          <p:sp>
+            <p:nvSpPr>
+              <p:cNvPr id="115" name="片側の 2 つの角を丸めた四角形 114">
+                <a:extLst>
+                  <a:ext uri="{FF2B5EF4-FFF2-40B4-BE49-F238E27FC236}">
+                    <a16:creationId xmlns:a16="http://schemas.microsoft.com/office/drawing/2014/main" id="{C57E083E-CCE4-4207-53A5-619525ABA5CF}"/>
+                  </a:ext>
+                </a:extLst>
+              </p:cNvPr>
+              <p:cNvSpPr/>
+              <p:nvPr/>
+            </p:nvSpPr>
+            <p:spPr>
+              <a:xfrm>
+                <a:off x="1672682" y="5035874"/>
+                <a:ext cx="252000" cy="540000"/>
+              </a:xfrm>
+              <a:prstGeom prst="round2SameRect">
+                <a:avLst>
+                  <a:gd name="adj1" fmla="val 48873"/>
+                  <a:gd name="adj2" fmla="val 0"/>
+                </a:avLst>
+              </a:prstGeom>
+              <a:grpFill/>
+              <a:ln>
+                <a:noFill/>
+              </a:ln>
+            </p:spPr>
+            <p:style>
+              <a:lnRef idx="2">
+                <a:schemeClr val="accent1">
+                  <a:shade val="15000"/>
+                </a:schemeClr>
+              </a:lnRef>
+              <a:fillRef idx="1">
+                <a:schemeClr val="accent1"/>
+              </a:fillRef>
+              <a:effectRef idx="0">
+                <a:schemeClr val="accent1"/>
+              </a:effectRef>
+              <a:fontRef idx="minor">
+                <a:schemeClr val="lt1"/>
+              </a:fontRef>
+            </p:style>
+            <p:txBody>
+              <a:bodyPr rtlCol="0" anchor="ctr"/>
+              <a:lstStyle/>
+              <a:p>
+                <a:pPr algn="ctr"/>
+                <a:endParaRPr kumimoji="1" lang="ja-JP" altLang="en-US"/>
+              </a:p>
+            </p:txBody>
+          </p:sp>
+        </p:grpSp>
+        <p:grpSp>
+          <p:nvGrpSpPr>
+            <p:cNvPr id="108" name="グループ化 107">
+              <a:extLst>
+                <a:ext uri="{FF2B5EF4-FFF2-40B4-BE49-F238E27FC236}">
+                  <a16:creationId xmlns:a16="http://schemas.microsoft.com/office/drawing/2014/main" id="{4F11A917-EDCB-96F0-E5FA-80399E93A2DC}"/>
+                </a:ext>
+              </a:extLst>
+            </p:cNvPr>
+            <p:cNvGrpSpPr/>
+            <p:nvPr/>
+          </p:nvGrpSpPr>
+          <p:grpSpPr>
+            <a:xfrm>
+              <a:off x="1994875" y="4783874"/>
+              <a:ext cx="252000" cy="792000"/>
+              <a:chOff x="1672682" y="4783874"/>
+              <a:chExt cx="252000" cy="792000"/>
+            </a:xfrm>
+            <a:grpFill/>
+          </p:grpSpPr>
+          <p:sp>
+            <p:nvSpPr>
+              <p:cNvPr id="112" name="円/楕円 111">
+                <a:extLst>
+                  <a:ext uri="{FF2B5EF4-FFF2-40B4-BE49-F238E27FC236}">
+                    <a16:creationId xmlns:a16="http://schemas.microsoft.com/office/drawing/2014/main" id="{0B79BBC0-0F8F-084A-068D-E4206BB0ED7B}"/>
+                  </a:ext>
+                </a:extLst>
+              </p:cNvPr>
+              <p:cNvSpPr>
+                <a:spLocks noChangeAspect="1"/>
+              </p:cNvSpPr>
+              <p:nvPr/>
+            </p:nvSpPr>
+            <p:spPr>
+              <a:xfrm>
+                <a:off x="1672682" y="4783874"/>
+                <a:ext cx="252000" cy="252000"/>
+              </a:xfrm>
+              <a:prstGeom prst="ellipse">
+                <a:avLst/>
+              </a:prstGeom>
+              <a:grpFill/>
+              <a:ln>
+                <a:noFill/>
+              </a:ln>
+            </p:spPr>
+            <p:style>
+              <a:lnRef idx="2">
+                <a:schemeClr val="accent1">
+                  <a:shade val="15000"/>
+                </a:schemeClr>
+              </a:lnRef>
+              <a:fillRef idx="1">
+                <a:schemeClr val="accent1"/>
+              </a:fillRef>
+              <a:effectRef idx="0">
+                <a:schemeClr val="accent1"/>
+              </a:effectRef>
+              <a:fontRef idx="minor">
+                <a:schemeClr val="lt1"/>
+              </a:fontRef>
+            </p:style>
+            <p:txBody>
+              <a:bodyPr rtlCol="0" anchor="ctr"/>
+              <a:lstStyle/>
+              <a:p>
+                <a:pPr algn="ctr"/>
+                <a:endParaRPr kumimoji="1" lang="ja-JP" altLang="en-US"/>
+              </a:p>
+            </p:txBody>
+          </p:sp>
+          <p:sp>
+            <p:nvSpPr>
+              <p:cNvPr id="113" name="片側の 2 つの角を丸めた四角形 112">
+                <a:extLst>
+                  <a:ext uri="{FF2B5EF4-FFF2-40B4-BE49-F238E27FC236}">
+                    <a16:creationId xmlns:a16="http://schemas.microsoft.com/office/drawing/2014/main" id="{EBB9BC9C-B65C-0468-AE51-18DD6DDDD116}"/>
+                  </a:ext>
+                </a:extLst>
+              </p:cNvPr>
+              <p:cNvSpPr/>
+              <p:nvPr/>
+            </p:nvSpPr>
+            <p:spPr>
+              <a:xfrm>
+                <a:off x="1672682" y="5035874"/>
+                <a:ext cx="252000" cy="540000"/>
+              </a:xfrm>
+              <a:prstGeom prst="round2SameRect">
+                <a:avLst>
+                  <a:gd name="adj1" fmla="val 48873"/>
+                  <a:gd name="adj2" fmla="val 0"/>
+                </a:avLst>
+              </a:prstGeom>
+              <a:grpFill/>
+              <a:ln>
+                <a:noFill/>
+              </a:ln>
+            </p:spPr>
+            <p:style>
+              <a:lnRef idx="2">
+                <a:schemeClr val="accent1">
+                  <a:shade val="15000"/>
+                </a:schemeClr>
+              </a:lnRef>
+              <a:fillRef idx="1">
+                <a:schemeClr val="accent1"/>
+              </a:fillRef>
+              <a:effectRef idx="0">
+                <a:schemeClr val="accent1"/>
+              </a:effectRef>
+              <a:fontRef idx="minor">
+                <a:schemeClr val="lt1"/>
+              </a:fontRef>
+            </p:style>
+            <p:txBody>
+              <a:bodyPr rtlCol="0" anchor="ctr"/>
+              <a:lstStyle/>
+              <a:p>
+                <a:pPr algn="ctr"/>
+                <a:endParaRPr kumimoji="1" lang="ja-JP" altLang="en-US"/>
+              </a:p>
+            </p:txBody>
+          </p:sp>
+        </p:grpSp>
+        <p:grpSp>
+          <p:nvGrpSpPr>
+            <p:cNvPr id="109" name="グループ化 108">
+              <a:extLst>
+                <a:ext uri="{FF2B5EF4-FFF2-40B4-BE49-F238E27FC236}">
+                  <a16:creationId xmlns:a16="http://schemas.microsoft.com/office/drawing/2014/main" id="{8EFB9430-0961-6763-08C1-8B7DA6B693A6}"/>
+                </a:ext>
+              </a:extLst>
+            </p:cNvPr>
+            <p:cNvGrpSpPr/>
+            <p:nvPr/>
+          </p:nvGrpSpPr>
+          <p:grpSpPr>
+            <a:xfrm>
+              <a:off x="2317068" y="4783874"/>
+              <a:ext cx="252000" cy="792000"/>
+              <a:chOff x="1672682" y="4783874"/>
+              <a:chExt cx="252000" cy="792000"/>
+            </a:xfrm>
+            <a:grpFill/>
+          </p:grpSpPr>
+          <p:sp>
+            <p:nvSpPr>
+              <p:cNvPr id="110" name="円/楕円 109">
+                <a:extLst>
+                  <a:ext uri="{FF2B5EF4-FFF2-40B4-BE49-F238E27FC236}">
+                    <a16:creationId xmlns:a16="http://schemas.microsoft.com/office/drawing/2014/main" id="{1154337E-154F-A601-C9A3-322AE55A5B75}"/>
+                  </a:ext>
+                </a:extLst>
+              </p:cNvPr>
+              <p:cNvSpPr>
+                <a:spLocks noChangeAspect="1"/>
+              </p:cNvSpPr>
+              <p:nvPr/>
+            </p:nvSpPr>
+            <p:spPr>
+              <a:xfrm>
+                <a:off x="1672682" y="4783874"/>
+                <a:ext cx="252000" cy="252000"/>
+              </a:xfrm>
+              <a:prstGeom prst="ellipse">
+                <a:avLst/>
+              </a:prstGeom>
+              <a:grpFill/>
+              <a:ln>
+                <a:noFill/>
+              </a:ln>
+            </p:spPr>
+            <p:style>
+              <a:lnRef idx="2">
+                <a:schemeClr val="accent1">
+                  <a:shade val="15000"/>
+                </a:schemeClr>
+              </a:lnRef>
+              <a:fillRef idx="1">
+                <a:schemeClr val="accent1"/>
+              </a:fillRef>
+              <a:effectRef idx="0">
+                <a:schemeClr val="accent1"/>
+              </a:effectRef>
+              <a:fontRef idx="minor">
+                <a:schemeClr val="lt1"/>
+              </a:fontRef>
+            </p:style>
+            <p:txBody>
+              <a:bodyPr rtlCol="0" anchor="ctr"/>
+              <a:lstStyle/>
+              <a:p>
+                <a:pPr algn="ctr"/>
+                <a:endParaRPr kumimoji="1" lang="ja-JP" altLang="en-US"/>
+              </a:p>
+            </p:txBody>
+          </p:sp>
+          <p:sp>
+            <p:nvSpPr>
+              <p:cNvPr id="111" name="片側の 2 つの角を丸めた四角形 110">
+                <a:extLst>
+                  <a:ext uri="{FF2B5EF4-FFF2-40B4-BE49-F238E27FC236}">
+                    <a16:creationId xmlns:a16="http://schemas.microsoft.com/office/drawing/2014/main" id="{563FFF7A-55EE-F67E-8FDB-2EF51EBE7CBE}"/>
+                  </a:ext>
+                </a:extLst>
+              </p:cNvPr>
+              <p:cNvSpPr/>
+              <p:nvPr/>
+            </p:nvSpPr>
+            <p:spPr>
+              <a:xfrm>
+                <a:off x="1672682" y="5035874"/>
+                <a:ext cx="252000" cy="540000"/>
+              </a:xfrm>
+              <a:prstGeom prst="round2SameRect">
+                <a:avLst>
+                  <a:gd name="adj1" fmla="val 48873"/>
+                  <a:gd name="adj2" fmla="val 0"/>
+                </a:avLst>
+              </a:prstGeom>
+              <a:grpFill/>
+              <a:ln>
+                <a:noFill/>
+              </a:ln>
+            </p:spPr>
+            <p:style>
+              <a:lnRef idx="2">
+                <a:schemeClr val="accent1">
+                  <a:shade val="15000"/>
+                </a:schemeClr>
+              </a:lnRef>
+              <a:fillRef idx="1">
+                <a:schemeClr val="accent1"/>
+              </a:fillRef>
+              <a:effectRef idx="0">
+                <a:schemeClr val="accent1"/>
+              </a:effectRef>
+              <a:fontRef idx="minor">
+                <a:schemeClr val="lt1"/>
+              </a:fontRef>
+            </p:style>
+            <p:txBody>
+              <a:bodyPr rtlCol="0" anchor="ctr"/>
+              <a:lstStyle/>
+              <a:p>
+                <a:pPr algn="ctr"/>
+                <a:endParaRPr kumimoji="1" lang="ja-JP" altLang="en-US"/>
+              </a:p>
+            </p:txBody>
+          </p:sp>
+        </p:grpSp>
+      </p:grpSp>
+      <p:sp>
+        <p:nvSpPr>
+          <p:cNvPr id="116" name="角丸四角形 115">
+            <a:extLst>
+              <a:ext uri="{FF2B5EF4-FFF2-40B4-BE49-F238E27FC236}">
+                <a16:creationId xmlns:a16="http://schemas.microsoft.com/office/drawing/2014/main" id="{BE49167F-2920-59E2-1333-3FCE5C820350}"/>
+              </a:ext>
+            </a:extLst>
+          </p:cNvPr>
+          <p:cNvSpPr>
+            <a:spLocks noChangeAspect="1"/>
+          </p:cNvSpPr>
+          <p:nvPr/>
+        </p:nvSpPr>
+        <p:spPr>
+          <a:xfrm>
+            <a:off x="2827505" y="3313136"/>
+            <a:ext cx="1080000" cy="1080000"/>
+          </a:xfrm>
+          <a:prstGeom prst="roundRect">
+            <a:avLst>
+              <a:gd name="adj" fmla="val 7374"/>
+            </a:avLst>
+          </a:prstGeom>
+          <a:solidFill>
+            <a:srgbClr val="00387D"/>
+          </a:solidFill>
+          <a:ln>
+            <a:solidFill>
+              <a:srgbClr val="00387D"/>
+            </a:solidFill>
+          </a:ln>
+        </p:spPr>
+        <p:style>
+          <a:lnRef idx="2">
+            <a:schemeClr val="accent1">
+              <a:shade val="15000"/>
+            </a:schemeClr>
+          </a:lnRef>
+          <a:fillRef idx="1">
+            <a:schemeClr val="accent1"/>
+          </a:fillRef>
+          <a:effectRef idx="0">
+            <a:schemeClr val="accent1"/>
+          </a:effectRef>
+          <a:fontRef idx="minor">
+            <a:schemeClr val="lt1"/>
+          </a:fontRef>
+        </p:style>
+        <p:txBody>
+          <a:bodyPr rtlCol="0" anchor="ctr"/>
+          <a:lstStyle/>
+          <a:p>
+            <a:pPr algn="ctr"/>
+            <a:endParaRPr kumimoji="1" lang="ja-JP" altLang="en-US"/>
+          </a:p>
+        </p:txBody>
+      </p:sp>
+      <p:grpSp>
+        <p:nvGrpSpPr>
+          <p:cNvPr id="117" name="グループ化 116">
+            <a:extLst>
+              <a:ext uri="{FF2B5EF4-FFF2-40B4-BE49-F238E27FC236}">
+                <a16:creationId xmlns:a16="http://schemas.microsoft.com/office/drawing/2014/main" id="{777CC681-761E-B14C-71A9-14704795B557}"/>
+              </a:ext>
+            </a:extLst>
+          </p:cNvPr>
+          <p:cNvGrpSpPr/>
+          <p:nvPr/>
+        </p:nvGrpSpPr>
+        <p:grpSpPr>
+          <a:xfrm>
+            <a:off x="2919312" y="3457136"/>
+            <a:ext cx="896386" cy="792000"/>
+            <a:chOff x="1672682" y="4783874"/>
+            <a:chExt cx="896386" cy="792000"/>
+          </a:xfrm>
+          <a:solidFill>
+            <a:schemeClr val="bg1"/>
+          </a:solidFill>
+        </p:grpSpPr>
+        <p:grpSp>
+          <p:nvGrpSpPr>
+            <p:cNvPr id="118" name="グループ化 117">
+              <a:extLst>
+                <a:ext uri="{FF2B5EF4-FFF2-40B4-BE49-F238E27FC236}">
+                  <a16:creationId xmlns:a16="http://schemas.microsoft.com/office/drawing/2014/main" id="{6DDF14EA-9926-FAB7-CE0E-F809ADB89610}"/>
+                </a:ext>
+              </a:extLst>
+            </p:cNvPr>
+            <p:cNvGrpSpPr/>
+            <p:nvPr/>
+          </p:nvGrpSpPr>
+          <p:grpSpPr>
+            <a:xfrm>
+              <a:off x="1672682" y="4783874"/>
+              <a:ext cx="252000" cy="792000"/>
+              <a:chOff x="1672682" y="4783874"/>
+              <a:chExt cx="252000" cy="792000"/>
+            </a:xfrm>
+            <a:grpFill/>
+          </p:grpSpPr>
+          <p:sp>
+            <p:nvSpPr>
+              <p:cNvPr id="125" name="円/楕円 124">
+                <a:extLst>
+                  <a:ext uri="{FF2B5EF4-FFF2-40B4-BE49-F238E27FC236}">
+                    <a16:creationId xmlns:a16="http://schemas.microsoft.com/office/drawing/2014/main" id="{801A6502-9293-D477-C124-0C9AE439033F}"/>
+                  </a:ext>
+                </a:extLst>
+              </p:cNvPr>
+              <p:cNvSpPr>
+                <a:spLocks noChangeAspect="1"/>
+              </p:cNvSpPr>
+              <p:nvPr/>
+            </p:nvSpPr>
+            <p:spPr>
+              <a:xfrm>
+                <a:off x="1672682" y="4783874"/>
+                <a:ext cx="252000" cy="252000"/>
+              </a:xfrm>
+              <a:prstGeom prst="ellipse">
+                <a:avLst/>
+              </a:prstGeom>
+              <a:grpFill/>
+              <a:ln>
+                <a:noFill/>
+              </a:ln>
+            </p:spPr>
+            <p:style>
+              <a:lnRef idx="2">
+                <a:schemeClr val="accent1">
+                  <a:shade val="15000"/>
+                </a:schemeClr>
+              </a:lnRef>
+              <a:fillRef idx="1">
+                <a:schemeClr val="accent1"/>
+              </a:fillRef>
+              <a:effectRef idx="0">
+                <a:schemeClr val="accent1"/>
+              </a:effectRef>
+              <a:fontRef idx="minor">
+                <a:schemeClr val="lt1"/>
+              </a:fontRef>
+            </p:style>
+            <p:txBody>
+              <a:bodyPr rtlCol="0" anchor="ctr"/>
+              <a:lstStyle/>
+              <a:p>
+                <a:pPr algn="ctr"/>
+                <a:endParaRPr kumimoji="1" lang="ja-JP" altLang="en-US"/>
+              </a:p>
+            </p:txBody>
+          </p:sp>
+          <p:sp>
+            <p:nvSpPr>
+              <p:cNvPr id="126" name="片側の 2 つの角を丸めた四角形 125">
+                <a:extLst>
+                  <a:ext uri="{FF2B5EF4-FFF2-40B4-BE49-F238E27FC236}">
+                    <a16:creationId xmlns:a16="http://schemas.microsoft.com/office/drawing/2014/main" id="{5717530A-0998-1FF3-E0B6-B8B40FA34E03}"/>
+                  </a:ext>
+                </a:extLst>
+              </p:cNvPr>
+              <p:cNvSpPr/>
+              <p:nvPr/>
+            </p:nvSpPr>
+            <p:spPr>
+              <a:xfrm>
+                <a:off x="1672682" y="5035874"/>
+                <a:ext cx="252000" cy="540000"/>
+              </a:xfrm>
+              <a:prstGeom prst="round2SameRect">
+                <a:avLst>
+                  <a:gd name="adj1" fmla="val 48873"/>
+                  <a:gd name="adj2" fmla="val 0"/>
+                </a:avLst>
+              </a:prstGeom>
+              <a:grpFill/>
+              <a:ln>
+                <a:noFill/>
+              </a:ln>
+            </p:spPr>
+            <p:style>
+              <a:lnRef idx="2">
+                <a:schemeClr val="accent1">
+                  <a:shade val="15000"/>
+                </a:schemeClr>
+              </a:lnRef>
+              <a:fillRef idx="1">
+                <a:schemeClr val="accent1"/>
+              </a:fillRef>
+              <a:effectRef idx="0">
+                <a:schemeClr val="accent1"/>
+              </a:effectRef>
+              <a:fontRef idx="minor">
+                <a:schemeClr val="lt1"/>
+              </a:fontRef>
+            </p:style>
+            <p:txBody>
+              <a:bodyPr rtlCol="0" anchor="ctr"/>
+              <a:lstStyle/>
+              <a:p>
+                <a:pPr algn="ctr"/>
+                <a:endParaRPr kumimoji="1" lang="ja-JP" altLang="en-US"/>
+              </a:p>
+            </p:txBody>
+          </p:sp>
+        </p:grpSp>
+        <p:grpSp>
+          <p:nvGrpSpPr>
+            <p:cNvPr id="119" name="グループ化 118">
+              <a:extLst>
+                <a:ext uri="{FF2B5EF4-FFF2-40B4-BE49-F238E27FC236}">
+                  <a16:creationId xmlns:a16="http://schemas.microsoft.com/office/drawing/2014/main" id="{859E23A1-331A-F726-C0F7-FD0DB4648B01}"/>
+                </a:ext>
+              </a:extLst>
+            </p:cNvPr>
+            <p:cNvGrpSpPr/>
+            <p:nvPr/>
+          </p:nvGrpSpPr>
+          <p:grpSpPr>
+            <a:xfrm>
+              <a:off x="1994875" y="4783874"/>
+              <a:ext cx="252000" cy="792000"/>
+              <a:chOff x="1672682" y="4783874"/>
+              <a:chExt cx="252000" cy="792000"/>
+            </a:xfrm>
+            <a:grpFill/>
+          </p:grpSpPr>
+          <p:sp>
+            <p:nvSpPr>
+              <p:cNvPr id="123" name="円/楕円 122">
+                <a:extLst>
+                  <a:ext uri="{FF2B5EF4-FFF2-40B4-BE49-F238E27FC236}">
+                    <a16:creationId xmlns:a16="http://schemas.microsoft.com/office/drawing/2014/main" id="{B0877179-22FF-0F84-2832-31FBC2104455}"/>
+                  </a:ext>
+                </a:extLst>
+              </p:cNvPr>
+              <p:cNvSpPr>
+                <a:spLocks noChangeAspect="1"/>
+              </p:cNvSpPr>
+              <p:nvPr/>
+            </p:nvSpPr>
+            <p:spPr>
+              <a:xfrm>
+                <a:off x="1672682" y="4783874"/>
+                <a:ext cx="252000" cy="252000"/>
+              </a:xfrm>
+              <a:prstGeom prst="ellipse">
+                <a:avLst/>
+              </a:prstGeom>
+              <a:grpFill/>
+              <a:ln>
+                <a:noFill/>
+              </a:ln>
+            </p:spPr>
+            <p:style>
+              <a:lnRef idx="2">
+                <a:schemeClr val="accent1">
+                  <a:shade val="15000"/>
+                </a:schemeClr>
+              </a:lnRef>
+              <a:fillRef idx="1">
+                <a:schemeClr val="accent1"/>
+              </a:fillRef>
+              <a:effectRef idx="0">
+                <a:schemeClr val="accent1"/>
+              </a:effectRef>
+              <a:fontRef idx="minor">
+                <a:schemeClr val="lt1"/>
+              </a:fontRef>
+            </p:style>
+            <p:txBody>
+              <a:bodyPr rtlCol="0" anchor="ctr"/>
+              <a:lstStyle/>
+              <a:p>
+                <a:pPr algn="ctr"/>
+                <a:endParaRPr kumimoji="1" lang="ja-JP" altLang="en-US"/>
+              </a:p>
+            </p:txBody>
+          </p:sp>
+          <p:sp>
+            <p:nvSpPr>
+              <p:cNvPr id="124" name="片側の 2 つの角を丸めた四角形 123">
+                <a:extLst>
+                  <a:ext uri="{FF2B5EF4-FFF2-40B4-BE49-F238E27FC236}">
+                    <a16:creationId xmlns:a16="http://schemas.microsoft.com/office/drawing/2014/main" id="{BEB15FF3-59C3-5C32-E375-0EDA749FD12A}"/>
+                  </a:ext>
+                </a:extLst>
+              </p:cNvPr>
+              <p:cNvSpPr/>
+              <p:nvPr/>
+            </p:nvSpPr>
+            <p:spPr>
+              <a:xfrm>
+                <a:off x="1672682" y="5035874"/>
+                <a:ext cx="252000" cy="540000"/>
+              </a:xfrm>
+              <a:prstGeom prst="round2SameRect">
+                <a:avLst>
+                  <a:gd name="adj1" fmla="val 48873"/>
+                  <a:gd name="adj2" fmla="val 0"/>
+                </a:avLst>
+              </a:prstGeom>
+              <a:grpFill/>
+              <a:ln>
+                <a:noFill/>
+              </a:ln>
+            </p:spPr>
+            <p:style>
+              <a:lnRef idx="2">
+                <a:schemeClr val="accent1">
+                  <a:shade val="15000"/>
+                </a:schemeClr>
+              </a:lnRef>
+              <a:fillRef idx="1">
+                <a:schemeClr val="accent1"/>
+              </a:fillRef>
+              <a:effectRef idx="0">
+                <a:schemeClr val="accent1"/>
+              </a:effectRef>
+              <a:fontRef idx="minor">
+                <a:schemeClr val="lt1"/>
+              </a:fontRef>
+            </p:style>
+            <p:txBody>
+              <a:bodyPr rtlCol="0" anchor="ctr"/>
+              <a:lstStyle/>
+              <a:p>
+                <a:pPr algn="ctr"/>
+                <a:endParaRPr kumimoji="1" lang="ja-JP" altLang="en-US"/>
+              </a:p>
+            </p:txBody>
+          </p:sp>
+        </p:grpSp>
+        <p:grpSp>
+          <p:nvGrpSpPr>
+            <p:cNvPr id="120" name="グループ化 119">
+              <a:extLst>
+                <a:ext uri="{FF2B5EF4-FFF2-40B4-BE49-F238E27FC236}">
+                  <a16:creationId xmlns:a16="http://schemas.microsoft.com/office/drawing/2014/main" id="{44C1C1AE-9086-8D15-D692-B80B1D0D5ECA}"/>
+                </a:ext>
+              </a:extLst>
+            </p:cNvPr>
+            <p:cNvGrpSpPr/>
+            <p:nvPr/>
+          </p:nvGrpSpPr>
+          <p:grpSpPr>
+            <a:xfrm>
+              <a:off x="2317068" y="4783874"/>
+              <a:ext cx="252000" cy="792000"/>
+              <a:chOff x="1672682" y="4783874"/>
+              <a:chExt cx="252000" cy="792000"/>
+            </a:xfrm>
+            <a:grpFill/>
+          </p:grpSpPr>
+          <p:sp>
+            <p:nvSpPr>
+              <p:cNvPr id="121" name="円/楕円 120">
+                <a:extLst>
+                  <a:ext uri="{FF2B5EF4-FFF2-40B4-BE49-F238E27FC236}">
+                    <a16:creationId xmlns:a16="http://schemas.microsoft.com/office/drawing/2014/main" id="{F3AC55B1-7695-FE17-0A30-6814D670438A}"/>
+                  </a:ext>
+                </a:extLst>
+              </p:cNvPr>
+              <p:cNvSpPr>
+                <a:spLocks noChangeAspect="1"/>
+              </p:cNvSpPr>
+              <p:nvPr/>
+            </p:nvSpPr>
+            <p:spPr>
+              <a:xfrm>
+                <a:off x="1672682" y="4783874"/>
+                <a:ext cx="252000" cy="252000"/>
+              </a:xfrm>
+              <a:prstGeom prst="ellipse">
+                <a:avLst/>
+              </a:prstGeom>
+              <a:grpFill/>
+              <a:ln>
+                <a:noFill/>
+              </a:ln>
+            </p:spPr>
+            <p:style>
+              <a:lnRef idx="2">
+                <a:schemeClr val="accent1">
+                  <a:shade val="15000"/>
+                </a:schemeClr>
+              </a:lnRef>
+              <a:fillRef idx="1">
+                <a:schemeClr val="accent1"/>
+              </a:fillRef>
+              <a:effectRef idx="0">
+                <a:schemeClr val="accent1"/>
+              </a:effectRef>
+              <a:fontRef idx="minor">
+                <a:schemeClr val="lt1"/>
+              </a:fontRef>
+            </p:style>
+            <p:txBody>
+              <a:bodyPr rtlCol="0" anchor="ctr"/>
+              <a:lstStyle/>
+              <a:p>
+                <a:pPr algn="ctr"/>
+                <a:endParaRPr kumimoji="1" lang="ja-JP" altLang="en-US"/>
+              </a:p>
+            </p:txBody>
+          </p:sp>
+          <p:sp>
+            <p:nvSpPr>
+              <p:cNvPr id="122" name="片側の 2 つの角を丸めた四角形 121">
+                <a:extLst>
+                  <a:ext uri="{FF2B5EF4-FFF2-40B4-BE49-F238E27FC236}">
+                    <a16:creationId xmlns:a16="http://schemas.microsoft.com/office/drawing/2014/main" id="{E4267EFE-8BB1-A09A-66E4-A8C7E290A800}"/>
+                  </a:ext>
+                </a:extLst>
+              </p:cNvPr>
+              <p:cNvSpPr/>
+              <p:nvPr/>
+            </p:nvSpPr>
+            <p:spPr>
+              <a:xfrm>
+                <a:off x="1672682" y="5035874"/>
+                <a:ext cx="252000" cy="540000"/>
+              </a:xfrm>
+              <a:prstGeom prst="round2SameRect">
+                <a:avLst>
+                  <a:gd name="adj1" fmla="val 48873"/>
+                  <a:gd name="adj2" fmla="val 0"/>
+                </a:avLst>
+              </a:prstGeom>
+              <a:grpFill/>
+              <a:ln>
+                <a:noFill/>
+              </a:ln>
+            </p:spPr>
+            <p:style>
+              <a:lnRef idx="2">
+                <a:schemeClr val="accent1">
+                  <a:shade val="15000"/>
+                </a:schemeClr>
+              </a:lnRef>
+              <a:fillRef idx="1">
+                <a:schemeClr val="accent1"/>
+              </a:fillRef>
+              <a:effectRef idx="0">
+                <a:schemeClr val="accent1"/>
+              </a:effectRef>
+              <a:fontRef idx="minor">
+                <a:schemeClr val="lt1"/>
+              </a:fontRef>
+            </p:style>
+            <p:txBody>
+              <a:bodyPr rtlCol="0" anchor="ctr"/>
+              <a:lstStyle/>
+              <a:p>
+                <a:pPr algn="ctr"/>
+                <a:endParaRPr kumimoji="1" lang="ja-JP" altLang="en-US"/>
+              </a:p>
+            </p:txBody>
+          </p:sp>
+        </p:grpSp>
+      </p:grpSp>
+      <p:sp>
+        <p:nvSpPr>
+          <p:cNvPr id="127" name="角丸四角形 126">
+            <a:extLst>
+              <a:ext uri="{FF2B5EF4-FFF2-40B4-BE49-F238E27FC236}">
+                <a16:creationId xmlns:a16="http://schemas.microsoft.com/office/drawing/2014/main" id="{3CCC6D5F-3E4F-AF9A-475E-6B8A718EE524}"/>
+              </a:ext>
+            </a:extLst>
+          </p:cNvPr>
+          <p:cNvSpPr>
+            <a:spLocks noChangeAspect="1"/>
+          </p:cNvSpPr>
+          <p:nvPr/>
+        </p:nvSpPr>
+        <p:spPr>
+          <a:xfrm>
+            <a:off x="4116142" y="3313136"/>
+            <a:ext cx="1080000" cy="1080000"/>
+          </a:xfrm>
+          <a:prstGeom prst="roundRect">
+            <a:avLst>
+              <a:gd name="adj" fmla="val 7374"/>
+            </a:avLst>
+          </a:prstGeom>
+          <a:solidFill>
+            <a:srgbClr val="00387D"/>
+          </a:solidFill>
+          <a:ln>
+            <a:solidFill>
+              <a:srgbClr val="00387D"/>
+            </a:solidFill>
+          </a:ln>
+        </p:spPr>
+        <p:style>
+          <a:lnRef idx="2">
+            <a:schemeClr val="accent1">
+              <a:shade val="15000"/>
+            </a:schemeClr>
+          </a:lnRef>
+          <a:fillRef idx="1">
+            <a:schemeClr val="accent1"/>
+          </a:fillRef>
+          <a:effectRef idx="0">
+            <a:schemeClr val="accent1"/>
+          </a:effectRef>
+          <a:fontRef idx="minor">
+            <a:schemeClr val="lt1"/>
+          </a:fontRef>
+        </p:style>
+        <p:txBody>
+          <a:bodyPr rtlCol="0" anchor="ctr"/>
+          <a:lstStyle/>
+          <a:p>
+            <a:pPr algn="ctr"/>
+            <a:endParaRPr kumimoji="1" lang="ja-JP" altLang="en-US"/>
+          </a:p>
+        </p:txBody>
+      </p:sp>
+      <p:grpSp>
+        <p:nvGrpSpPr>
+          <p:cNvPr id="128" name="グループ化 127">
+            <a:extLst>
+              <a:ext uri="{FF2B5EF4-FFF2-40B4-BE49-F238E27FC236}">
+                <a16:creationId xmlns:a16="http://schemas.microsoft.com/office/drawing/2014/main" id="{284D9F87-6879-8560-C107-3D5AB5EADFDF}"/>
+              </a:ext>
+            </a:extLst>
+          </p:cNvPr>
+          <p:cNvGrpSpPr/>
+          <p:nvPr/>
+        </p:nvGrpSpPr>
+        <p:grpSpPr>
+          <a:xfrm>
+            <a:off x="4207949" y="3457136"/>
+            <a:ext cx="896386" cy="792000"/>
+            <a:chOff x="1672682" y="4783874"/>
+            <a:chExt cx="896386" cy="792000"/>
+          </a:xfrm>
+        </p:grpSpPr>
+        <p:grpSp>
+          <p:nvGrpSpPr>
+            <p:cNvPr id="129" name="グループ化 128">
+              <a:extLst>
+                <a:ext uri="{FF2B5EF4-FFF2-40B4-BE49-F238E27FC236}">
+                  <a16:creationId xmlns:a16="http://schemas.microsoft.com/office/drawing/2014/main" id="{DC6DFC36-38E1-9205-601C-1E4F1D5C818A}"/>
+                </a:ext>
+              </a:extLst>
+            </p:cNvPr>
+            <p:cNvGrpSpPr/>
+            <p:nvPr/>
+          </p:nvGrpSpPr>
+          <p:grpSpPr>
+            <a:xfrm>
+              <a:off x="1672682" y="4783874"/>
+              <a:ext cx="252000" cy="792000"/>
+              <a:chOff x="1672682" y="4783874"/>
+              <a:chExt cx="252000" cy="792000"/>
+            </a:xfrm>
+          </p:grpSpPr>
+          <p:sp>
+            <p:nvSpPr>
+              <p:cNvPr id="136" name="円/楕円 135">
+                <a:extLst>
+                  <a:ext uri="{FF2B5EF4-FFF2-40B4-BE49-F238E27FC236}">
+                    <a16:creationId xmlns:a16="http://schemas.microsoft.com/office/drawing/2014/main" id="{8B666BAD-E649-C73C-8D72-78C71AC2ACD5}"/>
+                  </a:ext>
+                </a:extLst>
+              </p:cNvPr>
+              <p:cNvSpPr>
+                <a:spLocks noChangeAspect="1"/>
+              </p:cNvSpPr>
+              <p:nvPr/>
+            </p:nvSpPr>
+            <p:spPr>
+              <a:xfrm>
+                <a:off x="1672682" y="4783874"/>
+                <a:ext cx="252000" cy="252000"/>
+              </a:xfrm>
+              <a:prstGeom prst="ellipse">
+                <a:avLst/>
+              </a:prstGeom>
+              <a:solidFill>
+                <a:schemeClr val="bg1"/>
+              </a:solidFill>
+              <a:ln>
+                <a:noFill/>
+              </a:ln>
+            </p:spPr>
+            <p:style>
+              <a:lnRef idx="2">
+                <a:schemeClr val="accent1">
+                  <a:shade val="15000"/>
+                </a:schemeClr>
+              </a:lnRef>
+              <a:fillRef idx="1">
+                <a:schemeClr val="accent1"/>
+              </a:fillRef>
+              <a:effectRef idx="0">
+                <a:schemeClr val="accent1"/>
+              </a:effectRef>
+              <a:fontRef idx="minor">
+                <a:schemeClr val="lt1"/>
+              </a:fontRef>
+            </p:style>
+            <p:txBody>
+              <a:bodyPr rtlCol="0" anchor="ctr"/>
+              <a:lstStyle/>
+              <a:p>
+                <a:pPr algn="ctr"/>
+                <a:endParaRPr kumimoji="1" lang="ja-JP" altLang="en-US"/>
+              </a:p>
+            </p:txBody>
+          </p:sp>
+          <p:sp>
+            <p:nvSpPr>
+              <p:cNvPr id="137" name="片側の 2 つの角を丸めた四角形 136">
+                <a:extLst>
+                  <a:ext uri="{FF2B5EF4-FFF2-40B4-BE49-F238E27FC236}">
+                    <a16:creationId xmlns:a16="http://schemas.microsoft.com/office/drawing/2014/main" id="{BBEA58D1-29CF-9662-A3B4-28D3B7299F0A}"/>
+                  </a:ext>
+                </a:extLst>
+              </p:cNvPr>
+              <p:cNvSpPr/>
+              <p:nvPr/>
+            </p:nvSpPr>
+            <p:spPr>
+              <a:xfrm>
+                <a:off x="1672682" y="5035874"/>
+                <a:ext cx="252000" cy="540000"/>
+              </a:xfrm>
+              <a:prstGeom prst="round2SameRect">
+                <a:avLst>
+                  <a:gd name="adj1" fmla="val 48873"/>
+                  <a:gd name="adj2" fmla="val 0"/>
+                </a:avLst>
+              </a:prstGeom>
+              <a:solidFill>
+                <a:schemeClr val="bg1"/>
+              </a:solidFill>
+              <a:ln>
+                <a:noFill/>
+              </a:ln>
+            </p:spPr>
+            <p:style>
+              <a:lnRef idx="2">
+                <a:schemeClr val="accent1">
+                  <a:shade val="15000"/>
+                </a:schemeClr>
+              </a:lnRef>
+              <a:fillRef idx="1">
+                <a:schemeClr val="accent1"/>
+              </a:fillRef>
+              <a:effectRef idx="0">
+                <a:schemeClr val="accent1"/>
+              </a:effectRef>
+              <a:fontRef idx="minor">
+                <a:schemeClr val="lt1"/>
+              </a:fontRef>
+            </p:style>
+            <p:txBody>
+              <a:bodyPr rtlCol="0" anchor="ctr"/>
+              <a:lstStyle/>
+              <a:p>
+                <a:pPr algn="ctr"/>
+                <a:endParaRPr kumimoji="1" lang="ja-JP" altLang="en-US"/>
+              </a:p>
+            </p:txBody>
+          </p:sp>
+        </p:grpSp>
+        <p:grpSp>
+          <p:nvGrpSpPr>
+            <p:cNvPr id="130" name="グループ化 129">
+              <a:extLst>
+                <a:ext uri="{FF2B5EF4-FFF2-40B4-BE49-F238E27FC236}">
+                  <a16:creationId xmlns:a16="http://schemas.microsoft.com/office/drawing/2014/main" id="{3175296D-AD24-D6A3-8B36-1766D361C2E4}"/>
+                </a:ext>
+              </a:extLst>
+            </p:cNvPr>
+            <p:cNvGrpSpPr/>
+            <p:nvPr/>
+          </p:nvGrpSpPr>
+          <p:grpSpPr>
+            <a:xfrm>
+              <a:off x="1994875" y="4783874"/>
+              <a:ext cx="252000" cy="792000"/>
+              <a:chOff x="1672682" y="4783874"/>
+              <a:chExt cx="252000" cy="792000"/>
+            </a:xfrm>
+          </p:grpSpPr>
+          <p:sp>
+            <p:nvSpPr>
+              <p:cNvPr id="134" name="円/楕円 133">
+                <a:extLst>
+                  <a:ext uri="{FF2B5EF4-FFF2-40B4-BE49-F238E27FC236}">
+                    <a16:creationId xmlns:a16="http://schemas.microsoft.com/office/drawing/2014/main" id="{F99C3B3E-68A0-4340-4BB2-41BC72F7080E}"/>
+                  </a:ext>
+                </a:extLst>
+              </p:cNvPr>
+              <p:cNvSpPr>
+                <a:spLocks noChangeAspect="1"/>
+              </p:cNvSpPr>
+              <p:nvPr/>
+            </p:nvSpPr>
+            <p:spPr>
+              <a:xfrm>
+                <a:off x="1672682" y="4783874"/>
+                <a:ext cx="252000" cy="252000"/>
+              </a:xfrm>
+              <a:prstGeom prst="ellipse">
+                <a:avLst/>
+              </a:prstGeom>
+              <a:solidFill>
+                <a:schemeClr val="bg1"/>
+              </a:solidFill>
+              <a:ln>
+                <a:noFill/>
+              </a:ln>
+            </p:spPr>
+            <p:style>
+              <a:lnRef idx="2">
+                <a:schemeClr val="accent1">
+                  <a:shade val="15000"/>
+                </a:schemeClr>
+              </a:lnRef>
+              <a:fillRef idx="1">
+                <a:schemeClr val="accent1"/>
+              </a:fillRef>
+              <a:effectRef idx="0">
+                <a:schemeClr val="accent1"/>
+              </a:effectRef>
+              <a:fontRef idx="minor">
+                <a:schemeClr val="lt1"/>
+              </a:fontRef>
+            </p:style>
+            <p:txBody>
+              <a:bodyPr rtlCol="0" anchor="ctr"/>
+              <a:lstStyle/>
+              <a:p>
+                <a:pPr algn="ctr"/>
+                <a:endParaRPr kumimoji="1" lang="ja-JP" altLang="en-US"/>
+              </a:p>
+            </p:txBody>
+          </p:sp>
+          <p:sp>
+            <p:nvSpPr>
+              <p:cNvPr id="135" name="片側の 2 つの角を丸めた四角形 134">
+                <a:extLst>
+                  <a:ext uri="{FF2B5EF4-FFF2-40B4-BE49-F238E27FC236}">
+                    <a16:creationId xmlns:a16="http://schemas.microsoft.com/office/drawing/2014/main" id="{941E99C5-962D-EA8E-2BB8-FBFCA20AC558}"/>
+                  </a:ext>
+                </a:extLst>
+              </p:cNvPr>
+              <p:cNvSpPr/>
+              <p:nvPr/>
+            </p:nvSpPr>
+            <p:spPr>
+              <a:xfrm>
+                <a:off x="1672682" y="5035874"/>
+                <a:ext cx="252000" cy="540000"/>
+              </a:xfrm>
+              <a:prstGeom prst="round2SameRect">
+                <a:avLst>
+                  <a:gd name="adj1" fmla="val 48873"/>
+                  <a:gd name="adj2" fmla="val 0"/>
+                </a:avLst>
+              </a:prstGeom>
+              <a:solidFill>
+                <a:schemeClr val="bg1"/>
+              </a:solidFill>
+              <a:ln>
+                <a:noFill/>
+              </a:ln>
+            </p:spPr>
+            <p:style>
+              <a:lnRef idx="2">
+                <a:schemeClr val="accent1">
+                  <a:shade val="15000"/>
+                </a:schemeClr>
+              </a:lnRef>
+              <a:fillRef idx="1">
+                <a:schemeClr val="accent1"/>
+              </a:fillRef>
+              <a:effectRef idx="0">
+                <a:schemeClr val="accent1"/>
+              </a:effectRef>
+              <a:fontRef idx="minor">
+                <a:schemeClr val="lt1"/>
+              </a:fontRef>
+            </p:style>
+            <p:txBody>
+              <a:bodyPr rtlCol="0" anchor="ctr"/>
+              <a:lstStyle/>
+              <a:p>
+                <a:pPr algn="ctr"/>
+                <a:endParaRPr kumimoji="1" lang="ja-JP" altLang="en-US"/>
+              </a:p>
+            </p:txBody>
+          </p:sp>
+        </p:grpSp>
+        <p:grpSp>
+          <p:nvGrpSpPr>
+            <p:cNvPr id="131" name="グループ化 130">
+              <a:extLst>
+                <a:ext uri="{FF2B5EF4-FFF2-40B4-BE49-F238E27FC236}">
+                  <a16:creationId xmlns:a16="http://schemas.microsoft.com/office/drawing/2014/main" id="{036F7001-DD7C-25D4-4EF6-1DE10A745CDC}"/>
+                </a:ext>
+              </a:extLst>
+            </p:cNvPr>
+            <p:cNvGrpSpPr/>
+            <p:nvPr/>
+          </p:nvGrpSpPr>
+          <p:grpSpPr>
+            <a:xfrm>
+              <a:off x="2317068" y="4783874"/>
+              <a:ext cx="252000" cy="792000"/>
+              <a:chOff x="1672682" y="4783874"/>
+              <a:chExt cx="252000" cy="792000"/>
+            </a:xfrm>
+          </p:grpSpPr>
+          <p:sp>
+            <p:nvSpPr>
+              <p:cNvPr id="132" name="円/楕円 131">
+                <a:extLst>
+                  <a:ext uri="{FF2B5EF4-FFF2-40B4-BE49-F238E27FC236}">
+                    <a16:creationId xmlns:a16="http://schemas.microsoft.com/office/drawing/2014/main" id="{C77D8BBC-AA8A-3B2D-811F-0660F9D1008D}"/>
+                  </a:ext>
+                </a:extLst>
+              </p:cNvPr>
+              <p:cNvSpPr>
+                <a:spLocks noChangeAspect="1"/>
+              </p:cNvSpPr>
+              <p:nvPr/>
+            </p:nvSpPr>
+            <p:spPr>
+              <a:xfrm>
+                <a:off x="1672682" y="4783874"/>
+                <a:ext cx="252000" cy="252000"/>
+              </a:xfrm>
+              <a:prstGeom prst="ellipse">
+                <a:avLst/>
+              </a:prstGeom>
+              <a:solidFill>
+                <a:schemeClr val="bg1"/>
+              </a:solidFill>
+              <a:ln>
+                <a:noFill/>
+              </a:ln>
+            </p:spPr>
+            <p:style>
+              <a:lnRef idx="2">
+                <a:schemeClr val="accent1">
+                  <a:shade val="15000"/>
+                </a:schemeClr>
+              </a:lnRef>
+              <a:fillRef idx="1">
+                <a:schemeClr val="accent1"/>
+              </a:fillRef>
+              <a:effectRef idx="0">
+                <a:schemeClr val="accent1"/>
+              </a:effectRef>
+              <a:fontRef idx="minor">
+                <a:schemeClr val="lt1"/>
+              </a:fontRef>
+            </p:style>
+            <p:txBody>
+              <a:bodyPr rtlCol="0" anchor="ctr"/>
+              <a:lstStyle/>
+              <a:p>
+                <a:pPr algn="ctr"/>
+                <a:endParaRPr kumimoji="1" lang="ja-JP" altLang="en-US"/>
+              </a:p>
+            </p:txBody>
+          </p:sp>
+          <p:sp>
+            <p:nvSpPr>
+              <p:cNvPr id="133" name="片側の 2 つの角を丸めた四角形 132">
+                <a:extLst>
+                  <a:ext uri="{FF2B5EF4-FFF2-40B4-BE49-F238E27FC236}">
+                    <a16:creationId xmlns:a16="http://schemas.microsoft.com/office/drawing/2014/main" id="{970F7566-B14D-E0EA-49EF-79D9408604C9}"/>
+                  </a:ext>
+                </a:extLst>
+              </p:cNvPr>
+              <p:cNvSpPr/>
+              <p:nvPr/>
+            </p:nvSpPr>
+            <p:spPr>
+              <a:xfrm>
+                <a:off x="1672682" y="5035874"/>
+                <a:ext cx="252000" cy="540000"/>
+              </a:xfrm>
+              <a:prstGeom prst="round2SameRect">
+                <a:avLst>
+                  <a:gd name="adj1" fmla="val 48873"/>
+                  <a:gd name="adj2" fmla="val 0"/>
+                </a:avLst>
+              </a:prstGeom>
+              <a:solidFill>
+                <a:schemeClr val="bg1"/>
+              </a:solidFill>
+              <a:ln>
+                <a:noFill/>
+              </a:ln>
+            </p:spPr>
+            <p:style>
+              <a:lnRef idx="2">
+                <a:schemeClr val="accent1">
+                  <a:shade val="15000"/>
+                </a:schemeClr>
+              </a:lnRef>
+              <a:fillRef idx="1">
+                <a:schemeClr val="accent1"/>
+              </a:fillRef>
+              <a:effectRef idx="0">
+                <a:schemeClr val="accent1"/>
+              </a:effectRef>
+              <a:fontRef idx="minor">
+                <a:schemeClr val="lt1"/>
+              </a:fontRef>
+            </p:style>
+            <p:txBody>
+              <a:bodyPr rtlCol="0" anchor="ctr"/>
+              <a:lstStyle/>
+              <a:p>
+                <a:pPr algn="ctr"/>
+                <a:endParaRPr kumimoji="1" lang="ja-JP" altLang="en-US"/>
+              </a:p>
+            </p:txBody>
+          </p:sp>
+        </p:grpSp>
+      </p:grpSp>
+      <p:sp>
+        <p:nvSpPr>
+          <p:cNvPr id="138" name="正方形/長方形 137">
+            <a:extLst>
+              <a:ext uri="{FF2B5EF4-FFF2-40B4-BE49-F238E27FC236}">
+                <a16:creationId xmlns:a16="http://schemas.microsoft.com/office/drawing/2014/main" id="{1E6134EE-7D9E-A4FC-DDBE-BA118DEE04EE}"/>
+              </a:ext>
+            </a:extLst>
+          </p:cNvPr>
+          <p:cNvSpPr/>
+          <p:nvPr/>
+        </p:nvSpPr>
+        <p:spPr>
+          <a:xfrm>
+            <a:off x="1934719" y="3395936"/>
+            <a:ext cx="646161" cy="914400"/>
+          </a:xfrm>
+          <a:prstGeom prst="rect">
+            <a:avLst/>
+          </a:prstGeom>
+          <a:solidFill>
+            <a:srgbClr val="00387D">
+              <a:alpha val="69804"/>
+            </a:srgbClr>
+          </a:solidFill>
+          <a:ln>
+            <a:noFill/>
+          </a:ln>
+        </p:spPr>
+        <p:style>
+          <a:lnRef idx="2">
+            <a:schemeClr val="accent1">
+              <a:shade val="15000"/>
+            </a:schemeClr>
+          </a:lnRef>
+          <a:fillRef idx="1">
+            <a:schemeClr val="accent1"/>
+          </a:fillRef>
+          <a:effectRef idx="0">
+            <a:schemeClr val="accent1"/>
+          </a:effectRef>
+          <a:fontRef idx="minor">
+            <a:schemeClr val="lt1"/>
+          </a:fontRef>
+        </p:style>
+        <p:txBody>
+          <a:bodyPr rtlCol="0" anchor="ctr"/>
+          <a:lstStyle/>
+          <a:p>
+            <a:pPr algn="ctr"/>
+            <a:endParaRPr kumimoji="1" lang="ja-JP" altLang="en-US"/>
+          </a:p>
+        </p:txBody>
+      </p:sp>
+      <p:sp>
+        <p:nvSpPr>
+          <p:cNvPr id="139" name="正方形/長方形 138">
+            <a:extLst>
+              <a:ext uri="{FF2B5EF4-FFF2-40B4-BE49-F238E27FC236}">
+                <a16:creationId xmlns:a16="http://schemas.microsoft.com/office/drawing/2014/main" id="{4D053AF2-F035-D79D-C389-69D9CE1A2988}"/>
+              </a:ext>
+            </a:extLst>
+          </p:cNvPr>
+          <p:cNvSpPr/>
+          <p:nvPr/>
+        </p:nvSpPr>
+        <p:spPr>
+          <a:xfrm>
+            <a:off x="3525971" y="3395936"/>
+            <a:ext cx="330045" cy="914400"/>
+          </a:xfrm>
+          <a:prstGeom prst="rect">
+            <a:avLst/>
+          </a:prstGeom>
+          <a:solidFill>
+            <a:srgbClr val="00387D">
+              <a:alpha val="69804"/>
+            </a:srgbClr>
+          </a:solidFill>
+          <a:ln>
+            <a:noFill/>
+          </a:ln>
+        </p:spPr>
+        <p:style>
+          <a:lnRef idx="2">
+            <a:schemeClr val="accent1">
+              <a:shade val="15000"/>
+            </a:schemeClr>
+          </a:lnRef>
+          <a:fillRef idx="1">
+            <a:schemeClr val="accent1"/>
+          </a:fillRef>
+          <a:effectRef idx="0">
+            <a:schemeClr val="accent1"/>
+          </a:effectRef>
+          <a:fontRef idx="minor">
+            <a:schemeClr val="lt1"/>
+          </a:fontRef>
+        </p:style>
+        <p:txBody>
+          <a:bodyPr rtlCol="0" anchor="ctr"/>
+          <a:lstStyle/>
+          <a:p>
+            <a:pPr algn="ctr"/>
+            <a:endParaRPr kumimoji="1" lang="ja-JP" altLang="en-US"/>
+          </a:p>
+        </p:txBody>
+      </p:sp>
+      <p:grpSp>
+        <p:nvGrpSpPr>
+          <p:cNvPr id="140" name="グループ化 139">
+            <a:extLst>
+              <a:ext uri="{FF2B5EF4-FFF2-40B4-BE49-F238E27FC236}">
+                <a16:creationId xmlns:a16="http://schemas.microsoft.com/office/drawing/2014/main" id="{6251EB20-E395-F8FF-B949-67CE4FD1085B}"/>
+              </a:ext>
+            </a:extLst>
+          </p:cNvPr>
+          <p:cNvGrpSpPr/>
+          <p:nvPr/>
+        </p:nvGrpSpPr>
+        <p:grpSpPr>
+          <a:xfrm>
+            <a:off x="5892940" y="3313136"/>
+            <a:ext cx="1080000" cy="1080000"/>
+            <a:chOff x="5892940" y="4650059"/>
+            <a:chExt cx="1080000" cy="1080000"/>
+          </a:xfrm>
+        </p:grpSpPr>
+        <p:sp>
+          <p:nvSpPr>
+            <p:cNvPr id="141" name="角丸四角形 140">
+              <a:extLst>
+                <a:ext uri="{FF2B5EF4-FFF2-40B4-BE49-F238E27FC236}">
+                  <a16:creationId xmlns:a16="http://schemas.microsoft.com/office/drawing/2014/main" id="{E4EF6F51-22E9-4DE4-04AA-5D42AAAF92F6}"/>
+                </a:ext>
+              </a:extLst>
+            </p:cNvPr>
+            <p:cNvSpPr>
+              <a:spLocks noChangeAspect="1"/>
+            </p:cNvSpPr>
+            <p:nvPr/>
+          </p:nvSpPr>
+          <p:spPr>
+            <a:xfrm>
+              <a:off x="5892940" y="4650059"/>
+              <a:ext cx="1080000" cy="1080000"/>
+            </a:xfrm>
+            <a:prstGeom prst="roundRect">
+              <a:avLst>
+                <a:gd name="adj" fmla="val 7374"/>
+              </a:avLst>
+            </a:prstGeom>
+            <a:solidFill>
+              <a:srgbClr val="00387D"/>
+            </a:solidFill>
+            <a:ln>
+              <a:solidFill>
+                <a:srgbClr val="00387D"/>
+              </a:solidFill>
+            </a:ln>
+          </p:spPr>
+          <p:style>
+            <a:lnRef idx="2">
+              <a:schemeClr val="accent1">
+                <a:shade val="15000"/>
+              </a:schemeClr>
+            </a:lnRef>
+            <a:fillRef idx="1">
+              <a:schemeClr val="accent1"/>
+            </a:fillRef>
+            <a:effectRef idx="0">
+              <a:schemeClr val="accent1"/>
+            </a:effectRef>
+            <a:fontRef idx="minor">
+              <a:schemeClr val="lt1"/>
+            </a:fontRef>
+          </p:style>
+          <p:txBody>
+            <a:bodyPr rtlCol="0" anchor="ctr"/>
+            <a:lstStyle/>
+            <a:p>
+              <a:pPr algn="ctr"/>
+              <a:endParaRPr kumimoji="1" lang="ja-JP" altLang="en-US"/>
+            </a:p>
+          </p:txBody>
+        </p:sp>
+        <p:sp>
+          <p:nvSpPr>
+            <p:cNvPr id="142" name="正方形/長方形 141">
+              <a:extLst>
+                <a:ext uri="{FF2B5EF4-FFF2-40B4-BE49-F238E27FC236}">
+                  <a16:creationId xmlns:a16="http://schemas.microsoft.com/office/drawing/2014/main" id="{9981F103-D0A2-7679-3B8B-1E8B64324540}"/>
+                </a:ext>
+              </a:extLst>
+            </p:cNvPr>
+            <p:cNvSpPr/>
+            <p:nvPr/>
+          </p:nvSpPr>
+          <p:spPr>
+            <a:xfrm>
+              <a:off x="5982940" y="5334445"/>
+              <a:ext cx="900000" cy="252000"/>
+            </a:xfrm>
+            <a:prstGeom prst="rect">
+              <a:avLst/>
+            </a:prstGeom>
+            <a:solidFill>
+              <a:schemeClr val="bg1"/>
+            </a:solidFill>
+            <a:ln>
+              <a:solidFill>
+                <a:schemeClr val="bg1"/>
+              </a:solidFill>
+            </a:ln>
+          </p:spPr>
+          <p:style>
+            <a:lnRef idx="2">
+              <a:schemeClr val="accent1">
+                <a:shade val="15000"/>
+              </a:schemeClr>
+            </a:lnRef>
+            <a:fillRef idx="1">
+              <a:schemeClr val="accent1"/>
+            </a:fillRef>
+            <a:effectRef idx="0">
+              <a:schemeClr val="accent1"/>
+            </a:effectRef>
+            <a:fontRef idx="minor">
+              <a:schemeClr val="lt1"/>
+            </a:fontRef>
+          </p:style>
+          <p:txBody>
+            <a:bodyPr rtlCol="0" anchor="ctr"/>
+            <a:lstStyle/>
+            <a:p>
+              <a:pPr algn="ctr"/>
+              <a:endParaRPr kumimoji="1" lang="ja-JP" altLang="en-US"/>
+            </a:p>
+          </p:txBody>
+        </p:sp>
+        <p:sp>
+          <p:nvSpPr>
+            <p:cNvPr id="143" name="台形 142">
+              <a:extLst>
+                <a:ext uri="{FF2B5EF4-FFF2-40B4-BE49-F238E27FC236}">
+                  <a16:creationId xmlns:a16="http://schemas.microsoft.com/office/drawing/2014/main" id="{746DAAA5-97B1-BCBF-FBDB-90106B093FB4}"/>
+                </a:ext>
+              </a:extLst>
+            </p:cNvPr>
+            <p:cNvSpPr/>
+            <p:nvPr/>
+          </p:nvSpPr>
+          <p:spPr>
+            <a:xfrm>
+              <a:off x="5982940" y="4956059"/>
+              <a:ext cx="900000" cy="360000"/>
+            </a:xfrm>
+            <a:prstGeom prst="trapezoid">
+              <a:avLst/>
+            </a:prstGeom>
+            <a:solidFill>
+              <a:srgbClr val="00387D"/>
+            </a:solidFill>
+            <a:ln>
+              <a:solidFill>
+                <a:schemeClr val="bg1"/>
+              </a:solidFill>
+            </a:ln>
+          </p:spPr>
+          <p:style>
+            <a:lnRef idx="2">
+              <a:schemeClr val="accent1">
+                <a:shade val="15000"/>
+              </a:schemeClr>
+            </a:lnRef>
+            <a:fillRef idx="1">
+              <a:schemeClr val="accent1"/>
+            </a:fillRef>
+            <a:effectRef idx="0">
+              <a:schemeClr val="accent1"/>
+            </a:effectRef>
+            <a:fontRef idx="minor">
+              <a:schemeClr val="lt1"/>
+            </a:fontRef>
+          </p:style>
+          <p:txBody>
+            <a:bodyPr rtlCol="0" anchor="ctr"/>
+            <a:lstStyle/>
+            <a:p>
+              <a:pPr algn="ctr"/>
+              <a:endParaRPr kumimoji="1" lang="ja-JP" altLang="en-US"/>
+            </a:p>
+          </p:txBody>
+        </p:sp>
+        <p:sp>
+          <p:nvSpPr>
+            <p:cNvPr id="144" name="角丸四角形 143">
+              <a:extLst>
+                <a:ext uri="{FF2B5EF4-FFF2-40B4-BE49-F238E27FC236}">
+                  <a16:creationId xmlns:a16="http://schemas.microsoft.com/office/drawing/2014/main" id="{8A6E0EFF-C593-847F-FDE4-EAF888177829}"/>
+                </a:ext>
+              </a:extLst>
+            </p:cNvPr>
+            <p:cNvSpPr/>
+            <p:nvPr/>
+          </p:nvSpPr>
+          <p:spPr>
+            <a:xfrm rot="1800000">
+              <a:off x="6306940" y="4813039"/>
+              <a:ext cx="252000" cy="360000"/>
+            </a:xfrm>
+            <a:prstGeom prst="roundRect">
+              <a:avLst/>
+            </a:prstGeom>
+            <a:solidFill>
+              <a:schemeClr val="bg1"/>
+            </a:solidFill>
+            <a:ln>
+              <a:solidFill>
+                <a:srgbClr val="00387D"/>
+              </a:solidFill>
+            </a:ln>
+          </p:spPr>
+          <p:style>
+            <a:lnRef idx="2">
+              <a:schemeClr val="accent1">
+                <a:shade val="15000"/>
+              </a:schemeClr>
+            </a:lnRef>
+            <a:fillRef idx="1">
+              <a:schemeClr val="accent1"/>
+            </a:fillRef>
+            <a:effectRef idx="0">
+              <a:schemeClr val="accent1"/>
+            </a:effectRef>
+            <a:fontRef idx="minor">
+              <a:schemeClr val="lt1"/>
+            </a:fontRef>
+          </p:style>
+          <p:txBody>
+            <a:bodyPr rtlCol="0" anchor="ctr"/>
+            <a:lstStyle/>
+            <a:p>
+              <a:pPr algn="ctr"/>
+              <a:endParaRPr kumimoji="1" lang="ja-JP" altLang="en-US"/>
+            </a:p>
+          </p:txBody>
+        </p:sp>
+        <p:sp>
+          <p:nvSpPr>
+            <p:cNvPr id="145" name="正方形/長方形 144">
+              <a:extLst>
+                <a:ext uri="{FF2B5EF4-FFF2-40B4-BE49-F238E27FC236}">
+                  <a16:creationId xmlns:a16="http://schemas.microsoft.com/office/drawing/2014/main" id="{170FA0D9-56AC-FB75-B4A7-7DD5254A889C}"/>
+                </a:ext>
+              </a:extLst>
+            </p:cNvPr>
+            <p:cNvSpPr/>
+            <p:nvPr/>
+          </p:nvSpPr>
+          <p:spPr>
+            <a:xfrm>
+              <a:off x="6252940" y="5136059"/>
+              <a:ext cx="360000" cy="36000"/>
+            </a:xfrm>
+            <a:prstGeom prst="rect">
+              <a:avLst/>
+            </a:prstGeom>
+            <a:solidFill>
+              <a:schemeClr val="bg1"/>
+            </a:solidFill>
+            <a:ln>
+              <a:solidFill>
+                <a:srgbClr val="00387D"/>
+              </a:solidFill>
+            </a:ln>
+          </p:spPr>
+          <p:style>
+            <a:lnRef idx="2">
+              <a:schemeClr val="accent1">
+                <a:shade val="15000"/>
+              </a:schemeClr>
+            </a:lnRef>
+            <a:fillRef idx="1">
+              <a:schemeClr val="accent1"/>
+            </a:fillRef>
+            <a:effectRef idx="0">
+              <a:schemeClr val="accent1"/>
+            </a:effectRef>
+            <a:fontRef idx="minor">
+              <a:schemeClr val="lt1"/>
+            </a:fontRef>
+          </p:style>
+          <p:txBody>
+            <a:bodyPr rtlCol="0" anchor="ctr"/>
+            <a:lstStyle/>
+            <a:p>
+              <a:pPr algn="ctr"/>
+              <a:endParaRPr kumimoji="1" lang="ja-JP" altLang="en-US"/>
+            </a:p>
+          </p:txBody>
+        </p:sp>
+        <p:sp>
+          <p:nvSpPr>
+            <p:cNvPr id="146" name="正方形/長方形 145">
+              <a:extLst>
+                <a:ext uri="{FF2B5EF4-FFF2-40B4-BE49-F238E27FC236}">
+                  <a16:creationId xmlns:a16="http://schemas.microsoft.com/office/drawing/2014/main" id="{A1FB556A-9F23-71F7-4244-32BF3FFF1DF0}"/>
+                </a:ext>
+              </a:extLst>
+            </p:cNvPr>
+            <p:cNvSpPr/>
+            <p:nvPr/>
+          </p:nvSpPr>
+          <p:spPr>
+            <a:xfrm>
+              <a:off x="6346474" y="5180716"/>
+              <a:ext cx="180000" cy="72000"/>
+            </a:xfrm>
+            <a:prstGeom prst="rect">
+              <a:avLst/>
+            </a:prstGeom>
+            <a:solidFill>
+              <a:srgbClr val="00387D"/>
+            </a:solidFill>
+            <a:ln>
+              <a:noFill/>
+            </a:ln>
+          </p:spPr>
+          <p:style>
+            <a:lnRef idx="2">
+              <a:schemeClr val="accent1">
+                <a:shade val="15000"/>
+              </a:schemeClr>
+            </a:lnRef>
+            <a:fillRef idx="1">
+              <a:schemeClr val="accent1"/>
+            </a:fillRef>
+            <a:effectRef idx="0">
+              <a:schemeClr val="accent1"/>
+            </a:effectRef>
+            <a:fontRef idx="minor">
+              <a:schemeClr val="lt1"/>
+            </a:fontRef>
+          </p:style>
+          <p:txBody>
+            <a:bodyPr rtlCol="0" anchor="ctr"/>
+            <a:lstStyle/>
+            <a:p>
+              <a:pPr algn="ctr"/>
+              <a:endParaRPr kumimoji="1" lang="ja-JP" altLang="en-US"/>
+            </a:p>
+          </p:txBody>
+        </p:sp>
+      </p:grpSp>
+      <p:grpSp>
+        <p:nvGrpSpPr>
+          <p:cNvPr id="90" name="グループ化 89">
+            <a:extLst>
+              <a:ext uri="{FF2B5EF4-FFF2-40B4-BE49-F238E27FC236}">
+                <a16:creationId xmlns:a16="http://schemas.microsoft.com/office/drawing/2014/main" id="{3E93D5FE-FD2B-035F-7BF5-57D724DC44BA}"/>
+              </a:ext>
+            </a:extLst>
+          </p:cNvPr>
+          <p:cNvGrpSpPr/>
+          <p:nvPr/>
+        </p:nvGrpSpPr>
+        <p:grpSpPr>
+          <a:xfrm>
+            <a:off x="195909" y="4589894"/>
+            <a:ext cx="1080000" cy="1200329"/>
+            <a:chOff x="195909" y="4589894"/>
+            <a:chExt cx="1080000" cy="1200329"/>
+          </a:xfrm>
+        </p:grpSpPr>
+        <p:sp>
+          <p:nvSpPr>
+            <p:cNvPr id="76" name="角丸四角形 75">
+              <a:extLst>
+                <a:ext uri="{FF2B5EF4-FFF2-40B4-BE49-F238E27FC236}">
+                  <a16:creationId xmlns:a16="http://schemas.microsoft.com/office/drawing/2014/main" id="{230881B3-99A8-B1C1-8E49-8448C2D1D8BA}"/>
+                </a:ext>
+              </a:extLst>
+            </p:cNvPr>
+            <p:cNvSpPr>
+              <a:spLocks noChangeAspect="1"/>
+            </p:cNvSpPr>
+            <p:nvPr/>
+          </p:nvSpPr>
+          <p:spPr>
+            <a:xfrm>
+              <a:off x="195909" y="4650058"/>
+              <a:ext cx="1080000" cy="1080000"/>
+            </a:xfrm>
+            <a:prstGeom prst="roundRect">
+              <a:avLst>
+                <a:gd name="adj" fmla="val 7374"/>
+              </a:avLst>
+            </a:prstGeom>
+            <a:solidFill>
+              <a:schemeClr val="bg1"/>
+            </a:solidFill>
+            <a:ln>
+              <a:solidFill>
+                <a:srgbClr val="00387D"/>
+              </a:solidFill>
+            </a:ln>
+          </p:spPr>
+          <p:style>
+            <a:lnRef idx="2">
+              <a:schemeClr val="accent1">
+                <a:shade val="15000"/>
+              </a:schemeClr>
+            </a:lnRef>
+            <a:fillRef idx="1">
+              <a:schemeClr val="accent1"/>
+            </a:fillRef>
+            <a:effectRef idx="0">
+              <a:schemeClr val="accent1"/>
+            </a:effectRef>
+            <a:fontRef idx="minor">
+              <a:schemeClr val="lt1"/>
+            </a:fontRef>
+          </p:style>
+          <p:txBody>
+            <a:bodyPr rtlCol="0" anchor="ctr"/>
+            <a:lstStyle/>
+            <a:p>
+              <a:pPr algn="ctr"/>
+              <a:endParaRPr kumimoji="1" lang="ja-JP" altLang="en-US"/>
+            </a:p>
+          </p:txBody>
+        </p:sp>
+        <p:grpSp>
+          <p:nvGrpSpPr>
+            <p:cNvPr id="77" name="グループ化 76">
+              <a:extLst>
+                <a:ext uri="{FF2B5EF4-FFF2-40B4-BE49-F238E27FC236}">
+                  <a16:creationId xmlns:a16="http://schemas.microsoft.com/office/drawing/2014/main" id="{D54EB209-C481-A364-4FE6-BF5C651138B3}"/>
+                </a:ext>
+              </a:extLst>
+            </p:cNvPr>
+            <p:cNvGrpSpPr/>
+            <p:nvPr/>
+          </p:nvGrpSpPr>
+          <p:grpSpPr>
+            <a:xfrm>
+              <a:off x="287716" y="4794058"/>
+              <a:ext cx="896386" cy="792000"/>
+              <a:chOff x="1672682" y="4783874"/>
+              <a:chExt cx="896386" cy="792000"/>
+            </a:xfrm>
+          </p:grpSpPr>
+          <p:grpSp>
+            <p:nvGrpSpPr>
+              <p:cNvPr id="78" name="グループ化 77">
+                <a:extLst>
+                  <a:ext uri="{FF2B5EF4-FFF2-40B4-BE49-F238E27FC236}">
+                    <a16:creationId xmlns:a16="http://schemas.microsoft.com/office/drawing/2014/main" id="{49258AA9-DA2E-D3A3-EFF8-24CBD022B5D1}"/>
+                  </a:ext>
+                </a:extLst>
+              </p:cNvPr>
+              <p:cNvGrpSpPr/>
+              <p:nvPr/>
+            </p:nvGrpSpPr>
+            <p:grpSpPr>
+              <a:xfrm>
+                <a:off x="1672682" y="4783874"/>
+                <a:ext cx="252000" cy="792000"/>
+                <a:chOff x="1672682" y="4783874"/>
+                <a:chExt cx="252000" cy="792000"/>
+              </a:xfrm>
+            </p:grpSpPr>
+            <p:sp>
+              <p:nvSpPr>
+                <p:cNvPr id="85" name="円/楕円 84">
+                  <a:extLst>
+                    <a:ext uri="{FF2B5EF4-FFF2-40B4-BE49-F238E27FC236}">
+                      <a16:creationId xmlns:a16="http://schemas.microsoft.com/office/drawing/2014/main" id="{A229F6EC-5CD3-5CCD-9884-B0C59D84DD53}"/>
+                    </a:ext>
+                  </a:extLst>
+                </p:cNvPr>
+                <p:cNvSpPr>
+                  <a:spLocks noChangeAspect="1"/>
+                </p:cNvSpPr>
+                <p:nvPr/>
+              </p:nvSpPr>
+              <p:spPr>
+                <a:xfrm>
+                  <a:off x="1672682" y="4783874"/>
+                  <a:ext cx="252000" cy="252000"/>
+                </a:xfrm>
+                <a:prstGeom prst="ellipse">
+                  <a:avLst/>
+                </a:prstGeom>
+                <a:solidFill>
+                  <a:srgbClr val="00387D"/>
+                </a:solidFill>
+                <a:ln>
+                  <a:noFill/>
+                </a:ln>
+              </p:spPr>
+              <p:style>
+                <a:lnRef idx="2">
+                  <a:schemeClr val="accent1">
+                    <a:shade val="15000"/>
+                  </a:schemeClr>
+                </a:lnRef>
+                <a:fillRef idx="1">
+                  <a:schemeClr val="accent1"/>
+                </a:fillRef>
+                <a:effectRef idx="0">
+                  <a:schemeClr val="accent1"/>
+                </a:effectRef>
+                <a:fontRef idx="minor">
+                  <a:schemeClr val="lt1"/>
+                </a:fontRef>
+              </p:style>
+              <p:txBody>
+                <a:bodyPr rtlCol="0" anchor="ctr"/>
+                <a:lstStyle/>
+                <a:p>
+                  <a:pPr algn="ctr"/>
+                  <a:endParaRPr kumimoji="1" lang="ja-JP" altLang="en-US"/>
+                </a:p>
+              </p:txBody>
+            </p:sp>
+            <p:sp>
+              <p:nvSpPr>
+                <p:cNvPr id="86" name="片側の 2 つの角を丸めた四角形 85">
+                  <a:extLst>
+                    <a:ext uri="{FF2B5EF4-FFF2-40B4-BE49-F238E27FC236}">
+                      <a16:creationId xmlns:a16="http://schemas.microsoft.com/office/drawing/2014/main" id="{A5AE54C8-4BC8-DAB4-FE56-0B48C8C2C630}"/>
+                    </a:ext>
+                  </a:extLst>
+                </p:cNvPr>
+                <p:cNvSpPr/>
+                <p:nvPr/>
+              </p:nvSpPr>
+              <p:spPr>
+                <a:xfrm>
+                  <a:off x="1672682" y="5035874"/>
+                  <a:ext cx="252000" cy="540000"/>
+                </a:xfrm>
+                <a:prstGeom prst="round2SameRect">
+                  <a:avLst>
+                    <a:gd name="adj1" fmla="val 48873"/>
+                    <a:gd name="adj2" fmla="val 0"/>
+                  </a:avLst>
+                </a:prstGeom>
+                <a:solidFill>
+                  <a:srgbClr val="00387D"/>
+                </a:solidFill>
+                <a:ln>
+                  <a:noFill/>
+                </a:ln>
+              </p:spPr>
+              <p:style>
+                <a:lnRef idx="2">
+                  <a:schemeClr val="accent1">
+                    <a:shade val="15000"/>
+                  </a:schemeClr>
+                </a:lnRef>
+                <a:fillRef idx="1">
+                  <a:schemeClr val="accent1"/>
+                </a:fillRef>
+                <a:effectRef idx="0">
+                  <a:schemeClr val="accent1"/>
+                </a:effectRef>
+                <a:fontRef idx="minor">
+                  <a:schemeClr val="lt1"/>
+                </a:fontRef>
+              </p:style>
+              <p:txBody>
+                <a:bodyPr rtlCol="0" anchor="ctr"/>
+                <a:lstStyle/>
+                <a:p>
+                  <a:pPr algn="ctr"/>
+                  <a:endParaRPr kumimoji="1" lang="ja-JP" altLang="en-US"/>
+                </a:p>
+              </p:txBody>
+            </p:sp>
+          </p:grpSp>
+          <p:grpSp>
+            <p:nvGrpSpPr>
+              <p:cNvPr id="79" name="グループ化 78">
+                <a:extLst>
+                  <a:ext uri="{FF2B5EF4-FFF2-40B4-BE49-F238E27FC236}">
+                    <a16:creationId xmlns:a16="http://schemas.microsoft.com/office/drawing/2014/main" id="{028B5D8C-7417-CF0C-0AD2-EBE4D0FFF34C}"/>
+                  </a:ext>
+                </a:extLst>
+              </p:cNvPr>
+              <p:cNvGrpSpPr/>
+              <p:nvPr/>
+            </p:nvGrpSpPr>
+            <p:grpSpPr>
+              <a:xfrm>
+                <a:off x="1994875" y="4783874"/>
+                <a:ext cx="252000" cy="792000"/>
+                <a:chOff x="1672682" y="4783874"/>
+                <a:chExt cx="252000" cy="792000"/>
+              </a:xfrm>
+            </p:grpSpPr>
+            <p:sp>
+              <p:nvSpPr>
+                <p:cNvPr id="83" name="円/楕円 82">
+                  <a:extLst>
+                    <a:ext uri="{FF2B5EF4-FFF2-40B4-BE49-F238E27FC236}">
+                      <a16:creationId xmlns:a16="http://schemas.microsoft.com/office/drawing/2014/main" id="{B8B1EA38-057E-F38E-3809-86AB6B3DF2D1}"/>
+                    </a:ext>
+                  </a:extLst>
+                </p:cNvPr>
+                <p:cNvSpPr>
+                  <a:spLocks noChangeAspect="1"/>
+                </p:cNvSpPr>
+                <p:nvPr/>
+              </p:nvSpPr>
+              <p:spPr>
+                <a:xfrm>
+                  <a:off x="1672682" y="4783874"/>
+                  <a:ext cx="252000" cy="252000"/>
+                </a:xfrm>
+                <a:prstGeom prst="ellipse">
+                  <a:avLst/>
+                </a:prstGeom>
+                <a:solidFill>
+                  <a:srgbClr val="00387D"/>
+                </a:solidFill>
+                <a:ln>
+                  <a:noFill/>
+                </a:ln>
+              </p:spPr>
+              <p:style>
+                <a:lnRef idx="2">
+                  <a:schemeClr val="accent1">
+                    <a:shade val="15000"/>
+                  </a:schemeClr>
+                </a:lnRef>
+                <a:fillRef idx="1">
+                  <a:schemeClr val="accent1"/>
+                </a:fillRef>
+                <a:effectRef idx="0">
+                  <a:schemeClr val="accent1"/>
+                </a:effectRef>
+                <a:fontRef idx="minor">
+                  <a:schemeClr val="lt1"/>
+                </a:fontRef>
+              </p:style>
+              <p:txBody>
+                <a:bodyPr rtlCol="0" anchor="ctr"/>
+                <a:lstStyle/>
+                <a:p>
+                  <a:pPr algn="ctr"/>
+                  <a:endParaRPr kumimoji="1" lang="ja-JP" altLang="en-US"/>
+                </a:p>
+              </p:txBody>
+            </p:sp>
+            <p:sp>
+              <p:nvSpPr>
+                <p:cNvPr id="84" name="片側の 2 つの角を丸めた四角形 83">
+                  <a:extLst>
+                    <a:ext uri="{FF2B5EF4-FFF2-40B4-BE49-F238E27FC236}">
+                      <a16:creationId xmlns:a16="http://schemas.microsoft.com/office/drawing/2014/main" id="{E3A6D00A-5872-B27F-825C-8BBC12BFE095}"/>
+                    </a:ext>
+                  </a:extLst>
+                </p:cNvPr>
+                <p:cNvSpPr/>
+                <p:nvPr/>
+              </p:nvSpPr>
+              <p:spPr>
+                <a:xfrm>
+                  <a:off x="1672682" y="5035874"/>
+                  <a:ext cx="252000" cy="540000"/>
+                </a:xfrm>
+                <a:prstGeom prst="round2SameRect">
+                  <a:avLst>
+                    <a:gd name="adj1" fmla="val 48873"/>
+                    <a:gd name="adj2" fmla="val 0"/>
+                  </a:avLst>
+                </a:prstGeom>
+                <a:solidFill>
+                  <a:srgbClr val="00387D"/>
+                </a:solidFill>
+                <a:ln>
+                  <a:noFill/>
+                </a:ln>
+              </p:spPr>
+              <p:style>
+                <a:lnRef idx="2">
+                  <a:schemeClr val="accent1">
+                    <a:shade val="15000"/>
+                  </a:schemeClr>
+                </a:lnRef>
+                <a:fillRef idx="1">
+                  <a:schemeClr val="accent1"/>
+                </a:fillRef>
+                <a:effectRef idx="0">
+                  <a:schemeClr val="accent1"/>
+                </a:effectRef>
+                <a:fontRef idx="minor">
+                  <a:schemeClr val="lt1"/>
+                </a:fontRef>
+              </p:style>
+              <p:txBody>
+                <a:bodyPr rtlCol="0" anchor="ctr"/>
+                <a:lstStyle/>
+                <a:p>
+                  <a:pPr algn="ctr"/>
+                  <a:endParaRPr kumimoji="1" lang="ja-JP" altLang="en-US"/>
+                </a:p>
+              </p:txBody>
+            </p:sp>
+          </p:grpSp>
+          <p:grpSp>
+            <p:nvGrpSpPr>
+              <p:cNvPr id="80" name="グループ化 79">
+                <a:extLst>
+                  <a:ext uri="{FF2B5EF4-FFF2-40B4-BE49-F238E27FC236}">
+                    <a16:creationId xmlns:a16="http://schemas.microsoft.com/office/drawing/2014/main" id="{7015F2D3-1332-1E3B-EE19-C4A93E6D4F49}"/>
+                  </a:ext>
+                </a:extLst>
+              </p:cNvPr>
+              <p:cNvGrpSpPr/>
+              <p:nvPr/>
+            </p:nvGrpSpPr>
+            <p:grpSpPr>
+              <a:xfrm>
+                <a:off x="2317068" y="4783874"/>
+                <a:ext cx="252000" cy="792000"/>
+                <a:chOff x="1672682" y="4783874"/>
+                <a:chExt cx="252000" cy="792000"/>
+              </a:xfrm>
+            </p:grpSpPr>
+            <p:sp>
+              <p:nvSpPr>
+                <p:cNvPr id="81" name="円/楕円 80">
+                  <a:extLst>
+                    <a:ext uri="{FF2B5EF4-FFF2-40B4-BE49-F238E27FC236}">
+                      <a16:creationId xmlns:a16="http://schemas.microsoft.com/office/drawing/2014/main" id="{E2258BE1-44B2-9610-AC60-4D4A9AE5BB02}"/>
+                    </a:ext>
+                  </a:extLst>
+                </p:cNvPr>
+                <p:cNvSpPr>
+                  <a:spLocks noChangeAspect="1"/>
+                </p:cNvSpPr>
+                <p:nvPr/>
+              </p:nvSpPr>
+              <p:spPr>
+                <a:xfrm>
+                  <a:off x="1672682" y="4783874"/>
+                  <a:ext cx="252000" cy="252000"/>
+                </a:xfrm>
+                <a:prstGeom prst="ellipse">
+                  <a:avLst/>
+                </a:prstGeom>
+                <a:solidFill>
+                  <a:srgbClr val="00387D"/>
+                </a:solidFill>
+                <a:ln>
+                  <a:noFill/>
+                </a:ln>
+              </p:spPr>
+              <p:style>
+                <a:lnRef idx="2">
+                  <a:schemeClr val="accent1">
+                    <a:shade val="15000"/>
+                  </a:schemeClr>
+                </a:lnRef>
+                <a:fillRef idx="1">
+                  <a:schemeClr val="accent1"/>
+                </a:fillRef>
+                <a:effectRef idx="0">
+                  <a:schemeClr val="accent1"/>
+                </a:effectRef>
+                <a:fontRef idx="minor">
+                  <a:schemeClr val="lt1"/>
+                </a:fontRef>
+              </p:style>
+              <p:txBody>
+                <a:bodyPr rtlCol="0" anchor="ctr"/>
+                <a:lstStyle/>
+                <a:p>
+                  <a:pPr algn="ctr"/>
+                  <a:endParaRPr kumimoji="1" lang="ja-JP" altLang="en-US"/>
+                </a:p>
+              </p:txBody>
+            </p:sp>
+            <p:sp>
+              <p:nvSpPr>
+                <p:cNvPr id="82" name="片側の 2 つの角を丸めた四角形 81">
+                  <a:extLst>
+                    <a:ext uri="{FF2B5EF4-FFF2-40B4-BE49-F238E27FC236}">
+                      <a16:creationId xmlns:a16="http://schemas.microsoft.com/office/drawing/2014/main" id="{1961C90D-AA37-D555-F8DC-75B138FDF936}"/>
+                    </a:ext>
+                  </a:extLst>
+                </p:cNvPr>
+                <p:cNvSpPr/>
+                <p:nvPr/>
+              </p:nvSpPr>
+              <p:spPr>
+                <a:xfrm>
+                  <a:off x="1672682" y="5035874"/>
+                  <a:ext cx="252000" cy="540000"/>
+                </a:xfrm>
+                <a:prstGeom prst="round2SameRect">
+                  <a:avLst>
+                    <a:gd name="adj1" fmla="val 48873"/>
+                    <a:gd name="adj2" fmla="val 0"/>
+                  </a:avLst>
+                </a:prstGeom>
+                <a:solidFill>
+                  <a:srgbClr val="00387D"/>
+                </a:solidFill>
+                <a:ln>
+                  <a:noFill/>
+                </a:ln>
+              </p:spPr>
+              <p:style>
+                <a:lnRef idx="2">
+                  <a:schemeClr val="accent1">
+                    <a:shade val="15000"/>
+                  </a:schemeClr>
+                </a:lnRef>
+                <a:fillRef idx="1">
+                  <a:schemeClr val="accent1"/>
+                </a:fillRef>
+                <a:effectRef idx="0">
+                  <a:schemeClr val="accent1"/>
+                </a:effectRef>
+                <a:fontRef idx="minor">
+                  <a:schemeClr val="lt1"/>
+                </a:fontRef>
+              </p:style>
+              <p:txBody>
+                <a:bodyPr rtlCol="0" anchor="ctr"/>
+                <a:lstStyle/>
+                <a:p>
+                  <a:pPr algn="ctr"/>
+                  <a:endParaRPr kumimoji="1" lang="ja-JP" altLang="en-US"/>
+                </a:p>
+              </p:txBody>
+            </p:sp>
+          </p:grpSp>
+        </p:grpSp>
+        <p:sp>
+          <p:nvSpPr>
+            <p:cNvPr id="87" name="正方形/長方形 86">
+              <a:extLst>
+                <a:ext uri="{FF2B5EF4-FFF2-40B4-BE49-F238E27FC236}">
+                  <a16:creationId xmlns:a16="http://schemas.microsoft.com/office/drawing/2014/main" id="{89CCC5A2-F3D5-7025-71B2-D0A3FDD18B31}"/>
+                </a:ext>
+              </a:extLst>
+            </p:cNvPr>
+            <p:cNvSpPr/>
+            <p:nvPr/>
+          </p:nvSpPr>
+          <p:spPr>
+            <a:xfrm>
+              <a:off x="228753" y="4732858"/>
+              <a:ext cx="1014312" cy="914400"/>
+            </a:xfrm>
+            <a:prstGeom prst="rect">
+              <a:avLst/>
+            </a:prstGeom>
+            <a:solidFill>
+              <a:srgbClr val="FFFFFF">
+                <a:alpha val="69804"/>
+              </a:srgbClr>
+            </a:solidFill>
+            <a:ln>
+              <a:noFill/>
+            </a:ln>
+          </p:spPr>
+          <p:style>
+            <a:lnRef idx="2">
+              <a:schemeClr val="accent1">
+                <a:shade val="15000"/>
+              </a:schemeClr>
+            </a:lnRef>
+            <a:fillRef idx="1">
+              <a:schemeClr val="accent1"/>
+            </a:fillRef>
+            <a:effectRef idx="0">
+              <a:schemeClr val="accent1"/>
+            </a:effectRef>
+            <a:fontRef idx="minor">
+              <a:schemeClr val="lt1"/>
+            </a:fontRef>
+          </p:style>
+          <p:txBody>
+            <a:bodyPr rtlCol="0" anchor="ctr"/>
+            <a:lstStyle/>
+            <a:p>
+              <a:pPr algn="ctr"/>
+              <a:endParaRPr kumimoji="1" lang="ja-JP" altLang="en-US"/>
+            </a:p>
+          </p:txBody>
+        </p:sp>
+        <p:sp>
+          <p:nvSpPr>
+            <p:cNvPr id="88" name="テキスト ボックス 87">
+              <a:extLst>
+                <a:ext uri="{FF2B5EF4-FFF2-40B4-BE49-F238E27FC236}">
+                  <a16:creationId xmlns:a16="http://schemas.microsoft.com/office/drawing/2014/main" id="{C120DBEB-7BE4-D8F9-4806-5DFA4AA7B3F2}"/>
+                </a:ext>
+              </a:extLst>
+            </p:cNvPr>
+            <p:cNvSpPr txBox="1"/>
+            <p:nvPr/>
+          </p:nvSpPr>
+          <p:spPr>
+            <a:xfrm>
+              <a:off x="438392" y="4589894"/>
+              <a:ext cx="595035" cy="1200329"/>
+            </a:xfrm>
+            <a:prstGeom prst="rect">
+              <a:avLst/>
+            </a:prstGeom>
+            <a:noFill/>
+          </p:spPr>
+          <p:txBody>
+            <a:bodyPr wrap="none" rtlCol="0">
+              <a:spAutoFit/>
+            </a:bodyPr>
+            <a:lstStyle/>
+            <a:p>
+              <a:r>
+                <a:rPr kumimoji="1" lang="en-US" altLang="ja-JP" sz="7200" dirty="0">
+                  <a:latin typeface="Times New Roman" panose="02020603050405020304" pitchFamily="18" charset="0"/>
+                  <a:cs typeface="Times New Roman" panose="02020603050405020304" pitchFamily="18" charset="0"/>
+                </a:rPr>
+                <a:t>?</a:t>
+              </a:r>
+              <a:endParaRPr kumimoji="1" lang="ja-JP" altLang="en-US" sz="7200">
+                <a:latin typeface="Times New Roman" panose="02020603050405020304" pitchFamily="18" charset="0"/>
+                <a:cs typeface="Times New Roman" panose="02020603050405020304" pitchFamily="18" charset="0"/>
+              </a:endParaRPr>
+            </a:p>
+          </p:txBody>
+        </p:sp>
+      </p:grpSp>
+      <p:grpSp>
+        <p:nvGrpSpPr>
+          <p:cNvPr id="91" name="グループ化 90">
+            <a:extLst>
+              <a:ext uri="{FF2B5EF4-FFF2-40B4-BE49-F238E27FC236}">
+                <a16:creationId xmlns:a16="http://schemas.microsoft.com/office/drawing/2014/main" id="{8C198297-E63B-3D7B-DA21-CB57A35CFDB0}"/>
+              </a:ext>
+            </a:extLst>
+          </p:cNvPr>
+          <p:cNvGrpSpPr/>
+          <p:nvPr/>
+        </p:nvGrpSpPr>
+        <p:grpSpPr>
+          <a:xfrm>
+            <a:off x="223609" y="3243628"/>
+            <a:ext cx="1080000" cy="1200329"/>
+            <a:chOff x="223609" y="3243628"/>
+            <a:chExt cx="1080000" cy="1200329"/>
+          </a:xfrm>
+        </p:grpSpPr>
+        <p:sp>
+          <p:nvSpPr>
+            <p:cNvPr id="16" name="角丸四角形 15">
+              <a:extLst>
+                <a:ext uri="{FF2B5EF4-FFF2-40B4-BE49-F238E27FC236}">
+                  <a16:creationId xmlns:a16="http://schemas.microsoft.com/office/drawing/2014/main" id="{4E0C3734-5EF0-ED17-E155-12C8BE263514}"/>
+                </a:ext>
+              </a:extLst>
+            </p:cNvPr>
+            <p:cNvSpPr>
+              <a:spLocks noChangeAspect="1"/>
+            </p:cNvSpPr>
+            <p:nvPr/>
+          </p:nvSpPr>
+          <p:spPr>
+            <a:xfrm>
+              <a:off x="223609" y="3303792"/>
+              <a:ext cx="1080000" cy="1080000"/>
+            </a:xfrm>
+            <a:prstGeom prst="roundRect">
+              <a:avLst>
+                <a:gd name="adj" fmla="val 7374"/>
+              </a:avLst>
+            </a:prstGeom>
+            <a:solidFill>
+              <a:srgbClr val="00387D"/>
+            </a:solidFill>
+            <a:ln>
+              <a:solidFill>
+                <a:srgbClr val="00387D"/>
+              </a:solidFill>
+            </a:ln>
+          </p:spPr>
+          <p:style>
+            <a:lnRef idx="2">
+              <a:schemeClr val="accent1">
+                <a:shade val="15000"/>
+              </a:schemeClr>
+            </a:lnRef>
+            <a:fillRef idx="1">
+              <a:schemeClr val="accent1"/>
+            </a:fillRef>
+            <a:effectRef idx="0">
+              <a:schemeClr val="accent1"/>
+            </a:effectRef>
+            <a:fontRef idx="minor">
+              <a:schemeClr val="lt1"/>
+            </a:fontRef>
+          </p:style>
+          <p:txBody>
+            <a:bodyPr rtlCol="0" anchor="ctr"/>
+            <a:lstStyle/>
+            <a:p>
+              <a:pPr algn="ctr"/>
+              <a:endParaRPr kumimoji="1" lang="ja-JP" altLang="en-US"/>
+            </a:p>
+          </p:txBody>
+        </p:sp>
+        <p:grpSp>
+          <p:nvGrpSpPr>
+            <p:cNvPr id="19" name="グループ化 18">
+              <a:extLst>
+                <a:ext uri="{FF2B5EF4-FFF2-40B4-BE49-F238E27FC236}">
+                  <a16:creationId xmlns:a16="http://schemas.microsoft.com/office/drawing/2014/main" id="{DB7202D3-5B77-B5BE-8F3A-3F135087EE39}"/>
+                </a:ext>
+              </a:extLst>
+            </p:cNvPr>
+            <p:cNvGrpSpPr/>
+            <p:nvPr/>
+          </p:nvGrpSpPr>
+          <p:grpSpPr>
+            <a:xfrm>
+              <a:off x="315416" y="3447792"/>
+              <a:ext cx="896386" cy="792000"/>
+              <a:chOff x="1672682" y="4783874"/>
+              <a:chExt cx="896386" cy="792000"/>
+            </a:xfrm>
+            <a:solidFill>
+              <a:schemeClr val="bg1"/>
+            </a:solidFill>
+          </p:grpSpPr>
+          <p:grpSp>
+            <p:nvGrpSpPr>
+              <p:cNvPr id="20" name="グループ化 19">
+                <a:extLst>
+                  <a:ext uri="{FF2B5EF4-FFF2-40B4-BE49-F238E27FC236}">
+                    <a16:creationId xmlns:a16="http://schemas.microsoft.com/office/drawing/2014/main" id="{B84B8A62-9D32-5DC1-F3AF-FE78EEDB01F7}"/>
+                  </a:ext>
+                </a:extLst>
+              </p:cNvPr>
+              <p:cNvGrpSpPr/>
+              <p:nvPr/>
+            </p:nvGrpSpPr>
+            <p:grpSpPr>
+              <a:xfrm>
+                <a:off x="1672682" y="4783874"/>
+                <a:ext cx="252000" cy="792000"/>
+                <a:chOff x="1672682" y="4783874"/>
+                <a:chExt cx="252000" cy="792000"/>
+              </a:xfrm>
+              <a:grpFill/>
+            </p:grpSpPr>
+            <p:sp>
+              <p:nvSpPr>
+                <p:cNvPr id="73" name="円/楕円 72">
+                  <a:extLst>
+                    <a:ext uri="{FF2B5EF4-FFF2-40B4-BE49-F238E27FC236}">
+                      <a16:creationId xmlns:a16="http://schemas.microsoft.com/office/drawing/2014/main" id="{73BACCDD-BDC2-F702-682D-47A6F5FB58E5}"/>
+                    </a:ext>
+                  </a:extLst>
+                </p:cNvPr>
+                <p:cNvSpPr>
+                  <a:spLocks noChangeAspect="1"/>
+                </p:cNvSpPr>
+                <p:nvPr/>
+              </p:nvSpPr>
+              <p:spPr>
+                <a:xfrm>
+                  <a:off x="1672682" y="4783874"/>
+                  <a:ext cx="252000" cy="252000"/>
+                </a:xfrm>
+                <a:prstGeom prst="ellipse">
+                  <a:avLst/>
+                </a:prstGeom>
+                <a:grpFill/>
+                <a:ln>
+                  <a:noFill/>
+                </a:ln>
+              </p:spPr>
+              <p:style>
+                <a:lnRef idx="2">
+                  <a:schemeClr val="accent1">
+                    <a:shade val="15000"/>
+                  </a:schemeClr>
+                </a:lnRef>
+                <a:fillRef idx="1">
+                  <a:schemeClr val="accent1"/>
+                </a:fillRef>
+                <a:effectRef idx="0">
+                  <a:schemeClr val="accent1"/>
+                </a:effectRef>
+                <a:fontRef idx="minor">
+                  <a:schemeClr val="lt1"/>
+                </a:fontRef>
+              </p:style>
+              <p:txBody>
+                <a:bodyPr rtlCol="0" anchor="ctr"/>
+                <a:lstStyle/>
+                <a:p>
+                  <a:pPr algn="ctr"/>
+                  <a:endParaRPr kumimoji="1" lang="ja-JP" altLang="en-US"/>
+                </a:p>
+              </p:txBody>
+            </p:sp>
+            <p:sp>
+              <p:nvSpPr>
+                <p:cNvPr id="74" name="片側の 2 つの角を丸めた四角形 73">
+                  <a:extLst>
+                    <a:ext uri="{FF2B5EF4-FFF2-40B4-BE49-F238E27FC236}">
+                      <a16:creationId xmlns:a16="http://schemas.microsoft.com/office/drawing/2014/main" id="{8E6E6023-2BF3-4400-2ED9-B00E54077C4D}"/>
+                    </a:ext>
+                  </a:extLst>
+                </p:cNvPr>
+                <p:cNvSpPr/>
+                <p:nvPr/>
+              </p:nvSpPr>
+              <p:spPr>
+                <a:xfrm>
+                  <a:off x="1672682" y="5035874"/>
+                  <a:ext cx="252000" cy="540000"/>
+                </a:xfrm>
+                <a:prstGeom prst="round2SameRect">
+                  <a:avLst>
+                    <a:gd name="adj1" fmla="val 48873"/>
+                    <a:gd name="adj2" fmla="val 0"/>
+                  </a:avLst>
+                </a:prstGeom>
+                <a:grpFill/>
+                <a:ln>
+                  <a:noFill/>
+                </a:ln>
+              </p:spPr>
+              <p:style>
+                <a:lnRef idx="2">
+                  <a:schemeClr val="accent1">
+                    <a:shade val="15000"/>
+                  </a:schemeClr>
+                </a:lnRef>
+                <a:fillRef idx="1">
+                  <a:schemeClr val="accent1"/>
+                </a:fillRef>
+                <a:effectRef idx="0">
+                  <a:schemeClr val="accent1"/>
+                </a:effectRef>
+                <a:fontRef idx="minor">
+                  <a:schemeClr val="lt1"/>
+                </a:fontRef>
+              </p:style>
+              <p:txBody>
+                <a:bodyPr rtlCol="0" anchor="ctr"/>
+                <a:lstStyle/>
+                <a:p>
+                  <a:pPr algn="ctr"/>
+                  <a:endParaRPr kumimoji="1" lang="ja-JP" altLang="en-US"/>
+                </a:p>
+              </p:txBody>
+            </p:sp>
+          </p:grpSp>
+          <p:grpSp>
+            <p:nvGrpSpPr>
+              <p:cNvPr id="21" name="グループ化 20">
+                <a:extLst>
+                  <a:ext uri="{FF2B5EF4-FFF2-40B4-BE49-F238E27FC236}">
+                    <a16:creationId xmlns:a16="http://schemas.microsoft.com/office/drawing/2014/main" id="{536F5D5C-8B02-911E-E915-A444B5FC633E}"/>
+                  </a:ext>
+                </a:extLst>
+              </p:cNvPr>
+              <p:cNvGrpSpPr/>
+              <p:nvPr/>
+            </p:nvGrpSpPr>
+            <p:grpSpPr>
+              <a:xfrm>
+                <a:off x="1994875" y="4783874"/>
+                <a:ext cx="252000" cy="792000"/>
+                <a:chOff x="1672682" y="4783874"/>
+                <a:chExt cx="252000" cy="792000"/>
+              </a:xfrm>
+              <a:grpFill/>
+            </p:grpSpPr>
+            <p:sp>
+              <p:nvSpPr>
+                <p:cNvPr id="71" name="円/楕円 70">
+                  <a:extLst>
+                    <a:ext uri="{FF2B5EF4-FFF2-40B4-BE49-F238E27FC236}">
+                      <a16:creationId xmlns:a16="http://schemas.microsoft.com/office/drawing/2014/main" id="{1B071248-C803-785D-5ACA-02D75EEC90C1}"/>
+                    </a:ext>
+                  </a:extLst>
+                </p:cNvPr>
+                <p:cNvSpPr>
+                  <a:spLocks noChangeAspect="1"/>
+                </p:cNvSpPr>
+                <p:nvPr/>
+              </p:nvSpPr>
+              <p:spPr>
+                <a:xfrm>
+                  <a:off x="1672682" y="4783874"/>
+                  <a:ext cx="252000" cy="252000"/>
+                </a:xfrm>
+                <a:prstGeom prst="ellipse">
+                  <a:avLst/>
+                </a:prstGeom>
+                <a:grpFill/>
+                <a:ln>
+                  <a:noFill/>
+                </a:ln>
+              </p:spPr>
+              <p:style>
+                <a:lnRef idx="2">
+                  <a:schemeClr val="accent1">
+                    <a:shade val="15000"/>
+                  </a:schemeClr>
+                </a:lnRef>
+                <a:fillRef idx="1">
+                  <a:schemeClr val="accent1"/>
+                </a:fillRef>
+                <a:effectRef idx="0">
+                  <a:schemeClr val="accent1"/>
+                </a:effectRef>
+                <a:fontRef idx="minor">
+                  <a:schemeClr val="lt1"/>
+                </a:fontRef>
+              </p:style>
+              <p:txBody>
+                <a:bodyPr rtlCol="0" anchor="ctr"/>
+                <a:lstStyle/>
+                <a:p>
+                  <a:pPr algn="ctr"/>
+                  <a:endParaRPr kumimoji="1" lang="ja-JP" altLang="en-US"/>
+                </a:p>
+              </p:txBody>
+            </p:sp>
+            <p:sp>
+              <p:nvSpPr>
+                <p:cNvPr id="72" name="片側の 2 つの角を丸めた四角形 71">
+                  <a:extLst>
+                    <a:ext uri="{FF2B5EF4-FFF2-40B4-BE49-F238E27FC236}">
+                      <a16:creationId xmlns:a16="http://schemas.microsoft.com/office/drawing/2014/main" id="{4E30DB3B-EE5A-DD85-43FE-C4E241B712E2}"/>
+                    </a:ext>
+                  </a:extLst>
+                </p:cNvPr>
+                <p:cNvSpPr/>
+                <p:nvPr/>
+              </p:nvSpPr>
+              <p:spPr>
+                <a:xfrm>
+                  <a:off x="1672682" y="5035874"/>
+                  <a:ext cx="252000" cy="540000"/>
+                </a:xfrm>
+                <a:prstGeom prst="round2SameRect">
+                  <a:avLst>
+                    <a:gd name="adj1" fmla="val 48873"/>
+                    <a:gd name="adj2" fmla="val 0"/>
+                  </a:avLst>
+                </a:prstGeom>
+                <a:grpFill/>
+                <a:ln>
+                  <a:noFill/>
+                </a:ln>
+              </p:spPr>
+              <p:style>
+                <a:lnRef idx="2">
+                  <a:schemeClr val="accent1">
+                    <a:shade val="15000"/>
+                  </a:schemeClr>
+                </a:lnRef>
+                <a:fillRef idx="1">
+                  <a:schemeClr val="accent1"/>
+                </a:fillRef>
+                <a:effectRef idx="0">
+                  <a:schemeClr val="accent1"/>
+                </a:effectRef>
+                <a:fontRef idx="minor">
+                  <a:schemeClr val="lt1"/>
+                </a:fontRef>
+              </p:style>
+              <p:txBody>
+                <a:bodyPr rtlCol="0" anchor="ctr"/>
+                <a:lstStyle/>
+                <a:p>
+                  <a:pPr algn="ctr"/>
+                  <a:endParaRPr kumimoji="1" lang="ja-JP" altLang="en-US"/>
+                </a:p>
+              </p:txBody>
+            </p:sp>
+          </p:grpSp>
+          <p:grpSp>
+            <p:nvGrpSpPr>
+              <p:cNvPr id="64" name="グループ化 63">
+                <a:extLst>
+                  <a:ext uri="{FF2B5EF4-FFF2-40B4-BE49-F238E27FC236}">
+                    <a16:creationId xmlns:a16="http://schemas.microsoft.com/office/drawing/2014/main" id="{247878FA-11C6-A144-A382-6E3579D9E1D3}"/>
+                  </a:ext>
+                </a:extLst>
+              </p:cNvPr>
+              <p:cNvGrpSpPr/>
+              <p:nvPr/>
+            </p:nvGrpSpPr>
+            <p:grpSpPr>
+              <a:xfrm>
+                <a:off x="2317068" y="4783874"/>
+                <a:ext cx="252000" cy="792000"/>
+                <a:chOff x="1672682" y="4783874"/>
+                <a:chExt cx="252000" cy="792000"/>
+              </a:xfrm>
+              <a:grpFill/>
+            </p:grpSpPr>
+            <p:sp>
+              <p:nvSpPr>
+                <p:cNvPr id="65" name="円/楕円 64">
+                  <a:extLst>
+                    <a:ext uri="{FF2B5EF4-FFF2-40B4-BE49-F238E27FC236}">
+                      <a16:creationId xmlns:a16="http://schemas.microsoft.com/office/drawing/2014/main" id="{679351F8-95BD-ED10-464E-EA7D45D7A01C}"/>
+                    </a:ext>
+                  </a:extLst>
+                </p:cNvPr>
+                <p:cNvSpPr>
+                  <a:spLocks noChangeAspect="1"/>
+                </p:cNvSpPr>
+                <p:nvPr/>
+              </p:nvSpPr>
+              <p:spPr>
+                <a:xfrm>
+                  <a:off x="1672682" y="4783874"/>
+                  <a:ext cx="252000" cy="252000"/>
+                </a:xfrm>
+                <a:prstGeom prst="ellipse">
+                  <a:avLst/>
+                </a:prstGeom>
+                <a:grpFill/>
+                <a:ln>
+                  <a:noFill/>
+                </a:ln>
+              </p:spPr>
+              <p:style>
+                <a:lnRef idx="2">
+                  <a:schemeClr val="accent1">
+                    <a:shade val="15000"/>
+                  </a:schemeClr>
+                </a:lnRef>
+                <a:fillRef idx="1">
+                  <a:schemeClr val="accent1"/>
+                </a:fillRef>
+                <a:effectRef idx="0">
+                  <a:schemeClr val="accent1"/>
+                </a:effectRef>
+                <a:fontRef idx="minor">
+                  <a:schemeClr val="lt1"/>
+                </a:fontRef>
+              </p:style>
+              <p:txBody>
+                <a:bodyPr rtlCol="0" anchor="ctr"/>
+                <a:lstStyle/>
+                <a:p>
+                  <a:pPr algn="ctr"/>
+                  <a:endParaRPr kumimoji="1" lang="ja-JP" altLang="en-US"/>
+                </a:p>
+              </p:txBody>
+            </p:sp>
+            <p:sp>
+              <p:nvSpPr>
+                <p:cNvPr id="70" name="片側の 2 つの角を丸めた四角形 69">
+                  <a:extLst>
+                    <a:ext uri="{FF2B5EF4-FFF2-40B4-BE49-F238E27FC236}">
+                      <a16:creationId xmlns:a16="http://schemas.microsoft.com/office/drawing/2014/main" id="{E0DA1702-770E-8A8B-CE2C-44DB1B71E4E8}"/>
+                    </a:ext>
+                  </a:extLst>
+                </p:cNvPr>
+                <p:cNvSpPr/>
+                <p:nvPr/>
+              </p:nvSpPr>
+              <p:spPr>
+                <a:xfrm>
+                  <a:off x="1672682" y="5035874"/>
+                  <a:ext cx="252000" cy="540000"/>
+                </a:xfrm>
+                <a:prstGeom prst="round2SameRect">
+                  <a:avLst>
+                    <a:gd name="adj1" fmla="val 48873"/>
+                    <a:gd name="adj2" fmla="val 0"/>
+                  </a:avLst>
+                </a:prstGeom>
+                <a:grpFill/>
+                <a:ln>
+                  <a:noFill/>
+                </a:ln>
+              </p:spPr>
+              <p:style>
+                <a:lnRef idx="2">
+                  <a:schemeClr val="accent1">
+                    <a:shade val="15000"/>
+                  </a:schemeClr>
+                </a:lnRef>
+                <a:fillRef idx="1">
+                  <a:schemeClr val="accent1"/>
+                </a:fillRef>
+                <a:effectRef idx="0">
+                  <a:schemeClr val="accent1"/>
+                </a:effectRef>
+                <a:fontRef idx="minor">
+                  <a:schemeClr val="lt1"/>
+                </a:fontRef>
+              </p:style>
+              <p:txBody>
+                <a:bodyPr rtlCol="0" anchor="ctr"/>
+                <a:lstStyle/>
+                <a:p>
+                  <a:pPr algn="ctr"/>
+                  <a:endParaRPr kumimoji="1" lang="ja-JP" altLang="en-US"/>
+                </a:p>
+              </p:txBody>
+            </p:sp>
+          </p:grpSp>
+        </p:grpSp>
+        <p:sp>
+          <p:nvSpPr>
+            <p:cNvPr id="75" name="正方形/長方形 74">
+              <a:extLst>
+                <a:ext uri="{FF2B5EF4-FFF2-40B4-BE49-F238E27FC236}">
+                  <a16:creationId xmlns:a16="http://schemas.microsoft.com/office/drawing/2014/main" id="{47825386-FD60-A8F7-BB5F-F67A310860A1}"/>
+                </a:ext>
+              </a:extLst>
+            </p:cNvPr>
+            <p:cNvSpPr/>
+            <p:nvPr/>
+          </p:nvSpPr>
+          <p:spPr>
+            <a:xfrm>
+              <a:off x="242603" y="3386592"/>
+              <a:ext cx="1042012" cy="914400"/>
+            </a:xfrm>
+            <a:prstGeom prst="rect">
+              <a:avLst/>
+            </a:prstGeom>
+            <a:solidFill>
+              <a:srgbClr val="00387D">
+                <a:alpha val="69804"/>
+              </a:srgbClr>
+            </a:solidFill>
+            <a:ln>
+              <a:noFill/>
+            </a:ln>
+          </p:spPr>
+          <p:style>
+            <a:lnRef idx="2">
+              <a:schemeClr val="accent1">
+                <a:shade val="15000"/>
+              </a:schemeClr>
+            </a:lnRef>
+            <a:fillRef idx="1">
+              <a:schemeClr val="accent1"/>
+            </a:fillRef>
+            <a:effectRef idx="0">
+              <a:schemeClr val="accent1"/>
+            </a:effectRef>
+            <a:fontRef idx="minor">
+              <a:schemeClr val="lt1"/>
+            </a:fontRef>
+          </p:style>
+          <p:txBody>
+            <a:bodyPr rtlCol="0" anchor="ctr"/>
+            <a:lstStyle/>
+            <a:p>
+              <a:pPr algn="ctr"/>
+              <a:endParaRPr kumimoji="1" lang="ja-JP" altLang="en-US"/>
+            </a:p>
+          </p:txBody>
+        </p:sp>
+        <p:sp>
+          <p:nvSpPr>
+            <p:cNvPr id="89" name="テキスト ボックス 88">
+              <a:extLst>
+                <a:ext uri="{FF2B5EF4-FFF2-40B4-BE49-F238E27FC236}">
+                  <a16:creationId xmlns:a16="http://schemas.microsoft.com/office/drawing/2014/main" id="{0B83C7CD-104B-A230-E393-05DEC7F02679}"/>
+                </a:ext>
+              </a:extLst>
+            </p:cNvPr>
+            <p:cNvSpPr txBox="1"/>
+            <p:nvPr/>
+          </p:nvSpPr>
+          <p:spPr>
+            <a:xfrm>
+              <a:off x="466092" y="3243628"/>
+              <a:ext cx="595035" cy="1200329"/>
+            </a:xfrm>
+            <a:prstGeom prst="rect">
+              <a:avLst/>
+            </a:prstGeom>
+            <a:noFill/>
+          </p:spPr>
+          <p:txBody>
+            <a:bodyPr wrap="none" rtlCol="0">
+              <a:spAutoFit/>
+            </a:bodyPr>
+            <a:lstStyle/>
+            <a:p>
+              <a:r>
+                <a:rPr kumimoji="1" lang="en-US" altLang="ja-JP" sz="7200" dirty="0">
+                  <a:solidFill>
+                    <a:schemeClr val="bg1"/>
+                  </a:solidFill>
+                  <a:latin typeface="Times New Roman" panose="02020603050405020304" pitchFamily="18" charset="0"/>
+                  <a:cs typeface="Times New Roman" panose="02020603050405020304" pitchFamily="18" charset="0"/>
+                </a:rPr>
+                <a:t>?</a:t>
+              </a:r>
+              <a:endParaRPr kumimoji="1" lang="ja-JP" altLang="en-US" sz="7200">
+                <a:solidFill>
+                  <a:schemeClr val="bg1"/>
+                </a:solidFill>
+                <a:latin typeface="Times New Roman" panose="02020603050405020304" pitchFamily="18" charset="0"/>
+                <a:cs typeface="Times New Roman" panose="02020603050405020304" pitchFamily="18" charset="0"/>
+              </a:endParaRPr>
+            </a:p>
+          </p:txBody>
+        </p:sp>
+      </p:grpSp>
+      <p:grpSp>
+        <p:nvGrpSpPr>
+          <p:cNvPr id="102" name="グループ化 101">
+            <a:extLst>
+              <a:ext uri="{FF2B5EF4-FFF2-40B4-BE49-F238E27FC236}">
+                <a16:creationId xmlns:a16="http://schemas.microsoft.com/office/drawing/2014/main" id="{0BE2572C-5B26-D07B-7B2E-BB9A08E06222}"/>
+              </a:ext>
+            </a:extLst>
+          </p:cNvPr>
+          <p:cNvGrpSpPr/>
+          <p:nvPr/>
+        </p:nvGrpSpPr>
+        <p:grpSpPr>
+          <a:xfrm>
+            <a:off x="3036142" y="1405883"/>
+            <a:ext cx="1080000" cy="1080000"/>
+            <a:chOff x="3036142" y="1405883"/>
+            <a:chExt cx="1080000" cy="1080000"/>
+          </a:xfrm>
+        </p:grpSpPr>
+        <p:grpSp>
+          <p:nvGrpSpPr>
+            <p:cNvPr id="100" name="グループ化 99">
+              <a:extLst>
+                <a:ext uri="{FF2B5EF4-FFF2-40B4-BE49-F238E27FC236}">
+                  <a16:creationId xmlns:a16="http://schemas.microsoft.com/office/drawing/2014/main" id="{C05304E3-DB30-FE62-22EC-B78E1D30E2A1}"/>
+                </a:ext>
+              </a:extLst>
+            </p:cNvPr>
+            <p:cNvGrpSpPr/>
+            <p:nvPr/>
+          </p:nvGrpSpPr>
+          <p:grpSpPr>
+            <a:xfrm>
+              <a:off x="3036142" y="1405883"/>
+              <a:ext cx="1080000" cy="1080000"/>
+              <a:chOff x="3036142" y="1405883"/>
+              <a:chExt cx="1080000" cy="1080000"/>
+            </a:xfrm>
+          </p:grpSpPr>
+          <p:sp>
+            <p:nvSpPr>
+              <p:cNvPr id="92" name="角丸四角形 91">
+                <a:extLst>
+                  <a:ext uri="{FF2B5EF4-FFF2-40B4-BE49-F238E27FC236}">
+                    <a16:creationId xmlns:a16="http://schemas.microsoft.com/office/drawing/2014/main" id="{F2F86E4A-2A2E-A8D8-5D11-A31F2F7741D4}"/>
+                  </a:ext>
+                </a:extLst>
+              </p:cNvPr>
+              <p:cNvSpPr>
+                <a:spLocks noChangeAspect="1"/>
+              </p:cNvSpPr>
+              <p:nvPr/>
+            </p:nvSpPr>
+            <p:spPr>
+              <a:xfrm>
+                <a:off x="3036142" y="1405883"/>
+                <a:ext cx="1080000" cy="1080000"/>
+              </a:xfrm>
+              <a:prstGeom prst="roundRect">
+                <a:avLst>
+                  <a:gd name="adj" fmla="val 7374"/>
+                </a:avLst>
+              </a:prstGeom>
+              <a:solidFill>
+                <a:srgbClr val="00387D"/>
+              </a:solidFill>
+              <a:ln>
+                <a:solidFill>
+                  <a:srgbClr val="00387D"/>
+                </a:solidFill>
+              </a:ln>
+            </p:spPr>
+            <p:style>
+              <a:lnRef idx="2">
+                <a:schemeClr val="accent1">
+                  <a:shade val="15000"/>
+                </a:schemeClr>
+              </a:lnRef>
+              <a:fillRef idx="1">
+                <a:schemeClr val="accent1"/>
+              </a:fillRef>
+              <a:effectRef idx="0">
+                <a:schemeClr val="accent1"/>
+              </a:effectRef>
+              <a:fontRef idx="minor">
+                <a:schemeClr val="lt1"/>
+              </a:fontRef>
+            </p:style>
+            <p:txBody>
+              <a:bodyPr rtlCol="0" anchor="ctr"/>
+              <a:lstStyle/>
+              <a:p>
+                <a:pPr algn="ctr"/>
+                <a:endParaRPr kumimoji="1" lang="ja-JP" altLang="en-US"/>
+              </a:p>
+            </p:txBody>
+          </p:sp>
+          <p:sp>
+            <p:nvSpPr>
+              <p:cNvPr id="94" name="円/楕円 93">
+                <a:extLst>
+                  <a:ext uri="{FF2B5EF4-FFF2-40B4-BE49-F238E27FC236}">
+                    <a16:creationId xmlns:a16="http://schemas.microsoft.com/office/drawing/2014/main" id="{325AB7C3-F4A3-B4F7-85B5-FAFC981A89FA}"/>
+                  </a:ext>
+                </a:extLst>
+              </p:cNvPr>
+              <p:cNvSpPr>
+                <a:spLocks noChangeAspect="1"/>
+              </p:cNvSpPr>
+              <p:nvPr/>
+            </p:nvSpPr>
+            <p:spPr>
+              <a:xfrm>
+                <a:off x="3126142" y="1495883"/>
+                <a:ext cx="900000" cy="900000"/>
+              </a:xfrm>
+              <a:prstGeom prst="ellipse">
+                <a:avLst/>
+              </a:prstGeom>
+              <a:noFill/>
+              <a:ln w="63500">
+                <a:solidFill>
+                  <a:schemeClr val="bg1"/>
+                </a:solidFill>
+              </a:ln>
+            </p:spPr>
+            <p:style>
+              <a:lnRef idx="2">
+                <a:schemeClr val="accent1">
+                  <a:shade val="15000"/>
+                </a:schemeClr>
+              </a:lnRef>
+              <a:fillRef idx="1">
+                <a:schemeClr val="accent1"/>
+              </a:fillRef>
+              <a:effectRef idx="0">
+                <a:schemeClr val="accent1"/>
+              </a:effectRef>
+              <a:fontRef idx="minor">
+                <a:schemeClr val="lt1"/>
+              </a:fontRef>
+            </p:style>
+            <p:txBody>
+              <a:bodyPr rtlCol="0" anchor="ctr"/>
+              <a:lstStyle/>
+              <a:p>
+                <a:pPr algn="ctr"/>
+                <a:endParaRPr kumimoji="1" lang="ja-JP" altLang="en-US"/>
+              </a:p>
+            </p:txBody>
+          </p:sp>
+          <p:sp>
+            <p:nvSpPr>
+              <p:cNvPr id="95" name="角丸四角形 94">
+                <a:extLst>
+                  <a:ext uri="{FF2B5EF4-FFF2-40B4-BE49-F238E27FC236}">
+                    <a16:creationId xmlns:a16="http://schemas.microsoft.com/office/drawing/2014/main" id="{F8CBA495-79B8-3B35-0EDA-DA3B0F7DD91C}"/>
+                  </a:ext>
+                </a:extLst>
+              </p:cNvPr>
+              <p:cNvSpPr/>
+              <p:nvPr/>
+            </p:nvSpPr>
+            <p:spPr>
+              <a:xfrm>
+                <a:off x="3540142" y="2287883"/>
+                <a:ext cx="72000" cy="108000"/>
+              </a:xfrm>
+              <a:prstGeom prst="roundRect">
+                <a:avLst/>
+              </a:prstGeom>
+              <a:solidFill>
+                <a:schemeClr val="bg1"/>
+              </a:solidFill>
+              <a:ln>
+                <a:noFill/>
+              </a:ln>
+            </p:spPr>
+            <p:style>
+              <a:lnRef idx="2">
+                <a:schemeClr val="accent1">
+                  <a:shade val="15000"/>
+                </a:schemeClr>
+              </a:lnRef>
+              <a:fillRef idx="1">
+                <a:schemeClr val="accent1"/>
+              </a:fillRef>
+              <a:effectRef idx="0">
+                <a:schemeClr val="accent1"/>
+              </a:effectRef>
+              <a:fontRef idx="minor">
+                <a:schemeClr val="lt1"/>
+              </a:fontRef>
+            </p:style>
+            <p:txBody>
+              <a:bodyPr rtlCol="0" anchor="ctr"/>
+              <a:lstStyle/>
+              <a:p>
+                <a:pPr algn="ctr"/>
+                <a:endParaRPr kumimoji="1" lang="ja-JP" altLang="en-US"/>
+              </a:p>
+            </p:txBody>
+          </p:sp>
+          <p:sp>
+            <p:nvSpPr>
+              <p:cNvPr id="96" name="角丸四角形 95">
+                <a:extLst>
+                  <a:ext uri="{FF2B5EF4-FFF2-40B4-BE49-F238E27FC236}">
+                    <a16:creationId xmlns:a16="http://schemas.microsoft.com/office/drawing/2014/main" id="{9111E350-8E08-E9CB-617C-00675277A948}"/>
+                  </a:ext>
+                </a:extLst>
+              </p:cNvPr>
+              <p:cNvSpPr/>
+              <p:nvPr/>
+            </p:nvSpPr>
+            <p:spPr>
+              <a:xfrm>
+                <a:off x="3540142" y="1495883"/>
+                <a:ext cx="72000" cy="108000"/>
+              </a:xfrm>
+              <a:prstGeom prst="roundRect">
+                <a:avLst/>
+              </a:prstGeom>
+              <a:solidFill>
+                <a:schemeClr val="bg1"/>
+              </a:solidFill>
+              <a:ln>
+                <a:noFill/>
+              </a:ln>
+            </p:spPr>
+            <p:style>
+              <a:lnRef idx="2">
+                <a:schemeClr val="accent1">
+                  <a:shade val="15000"/>
+                </a:schemeClr>
+              </a:lnRef>
+              <a:fillRef idx="1">
+                <a:schemeClr val="accent1"/>
+              </a:fillRef>
+              <a:effectRef idx="0">
+                <a:schemeClr val="accent1"/>
+              </a:effectRef>
+              <a:fontRef idx="minor">
+                <a:schemeClr val="lt1"/>
+              </a:fontRef>
+            </p:style>
+            <p:txBody>
+              <a:bodyPr rtlCol="0" anchor="ctr"/>
+              <a:lstStyle/>
+              <a:p>
+                <a:pPr algn="ctr"/>
+                <a:endParaRPr kumimoji="1" lang="ja-JP" altLang="en-US"/>
+              </a:p>
+            </p:txBody>
+          </p:sp>
+          <p:sp>
+            <p:nvSpPr>
+              <p:cNvPr id="97" name="角丸四角形 96">
+                <a:extLst>
+                  <a:ext uri="{FF2B5EF4-FFF2-40B4-BE49-F238E27FC236}">
+                    <a16:creationId xmlns:a16="http://schemas.microsoft.com/office/drawing/2014/main" id="{D13345AA-1C23-E3AD-1D48-15A32C471C43}"/>
+                  </a:ext>
+                </a:extLst>
+              </p:cNvPr>
+              <p:cNvSpPr/>
+              <p:nvPr/>
+            </p:nvSpPr>
+            <p:spPr>
+              <a:xfrm rot="5400000">
+                <a:off x="3144142" y="1891883"/>
+                <a:ext cx="72000" cy="108000"/>
+              </a:xfrm>
+              <a:prstGeom prst="roundRect">
+                <a:avLst/>
+              </a:prstGeom>
+              <a:solidFill>
+                <a:schemeClr val="bg1"/>
+              </a:solidFill>
+              <a:ln>
+                <a:noFill/>
+              </a:ln>
+            </p:spPr>
+            <p:style>
+              <a:lnRef idx="2">
+                <a:schemeClr val="accent1">
+                  <a:shade val="15000"/>
+                </a:schemeClr>
+              </a:lnRef>
+              <a:fillRef idx="1">
+                <a:schemeClr val="accent1"/>
+              </a:fillRef>
+              <a:effectRef idx="0">
+                <a:schemeClr val="accent1"/>
+              </a:effectRef>
+              <a:fontRef idx="minor">
+                <a:schemeClr val="lt1"/>
+              </a:fontRef>
+            </p:style>
+            <p:txBody>
+              <a:bodyPr rtlCol="0" anchor="ctr"/>
+              <a:lstStyle/>
+              <a:p>
+                <a:pPr algn="ctr"/>
+                <a:endParaRPr kumimoji="1" lang="ja-JP" altLang="en-US"/>
+              </a:p>
+            </p:txBody>
+          </p:sp>
+          <p:sp>
+            <p:nvSpPr>
+              <p:cNvPr id="98" name="角丸四角形 97">
+                <a:extLst>
+                  <a:ext uri="{FF2B5EF4-FFF2-40B4-BE49-F238E27FC236}">
+                    <a16:creationId xmlns:a16="http://schemas.microsoft.com/office/drawing/2014/main" id="{158408C8-794D-A7CC-167D-D360B15BB7F4}"/>
+                  </a:ext>
+                </a:extLst>
+              </p:cNvPr>
+              <p:cNvSpPr/>
+              <p:nvPr/>
+            </p:nvSpPr>
+            <p:spPr>
+              <a:xfrm rot="5400000">
+                <a:off x="3936142" y="1891883"/>
+                <a:ext cx="72000" cy="108000"/>
+              </a:xfrm>
+              <a:prstGeom prst="roundRect">
+                <a:avLst/>
+              </a:prstGeom>
+              <a:solidFill>
+                <a:schemeClr val="bg1"/>
+              </a:solidFill>
+              <a:ln>
+                <a:noFill/>
+              </a:ln>
+            </p:spPr>
+            <p:style>
+              <a:lnRef idx="2">
+                <a:schemeClr val="accent1">
+                  <a:shade val="15000"/>
+                </a:schemeClr>
+              </a:lnRef>
+              <a:fillRef idx="1">
+                <a:schemeClr val="accent1"/>
+              </a:fillRef>
+              <a:effectRef idx="0">
+                <a:schemeClr val="accent1"/>
+              </a:effectRef>
+              <a:fontRef idx="minor">
+                <a:schemeClr val="lt1"/>
+              </a:fontRef>
+            </p:style>
+            <p:txBody>
+              <a:bodyPr rtlCol="0" anchor="ctr"/>
+              <a:lstStyle/>
+              <a:p>
+                <a:pPr algn="ctr"/>
+                <a:endParaRPr kumimoji="1" lang="ja-JP" altLang="en-US"/>
+              </a:p>
+            </p:txBody>
+          </p:sp>
+        </p:grpSp>
+        <p:pic>
+          <p:nvPicPr>
+            <p:cNvPr id="101" name="グラフィックス 100">
+              <a:extLst>
+                <a:ext uri="{FF2B5EF4-FFF2-40B4-BE49-F238E27FC236}">
+                  <a16:creationId xmlns:a16="http://schemas.microsoft.com/office/drawing/2014/main" id="{D8A1A196-E66F-B6A1-F9FA-FA09026C6D18}"/>
+                </a:ext>
+              </a:extLst>
+            </p:cNvPr>
+            <p:cNvPicPr>
+              <a:picLocks noChangeAspect="1"/>
+            </p:cNvPicPr>
+            <p:nvPr/>
+          </p:nvPicPr>
+          <p:blipFill>
+            <a:blip>
+              <a:extLst>
+                <a:ext uri="{96DAC541-7B7A-43D3-8B79-37D633B846F1}">
+                  <asvg:svgBlip xmlns:asvg="http://schemas.microsoft.com/office/drawing/2016/SVG/main" r:embed="rId2"/>
+                </a:ext>
+              </a:extLst>
+            </a:blip>
+            <a:stretch>
+              <a:fillRect/>
+            </a:stretch>
+          </p:blipFill>
+          <p:spPr>
+            <a:xfrm>
+              <a:off x="3306142" y="1639883"/>
+              <a:ext cx="612000" cy="612000"/>
+            </a:xfrm>
+            <a:prstGeom prst="rect">
+              <a:avLst/>
+            </a:prstGeom>
+          </p:spPr>
+        </p:pic>
+      </p:grpSp>
+      <p:grpSp>
+        <p:nvGrpSpPr>
+          <p:cNvPr id="103" name="グループ化 102">
+            <a:extLst>
+              <a:ext uri="{FF2B5EF4-FFF2-40B4-BE49-F238E27FC236}">
+                <a16:creationId xmlns:a16="http://schemas.microsoft.com/office/drawing/2014/main" id="{86299184-34EB-34E8-06AB-8009FFBA92C1}"/>
+              </a:ext>
+            </a:extLst>
+          </p:cNvPr>
+          <p:cNvGrpSpPr/>
+          <p:nvPr/>
+        </p:nvGrpSpPr>
+        <p:grpSpPr>
+          <a:xfrm>
+            <a:off x="4455541" y="1405883"/>
+            <a:ext cx="1080000" cy="1080000"/>
+            <a:chOff x="3036142" y="1405883"/>
+            <a:chExt cx="1080000" cy="1080000"/>
+          </a:xfrm>
+        </p:grpSpPr>
+        <p:grpSp>
+          <p:nvGrpSpPr>
+            <p:cNvPr id="104" name="グループ化 103">
+              <a:extLst>
+                <a:ext uri="{FF2B5EF4-FFF2-40B4-BE49-F238E27FC236}">
+                  <a16:creationId xmlns:a16="http://schemas.microsoft.com/office/drawing/2014/main" id="{B4EC8DD2-2767-4FB3-71C0-66545F105E29}"/>
+                </a:ext>
+              </a:extLst>
+            </p:cNvPr>
+            <p:cNvGrpSpPr/>
+            <p:nvPr/>
+          </p:nvGrpSpPr>
+          <p:grpSpPr>
+            <a:xfrm>
+              <a:off x="3036142" y="1405883"/>
+              <a:ext cx="1080000" cy="1080000"/>
+              <a:chOff x="3036142" y="1405883"/>
+              <a:chExt cx="1080000" cy="1080000"/>
+            </a:xfrm>
+          </p:grpSpPr>
+          <p:sp>
+            <p:nvSpPr>
+              <p:cNvPr id="148" name="角丸四角形 147">
+                <a:extLst>
+                  <a:ext uri="{FF2B5EF4-FFF2-40B4-BE49-F238E27FC236}">
+                    <a16:creationId xmlns:a16="http://schemas.microsoft.com/office/drawing/2014/main" id="{81F2865F-E453-1050-CE7A-955E6815A346}"/>
+                  </a:ext>
+                </a:extLst>
+              </p:cNvPr>
+              <p:cNvSpPr>
+                <a:spLocks noChangeAspect="1"/>
+              </p:cNvSpPr>
+              <p:nvPr/>
+            </p:nvSpPr>
+            <p:spPr>
+              <a:xfrm>
+                <a:off x="3036142" y="1405883"/>
+                <a:ext cx="1080000" cy="1080000"/>
+              </a:xfrm>
+              <a:prstGeom prst="roundRect">
+                <a:avLst>
+                  <a:gd name="adj" fmla="val 7374"/>
+                </a:avLst>
+              </a:prstGeom>
+              <a:solidFill>
+                <a:schemeClr val="bg1"/>
+              </a:solidFill>
+              <a:ln>
+                <a:solidFill>
+                  <a:srgbClr val="00387D"/>
+                </a:solidFill>
+              </a:ln>
+            </p:spPr>
+            <p:style>
+              <a:lnRef idx="2">
+                <a:schemeClr val="accent1">
+                  <a:shade val="15000"/>
+                </a:schemeClr>
+              </a:lnRef>
+              <a:fillRef idx="1">
+                <a:schemeClr val="accent1"/>
+              </a:fillRef>
+              <a:effectRef idx="0">
+                <a:schemeClr val="accent1"/>
+              </a:effectRef>
+              <a:fontRef idx="minor">
+                <a:schemeClr val="lt1"/>
+              </a:fontRef>
+            </p:style>
+            <p:txBody>
+              <a:bodyPr rtlCol="0" anchor="ctr"/>
+              <a:lstStyle/>
+              <a:p>
+                <a:pPr algn="ctr"/>
+                <a:endParaRPr kumimoji="1" lang="ja-JP" altLang="en-US"/>
+              </a:p>
+            </p:txBody>
+          </p:sp>
+          <p:sp>
+            <p:nvSpPr>
+              <p:cNvPr id="149" name="円/楕円 148">
+                <a:extLst>
+                  <a:ext uri="{FF2B5EF4-FFF2-40B4-BE49-F238E27FC236}">
+                    <a16:creationId xmlns:a16="http://schemas.microsoft.com/office/drawing/2014/main" id="{AABDC3EA-366E-455B-2B08-F0EDBCF999DD}"/>
+                  </a:ext>
+                </a:extLst>
+              </p:cNvPr>
+              <p:cNvSpPr>
+                <a:spLocks noChangeAspect="1"/>
+              </p:cNvSpPr>
+              <p:nvPr/>
+            </p:nvSpPr>
+            <p:spPr>
+              <a:xfrm>
+                <a:off x="3126142" y="1495883"/>
+                <a:ext cx="900000" cy="900000"/>
+              </a:xfrm>
+              <a:prstGeom prst="ellipse">
+                <a:avLst/>
+              </a:prstGeom>
+              <a:noFill/>
+              <a:ln w="63500">
+                <a:solidFill>
+                  <a:srgbClr val="00387D"/>
+                </a:solidFill>
+              </a:ln>
+            </p:spPr>
+            <p:style>
+              <a:lnRef idx="2">
+                <a:schemeClr val="accent1">
+                  <a:shade val="15000"/>
+                </a:schemeClr>
+              </a:lnRef>
+              <a:fillRef idx="1">
+                <a:schemeClr val="accent1"/>
+              </a:fillRef>
+              <a:effectRef idx="0">
+                <a:schemeClr val="accent1"/>
+              </a:effectRef>
+              <a:fontRef idx="minor">
+                <a:schemeClr val="lt1"/>
+              </a:fontRef>
+            </p:style>
+            <p:txBody>
+              <a:bodyPr rtlCol="0" anchor="ctr"/>
+              <a:lstStyle/>
+              <a:p>
+                <a:pPr algn="ctr"/>
+                <a:endParaRPr kumimoji="1" lang="ja-JP" altLang="en-US"/>
+              </a:p>
+            </p:txBody>
+          </p:sp>
+          <p:sp>
+            <p:nvSpPr>
+              <p:cNvPr id="150" name="角丸四角形 149">
+                <a:extLst>
+                  <a:ext uri="{FF2B5EF4-FFF2-40B4-BE49-F238E27FC236}">
+                    <a16:creationId xmlns:a16="http://schemas.microsoft.com/office/drawing/2014/main" id="{9AD5B2DE-0C6C-3398-8DA8-C4C8152FFEAB}"/>
+                  </a:ext>
+                </a:extLst>
+              </p:cNvPr>
+              <p:cNvSpPr/>
+              <p:nvPr/>
+            </p:nvSpPr>
+            <p:spPr>
+              <a:xfrm>
+                <a:off x="3540142" y="2287883"/>
+                <a:ext cx="72000" cy="108000"/>
+              </a:xfrm>
+              <a:prstGeom prst="roundRect">
+                <a:avLst/>
+              </a:prstGeom>
+              <a:solidFill>
+                <a:srgbClr val="00387D"/>
+              </a:solidFill>
+              <a:ln>
+                <a:noFill/>
+              </a:ln>
+            </p:spPr>
+            <p:style>
+              <a:lnRef idx="2">
+                <a:schemeClr val="accent1">
+                  <a:shade val="15000"/>
+                </a:schemeClr>
+              </a:lnRef>
+              <a:fillRef idx="1">
+                <a:schemeClr val="accent1"/>
+              </a:fillRef>
+              <a:effectRef idx="0">
+                <a:schemeClr val="accent1"/>
+              </a:effectRef>
+              <a:fontRef idx="minor">
+                <a:schemeClr val="lt1"/>
+              </a:fontRef>
+            </p:style>
+            <p:txBody>
+              <a:bodyPr rtlCol="0" anchor="ctr"/>
+              <a:lstStyle/>
+              <a:p>
+                <a:pPr algn="ctr"/>
+                <a:endParaRPr kumimoji="1" lang="ja-JP" altLang="en-US"/>
+              </a:p>
+            </p:txBody>
+          </p:sp>
+          <p:sp>
+            <p:nvSpPr>
+              <p:cNvPr id="151" name="角丸四角形 150">
+                <a:extLst>
+                  <a:ext uri="{FF2B5EF4-FFF2-40B4-BE49-F238E27FC236}">
+                    <a16:creationId xmlns:a16="http://schemas.microsoft.com/office/drawing/2014/main" id="{9B68CD0C-278E-E475-6D9B-7B84ABC14253}"/>
+                  </a:ext>
+                </a:extLst>
+              </p:cNvPr>
+              <p:cNvSpPr/>
+              <p:nvPr/>
+            </p:nvSpPr>
+            <p:spPr>
+              <a:xfrm>
+                <a:off x="3540142" y="1495883"/>
+                <a:ext cx="72000" cy="108000"/>
+              </a:xfrm>
+              <a:prstGeom prst="roundRect">
+                <a:avLst/>
+              </a:prstGeom>
+              <a:solidFill>
+                <a:srgbClr val="00387D"/>
+              </a:solidFill>
+              <a:ln>
+                <a:noFill/>
+              </a:ln>
+            </p:spPr>
+            <p:style>
+              <a:lnRef idx="2">
+                <a:schemeClr val="accent1">
+                  <a:shade val="15000"/>
+                </a:schemeClr>
+              </a:lnRef>
+              <a:fillRef idx="1">
+                <a:schemeClr val="accent1"/>
+              </a:fillRef>
+              <a:effectRef idx="0">
+                <a:schemeClr val="accent1"/>
+              </a:effectRef>
+              <a:fontRef idx="minor">
+                <a:schemeClr val="lt1"/>
+              </a:fontRef>
+            </p:style>
+            <p:txBody>
+              <a:bodyPr rtlCol="0" anchor="ctr"/>
+              <a:lstStyle/>
+              <a:p>
+                <a:pPr algn="ctr"/>
+                <a:endParaRPr kumimoji="1" lang="ja-JP" altLang="en-US"/>
+              </a:p>
+            </p:txBody>
+          </p:sp>
+          <p:sp>
+            <p:nvSpPr>
+              <p:cNvPr id="152" name="角丸四角形 151">
+                <a:extLst>
+                  <a:ext uri="{FF2B5EF4-FFF2-40B4-BE49-F238E27FC236}">
+                    <a16:creationId xmlns:a16="http://schemas.microsoft.com/office/drawing/2014/main" id="{704DC2B3-337D-139E-A90F-4AE738915CC4}"/>
+                  </a:ext>
+                </a:extLst>
+              </p:cNvPr>
+              <p:cNvSpPr/>
+              <p:nvPr/>
+            </p:nvSpPr>
+            <p:spPr>
+              <a:xfrm rot="5400000">
+                <a:off x="3144142" y="1891883"/>
+                <a:ext cx="72000" cy="108000"/>
+              </a:xfrm>
+              <a:prstGeom prst="roundRect">
+                <a:avLst/>
+              </a:prstGeom>
+              <a:solidFill>
+                <a:srgbClr val="00387D"/>
+              </a:solidFill>
+              <a:ln>
+                <a:noFill/>
+              </a:ln>
+            </p:spPr>
+            <p:style>
+              <a:lnRef idx="2">
+                <a:schemeClr val="accent1">
+                  <a:shade val="15000"/>
+                </a:schemeClr>
+              </a:lnRef>
+              <a:fillRef idx="1">
+                <a:schemeClr val="accent1"/>
+              </a:fillRef>
+              <a:effectRef idx="0">
+                <a:schemeClr val="accent1"/>
+              </a:effectRef>
+              <a:fontRef idx="minor">
+                <a:schemeClr val="lt1"/>
+              </a:fontRef>
+            </p:style>
+            <p:txBody>
+              <a:bodyPr rtlCol="0" anchor="ctr"/>
+              <a:lstStyle/>
+              <a:p>
+                <a:pPr algn="ctr"/>
+                <a:endParaRPr kumimoji="1" lang="ja-JP" altLang="en-US"/>
+              </a:p>
+            </p:txBody>
+          </p:sp>
+          <p:sp>
+            <p:nvSpPr>
+              <p:cNvPr id="153" name="角丸四角形 152">
+                <a:extLst>
+                  <a:ext uri="{FF2B5EF4-FFF2-40B4-BE49-F238E27FC236}">
+                    <a16:creationId xmlns:a16="http://schemas.microsoft.com/office/drawing/2014/main" id="{18A1EB07-6A3F-5AD7-E75A-60E651F0438E}"/>
+                  </a:ext>
+                </a:extLst>
+              </p:cNvPr>
+              <p:cNvSpPr/>
+              <p:nvPr/>
+            </p:nvSpPr>
+            <p:spPr>
+              <a:xfrm rot="5400000">
+                <a:off x="3936142" y="1891883"/>
+                <a:ext cx="72000" cy="108000"/>
+              </a:xfrm>
+              <a:prstGeom prst="roundRect">
+                <a:avLst/>
+              </a:prstGeom>
+              <a:solidFill>
+                <a:srgbClr val="00387D"/>
+              </a:solidFill>
+              <a:ln>
+                <a:noFill/>
+              </a:ln>
+            </p:spPr>
+            <p:style>
+              <a:lnRef idx="2">
+                <a:schemeClr val="accent1">
+                  <a:shade val="15000"/>
+                </a:schemeClr>
+              </a:lnRef>
+              <a:fillRef idx="1">
+                <a:schemeClr val="accent1"/>
+              </a:fillRef>
+              <a:effectRef idx="0">
+                <a:schemeClr val="accent1"/>
+              </a:effectRef>
+              <a:fontRef idx="minor">
+                <a:schemeClr val="lt1"/>
+              </a:fontRef>
+            </p:style>
+            <p:txBody>
+              <a:bodyPr rtlCol="0" anchor="ctr"/>
+              <a:lstStyle/>
+              <a:p>
+                <a:pPr algn="ctr"/>
+                <a:endParaRPr kumimoji="1" lang="ja-JP" altLang="en-US"/>
+              </a:p>
+            </p:txBody>
+          </p:sp>
+        </p:grpSp>
+        <p:pic>
+          <p:nvPicPr>
+            <p:cNvPr id="147" name="グラフィックス 146">
+              <a:extLst>
+                <a:ext uri="{FF2B5EF4-FFF2-40B4-BE49-F238E27FC236}">
+                  <a16:creationId xmlns:a16="http://schemas.microsoft.com/office/drawing/2014/main" id="{ACD6F9D6-06BD-1125-D6E3-723F75C25BA1}"/>
+                </a:ext>
+              </a:extLst>
+            </p:cNvPr>
+            <p:cNvPicPr>
+              <a:picLocks noChangeAspect="1"/>
+            </p:cNvPicPr>
+            <p:nvPr/>
+          </p:nvPicPr>
+          <p:blipFill>
+            <a:blip>
+              <a:extLst>
+                <a:ext uri="{96DAC541-7B7A-43D3-8B79-37D633B846F1}">
+                  <asvg:svgBlip xmlns:asvg="http://schemas.microsoft.com/office/drawing/2016/SVG/main" r:embed="rId3"/>
+                </a:ext>
+              </a:extLst>
+            </a:blip>
+            <a:stretch>
+              <a:fillRect/>
+            </a:stretch>
+          </p:blipFill>
+          <p:spPr>
+            <a:xfrm>
+              <a:off x="3306142" y="1639883"/>
+              <a:ext cx="612000" cy="612000"/>
             </a:xfrm>
             <a:prstGeom prst="rect">
               <a:avLst/>

--- a/resources/figures.pptx
+++ b/resources/figures.pptx
@@ -4477,7 +4477,7 @@
         </p:nvSpPr>
         <p:spPr>
           <a:xfrm>
-            <a:off x="1538868" y="4650059"/>
+            <a:off x="3000142" y="4640715"/>
             <a:ext cx="1080000" cy="1080000"/>
           </a:xfrm>
           <a:prstGeom prst="roundRect">
@@ -4533,7 +4533,7 @@
         </p:nvGrpSpPr>
         <p:grpSpPr>
           <a:xfrm>
-            <a:off x="1630675" y="4794059"/>
+            <a:off x="3091949" y="4784715"/>
             <a:ext cx="896386" cy="792000"/>
             <a:chOff x="1672682" y="4783874"/>
             <a:chExt cx="896386" cy="792000"/>
@@ -4946,7 +4946,7 @@
         </p:nvSpPr>
         <p:spPr>
           <a:xfrm>
-            <a:off x="2827505" y="4650059"/>
+            <a:off x="4288779" y="4640715"/>
             <a:ext cx="1080000" cy="1080000"/>
           </a:xfrm>
           <a:prstGeom prst="roundRect">
@@ -5002,7 +5002,7 @@
         </p:nvGrpSpPr>
         <p:grpSpPr>
           <a:xfrm>
-            <a:off x="2919312" y="4794059"/>
+            <a:off x="4380586" y="4784715"/>
             <a:ext cx="896386" cy="792000"/>
             <a:chOff x="1672682" y="4783874"/>
             <a:chExt cx="896386" cy="792000"/>
@@ -5415,7 +5415,7 @@
         </p:nvSpPr>
         <p:spPr>
           <a:xfrm>
-            <a:off x="4116142" y="4650059"/>
+            <a:off x="5577416" y="4640715"/>
             <a:ext cx="1080000" cy="1080000"/>
           </a:xfrm>
           <a:prstGeom prst="roundRect">
@@ -5471,7 +5471,7 @@
         </p:nvGrpSpPr>
         <p:grpSpPr>
           <a:xfrm>
-            <a:off x="4207949" y="4794059"/>
+            <a:off x="5669223" y="4784715"/>
             <a:ext cx="896386" cy="792000"/>
             <a:chOff x="1672682" y="4783874"/>
             <a:chExt cx="896386" cy="792000"/>
@@ -5882,7 +5882,7 @@
         </p:nvSpPr>
         <p:spPr>
           <a:xfrm>
-            <a:off x="1934719" y="4732859"/>
+            <a:off x="3395993" y="4723515"/>
             <a:ext cx="646161" cy="914400"/>
           </a:xfrm>
           <a:prstGeom prst="rect">
@@ -5936,7 +5936,7 @@
         </p:nvSpPr>
         <p:spPr>
           <a:xfrm>
-            <a:off x="3525971" y="4732859"/>
+            <a:off x="4987245" y="4723515"/>
             <a:ext cx="330045" cy="914400"/>
           </a:xfrm>
           <a:prstGeom prst="rect">
@@ -5990,7 +5990,7 @@
         </p:nvGrpSpPr>
         <p:grpSpPr>
           <a:xfrm>
-            <a:off x="5892940" y="4650059"/>
+            <a:off x="7354214" y="4640715"/>
             <a:ext cx="1080000" cy="1080000"/>
             <a:chOff x="5892940" y="4650059"/>
             <a:chExt cx="1080000" cy="1080000"/>
@@ -6339,7 +6339,7 @@
         </p:nvSpPr>
         <p:spPr>
           <a:xfrm>
-            <a:off x="1538868" y="3313136"/>
+            <a:off x="3000142" y="3303792"/>
             <a:ext cx="1080000" cy="1080000"/>
           </a:xfrm>
           <a:prstGeom prst="roundRect">
@@ -6395,7 +6395,7 @@
         </p:nvGrpSpPr>
         <p:grpSpPr>
           <a:xfrm>
-            <a:off x="1630675" y="3457136"/>
+            <a:off x="3091949" y="3447792"/>
             <a:ext cx="896386" cy="792000"/>
             <a:chOff x="1672682" y="4783874"/>
             <a:chExt cx="896386" cy="792000"/>
@@ -6802,7 +6802,7 @@
         </p:nvSpPr>
         <p:spPr>
           <a:xfrm>
-            <a:off x="2827505" y="3313136"/>
+            <a:off x="4288779" y="3303792"/>
             <a:ext cx="1080000" cy="1080000"/>
           </a:xfrm>
           <a:prstGeom prst="roundRect">
@@ -6858,7 +6858,7 @@
         </p:nvGrpSpPr>
         <p:grpSpPr>
           <a:xfrm>
-            <a:off x="2919312" y="3457136"/>
+            <a:off x="4380586" y="3447792"/>
             <a:ext cx="896386" cy="792000"/>
             <a:chOff x="1672682" y="4783874"/>
             <a:chExt cx="896386" cy="792000"/>
@@ -7265,7 +7265,7 @@
         </p:nvSpPr>
         <p:spPr>
           <a:xfrm>
-            <a:off x="4116142" y="3313136"/>
+            <a:off x="5577416" y="3303792"/>
             <a:ext cx="1080000" cy="1080000"/>
           </a:xfrm>
           <a:prstGeom prst="roundRect">
@@ -7321,7 +7321,7 @@
         </p:nvGrpSpPr>
         <p:grpSpPr>
           <a:xfrm>
-            <a:off x="4207949" y="3457136"/>
+            <a:off x="5669223" y="3447792"/>
             <a:ext cx="896386" cy="792000"/>
             <a:chOff x="1672682" y="4783874"/>
             <a:chExt cx="896386" cy="792000"/>
@@ -7732,7 +7732,7 @@
         </p:nvSpPr>
         <p:spPr>
           <a:xfrm>
-            <a:off x="1934719" y="3395936"/>
+            <a:off x="3395993" y="3386592"/>
             <a:ext cx="646161" cy="914400"/>
           </a:xfrm>
           <a:prstGeom prst="rect">
@@ -7786,7 +7786,7 @@
         </p:nvSpPr>
         <p:spPr>
           <a:xfrm>
-            <a:off x="3525971" y="3395936"/>
+            <a:off x="4987245" y="3386592"/>
             <a:ext cx="330045" cy="914400"/>
           </a:xfrm>
           <a:prstGeom prst="rect">
@@ -7840,7 +7840,7 @@
         </p:nvGrpSpPr>
         <p:grpSpPr>
           <a:xfrm>
-            <a:off x="5892940" y="3313136"/>
+            <a:off x="7354214" y="3303792"/>
             <a:ext cx="1080000" cy="1080000"/>
             <a:chOff x="5892940" y="4650059"/>
             <a:chExt cx="1080000" cy="1080000"/>
@@ -10141,6 +10141,1046 @@
           </p:spPr>
         </p:pic>
       </p:grpSp>
+      <p:sp>
+        <p:nvSpPr>
+          <p:cNvPr id="7" name="角丸四角形 6">
+            <a:extLst>
+              <a:ext uri="{FF2B5EF4-FFF2-40B4-BE49-F238E27FC236}">
+                <a16:creationId xmlns:a16="http://schemas.microsoft.com/office/drawing/2014/main" id="{ED00D71F-234F-4537-E69E-4D496AF068DF}"/>
+              </a:ext>
+            </a:extLst>
+          </p:cNvPr>
+          <p:cNvSpPr>
+            <a:spLocks noChangeAspect="1"/>
+          </p:cNvSpPr>
+          <p:nvPr/>
+        </p:nvSpPr>
+        <p:spPr>
+          <a:xfrm>
+            <a:off x="1600130" y="4653843"/>
+            <a:ext cx="1080000" cy="1080000"/>
+          </a:xfrm>
+          <a:prstGeom prst="roundRect">
+            <a:avLst>
+              <a:gd name="adj" fmla="val 7374"/>
+            </a:avLst>
+          </a:prstGeom>
+          <a:solidFill>
+            <a:schemeClr val="bg1"/>
+          </a:solidFill>
+          <a:ln>
+            <a:solidFill>
+              <a:srgbClr val="00387D"/>
+            </a:solidFill>
+          </a:ln>
+        </p:spPr>
+        <p:style>
+          <a:lnRef idx="2">
+            <a:schemeClr val="accent1">
+              <a:shade val="15000"/>
+            </a:schemeClr>
+          </a:lnRef>
+          <a:fillRef idx="1">
+            <a:schemeClr val="accent1"/>
+          </a:fillRef>
+          <a:effectRef idx="0">
+            <a:schemeClr val="accent1"/>
+          </a:effectRef>
+          <a:fontRef idx="minor">
+            <a:schemeClr val="lt1"/>
+          </a:fontRef>
+        </p:style>
+        <p:txBody>
+          <a:bodyPr rtlCol="0" anchor="ctr"/>
+          <a:lstStyle/>
+          <a:p>
+            <a:pPr algn="ctr"/>
+            <a:endParaRPr kumimoji="1" lang="ja-JP" altLang="en-US"/>
+          </a:p>
+        </p:txBody>
+      </p:sp>
+      <p:grpSp>
+        <p:nvGrpSpPr>
+          <p:cNvPr id="93" name="グループ化 92">
+            <a:extLst>
+              <a:ext uri="{FF2B5EF4-FFF2-40B4-BE49-F238E27FC236}">
+                <a16:creationId xmlns:a16="http://schemas.microsoft.com/office/drawing/2014/main" id="{582CC97A-1CCE-C836-BE49-1159C4AA617D}"/>
+              </a:ext>
+            </a:extLst>
+          </p:cNvPr>
+          <p:cNvGrpSpPr/>
+          <p:nvPr/>
+        </p:nvGrpSpPr>
+        <p:grpSpPr>
+          <a:xfrm>
+            <a:off x="1691937" y="4797843"/>
+            <a:ext cx="896386" cy="792000"/>
+            <a:chOff x="1672682" y="4783874"/>
+            <a:chExt cx="896386" cy="792000"/>
+          </a:xfrm>
+        </p:grpSpPr>
+        <p:grpSp>
+          <p:nvGrpSpPr>
+            <p:cNvPr id="99" name="グループ化 98">
+              <a:extLst>
+                <a:ext uri="{FF2B5EF4-FFF2-40B4-BE49-F238E27FC236}">
+                  <a16:creationId xmlns:a16="http://schemas.microsoft.com/office/drawing/2014/main" id="{CD527367-A869-FD26-CF98-5D70D5AE40EE}"/>
+                </a:ext>
+              </a:extLst>
+            </p:cNvPr>
+            <p:cNvGrpSpPr/>
+            <p:nvPr/>
+          </p:nvGrpSpPr>
+          <p:grpSpPr>
+            <a:xfrm>
+              <a:off x="1672682" y="4783874"/>
+              <a:ext cx="252000" cy="792000"/>
+              <a:chOff x="1672682" y="4783874"/>
+              <a:chExt cx="252000" cy="792000"/>
+            </a:xfrm>
+          </p:grpSpPr>
+          <p:sp>
+            <p:nvSpPr>
+              <p:cNvPr id="160" name="円/楕円 159">
+                <a:extLst>
+                  <a:ext uri="{FF2B5EF4-FFF2-40B4-BE49-F238E27FC236}">
+                    <a16:creationId xmlns:a16="http://schemas.microsoft.com/office/drawing/2014/main" id="{77C28A1F-67A6-A8A8-A446-51013D5E99D1}"/>
+                  </a:ext>
+                </a:extLst>
+              </p:cNvPr>
+              <p:cNvSpPr>
+                <a:spLocks noChangeAspect="1"/>
+              </p:cNvSpPr>
+              <p:nvPr/>
+            </p:nvSpPr>
+            <p:spPr>
+              <a:xfrm>
+                <a:off x="1672682" y="4783874"/>
+                <a:ext cx="252000" cy="252000"/>
+              </a:xfrm>
+              <a:prstGeom prst="ellipse">
+                <a:avLst/>
+              </a:prstGeom>
+              <a:solidFill>
+                <a:srgbClr val="00387D"/>
+              </a:solidFill>
+              <a:ln>
+                <a:noFill/>
+              </a:ln>
+            </p:spPr>
+            <p:style>
+              <a:lnRef idx="2">
+                <a:schemeClr val="accent1">
+                  <a:shade val="15000"/>
+                </a:schemeClr>
+              </a:lnRef>
+              <a:fillRef idx="1">
+                <a:schemeClr val="accent1"/>
+              </a:fillRef>
+              <a:effectRef idx="0">
+                <a:schemeClr val="accent1"/>
+              </a:effectRef>
+              <a:fontRef idx="minor">
+                <a:schemeClr val="lt1"/>
+              </a:fontRef>
+            </p:style>
+            <p:txBody>
+              <a:bodyPr rtlCol="0" anchor="ctr"/>
+              <a:lstStyle/>
+              <a:p>
+                <a:pPr algn="ctr"/>
+                <a:endParaRPr kumimoji="1" lang="ja-JP" altLang="en-US"/>
+              </a:p>
+            </p:txBody>
+          </p:sp>
+          <p:sp>
+            <p:nvSpPr>
+              <p:cNvPr id="161" name="片側の 2 つの角を丸めた四角形 160">
+                <a:extLst>
+                  <a:ext uri="{FF2B5EF4-FFF2-40B4-BE49-F238E27FC236}">
+                    <a16:creationId xmlns:a16="http://schemas.microsoft.com/office/drawing/2014/main" id="{C9E50600-E32E-9A8E-1590-885D538F1A47}"/>
+                  </a:ext>
+                </a:extLst>
+              </p:cNvPr>
+              <p:cNvSpPr/>
+              <p:nvPr/>
+            </p:nvSpPr>
+            <p:spPr>
+              <a:xfrm>
+                <a:off x="1672682" y="5035874"/>
+                <a:ext cx="252000" cy="540000"/>
+              </a:xfrm>
+              <a:prstGeom prst="round2SameRect">
+                <a:avLst>
+                  <a:gd name="adj1" fmla="val 48873"/>
+                  <a:gd name="adj2" fmla="val 0"/>
+                </a:avLst>
+              </a:prstGeom>
+              <a:solidFill>
+                <a:srgbClr val="00387D"/>
+              </a:solidFill>
+              <a:ln>
+                <a:noFill/>
+              </a:ln>
+            </p:spPr>
+            <p:style>
+              <a:lnRef idx="2">
+                <a:schemeClr val="accent1">
+                  <a:shade val="15000"/>
+                </a:schemeClr>
+              </a:lnRef>
+              <a:fillRef idx="1">
+                <a:schemeClr val="accent1"/>
+              </a:fillRef>
+              <a:effectRef idx="0">
+                <a:schemeClr val="accent1"/>
+              </a:effectRef>
+              <a:fontRef idx="minor">
+                <a:schemeClr val="lt1"/>
+              </a:fontRef>
+            </p:style>
+            <p:txBody>
+              <a:bodyPr rtlCol="0" anchor="ctr"/>
+              <a:lstStyle/>
+              <a:p>
+                <a:pPr algn="ctr"/>
+                <a:endParaRPr kumimoji="1" lang="ja-JP" altLang="en-US"/>
+              </a:p>
+            </p:txBody>
+          </p:sp>
+        </p:grpSp>
+        <p:grpSp>
+          <p:nvGrpSpPr>
+            <p:cNvPr id="154" name="グループ化 153">
+              <a:extLst>
+                <a:ext uri="{FF2B5EF4-FFF2-40B4-BE49-F238E27FC236}">
+                  <a16:creationId xmlns:a16="http://schemas.microsoft.com/office/drawing/2014/main" id="{7E90C5A3-4CDF-1B4A-11A5-1A2473ACA734}"/>
+                </a:ext>
+              </a:extLst>
+            </p:cNvPr>
+            <p:cNvGrpSpPr/>
+            <p:nvPr/>
+          </p:nvGrpSpPr>
+          <p:grpSpPr>
+            <a:xfrm>
+              <a:off x="1994875" y="4783874"/>
+              <a:ext cx="252000" cy="792000"/>
+              <a:chOff x="1672682" y="4783874"/>
+              <a:chExt cx="252000" cy="792000"/>
+            </a:xfrm>
+          </p:grpSpPr>
+          <p:sp>
+            <p:nvSpPr>
+              <p:cNvPr id="158" name="円/楕円 157">
+                <a:extLst>
+                  <a:ext uri="{FF2B5EF4-FFF2-40B4-BE49-F238E27FC236}">
+                    <a16:creationId xmlns:a16="http://schemas.microsoft.com/office/drawing/2014/main" id="{E0326C74-66DB-6DDC-4750-988557D1F013}"/>
+                  </a:ext>
+                </a:extLst>
+              </p:cNvPr>
+              <p:cNvSpPr>
+                <a:spLocks noChangeAspect="1"/>
+              </p:cNvSpPr>
+              <p:nvPr/>
+            </p:nvSpPr>
+            <p:spPr>
+              <a:xfrm>
+                <a:off x="1672682" y="4783874"/>
+                <a:ext cx="252000" cy="252000"/>
+              </a:xfrm>
+              <a:prstGeom prst="ellipse">
+                <a:avLst/>
+              </a:prstGeom>
+              <a:solidFill>
+                <a:srgbClr val="00387D"/>
+              </a:solidFill>
+              <a:ln>
+                <a:noFill/>
+              </a:ln>
+            </p:spPr>
+            <p:style>
+              <a:lnRef idx="2">
+                <a:schemeClr val="accent1">
+                  <a:shade val="15000"/>
+                </a:schemeClr>
+              </a:lnRef>
+              <a:fillRef idx="1">
+                <a:schemeClr val="accent1"/>
+              </a:fillRef>
+              <a:effectRef idx="0">
+                <a:schemeClr val="accent1"/>
+              </a:effectRef>
+              <a:fontRef idx="minor">
+                <a:schemeClr val="lt1"/>
+              </a:fontRef>
+            </p:style>
+            <p:txBody>
+              <a:bodyPr rtlCol="0" anchor="ctr"/>
+              <a:lstStyle/>
+              <a:p>
+                <a:pPr algn="ctr"/>
+                <a:endParaRPr kumimoji="1" lang="ja-JP" altLang="en-US"/>
+              </a:p>
+            </p:txBody>
+          </p:sp>
+          <p:sp>
+            <p:nvSpPr>
+              <p:cNvPr id="159" name="片側の 2 つの角を丸めた四角形 158">
+                <a:extLst>
+                  <a:ext uri="{FF2B5EF4-FFF2-40B4-BE49-F238E27FC236}">
+                    <a16:creationId xmlns:a16="http://schemas.microsoft.com/office/drawing/2014/main" id="{A1EF308D-DB12-9FD4-720E-3330FE3D723C}"/>
+                  </a:ext>
+                </a:extLst>
+              </p:cNvPr>
+              <p:cNvSpPr/>
+              <p:nvPr/>
+            </p:nvSpPr>
+            <p:spPr>
+              <a:xfrm>
+                <a:off x="1672682" y="5035874"/>
+                <a:ext cx="252000" cy="540000"/>
+              </a:xfrm>
+              <a:prstGeom prst="round2SameRect">
+                <a:avLst>
+                  <a:gd name="adj1" fmla="val 48873"/>
+                  <a:gd name="adj2" fmla="val 0"/>
+                </a:avLst>
+              </a:prstGeom>
+              <a:solidFill>
+                <a:srgbClr val="00387D"/>
+              </a:solidFill>
+              <a:ln>
+                <a:noFill/>
+              </a:ln>
+            </p:spPr>
+            <p:style>
+              <a:lnRef idx="2">
+                <a:schemeClr val="accent1">
+                  <a:shade val="15000"/>
+                </a:schemeClr>
+              </a:lnRef>
+              <a:fillRef idx="1">
+                <a:schemeClr val="accent1"/>
+              </a:fillRef>
+              <a:effectRef idx="0">
+                <a:schemeClr val="accent1"/>
+              </a:effectRef>
+              <a:fontRef idx="minor">
+                <a:schemeClr val="lt1"/>
+              </a:fontRef>
+            </p:style>
+            <p:txBody>
+              <a:bodyPr rtlCol="0" anchor="ctr"/>
+              <a:lstStyle/>
+              <a:p>
+                <a:pPr algn="ctr"/>
+                <a:endParaRPr kumimoji="1" lang="ja-JP" altLang="en-US"/>
+              </a:p>
+            </p:txBody>
+          </p:sp>
+        </p:grpSp>
+        <p:grpSp>
+          <p:nvGrpSpPr>
+            <p:cNvPr id="155" name="グループ化 154">
+              <a:extLst>
+                <a:ext uri="{FF2B5EF4-FFF2-40B4-BE49-F238E27FC236}">
+                  <a16:creationId xmlns:a16="http://schemas.microsoft.com/office/drawing/2014/main" id="{ECDC7505-33EC-91C6-4473-A445AB12595A}"/>
+                </a:ext>
+              </a:extLst>
+            </p:cNvPr>
+            <p:cNvGrpSpPr/>
+            <p:nvPr/>
+          </p:nvGrpSpPr>
+          <p:grpSpPr>
+            <a:xfrm>
+              <a:off x="2317068" y="4783874"/>
+              <a:ext cx="252000" cy="792000"/>
+              <a:chOff x="1672682" y="4783874"/>
+              <a:chExt cx="252000" cy="792000"/>
+            </a:xfrm>
+          </p:grpSpPr>
+          <p:sp>
+            <p:nvSpPr>
+              <p:cNvPr id="156" name="円/楕円 155">
+                <a:extLst>
+                  <a:ext uri="{FF2B5EF4-FFF2-40B4-BE49-F238E27FC236}">
+                    <a16:creationId xmlns:a16="http://schemas.microsoft.com/office/drawing/2014/main" id="{21B6A1DE-4097-B393-AC1C-0E023A5B3C2E}"/>
+                  </a:ext>
+                </a:extLst>
+              </p:cNvPr>
+              <p:cNvSpPr>
+                <a:spLocks noChangeAspect="1"/>
+              </p:cNvSpPr>
+              <p:nvPr/>
+            </p:nvSpPr>
+            <p:spPr>
+              <a:xfrm>
+                <a:off x="1672682" y="4783874"/>
+                <a:ext cx="252000" cy="252000"/>
+              </a:xfrm>
+              <a:prstGeom prst="ellipse">
+                <a:avLst/>
+              </a:prstGeom>
+              <a:solidFill>
+                <a:srgbClr val="00387D"/>
+              </a:solidFill>
+              <a:ln>
+                <a:noFill/>
+              </a:ln>
+            </p:spPr>
+            <p:style>
+              <a:lnRef idx="2">
+                <a:schemeClr val="accent1">
+                  <a:shade val="15000"/>
+                </a:schemeClr>
+              </a:lnRef>
+              <a:fillRef idx="1">
+                <a:schemeClr val="accent1"/>
+              </a:fillRef>
+              <a:effectRef idx="0">
+                <a:schemeClr val="accent1"/>
+              </a:effectRef>
+              <a:fontRef idx="minor">
+                <a:schemeClr val="lt1"/>
+              </a:fontRef>
+            </p:style>
+            <p:txBody>
+              <a:bodyPr rtlCol="0" anchor="ctr"/>
+              <a:lstStyle/>
+              <a:p>
+                <a:pPr algn="ctr"/>
+                <a:endParaRPr kumimoji="1" lang="ja-JP" altLang="en-US"/>
+              </a:p>
+            </p:txBody>
+          </p:sp>
+          <p:sp>
+            <p:nvSpPr>
+              <p:cNvPr id="157" name="片側の 2 つの角を丸めた四角形 156">
+                <a:extLst>
+                  <a:ext uri="{FF2B5EF4-FFF2-40B4-BE49-F238E27FC236}">
+                    <a16:creationId xmlns:a16="http://schemas.microsoft.com/office/drawing/2014/main" id="{4711FE12-CADF-0EF5-0767-8FA093590B1F}"/>
+                  </a:ext>
+                </a:extLst>
+              </p:cNvPr>
+              <p:cNvSpPr/>
+              <p:nvPr/>
+            </p:nvSpPr>
+            <p:spPr>
+              <a:xfrm>
+                <a:off x="1672682" y="5035874"/>
+                <a:ext cx="252000" cy="540000"/>
+              </a:xfrm>
+              <a:prstGeom prst="round2SameRect">
+                <a:avLst>
+                  <a:gd name="adj1" fmla="val 48873"/>
+                  <a:gd name="adj2" fmla="val 0"/>
+                </a:avLst>
+              </a:prstGeom>
+              <a:solidFill>
+                <a:srgbClr val="00387D"/>
+              </a:solidFill>
+              <a:ln>
+                <a:noFill/>
+              </a:ln>
+            </p:spPr>
+            <p:style>
+              <a:lnRef idx="2">
+                <a:schemeClr val="accent1">
+                  <a:shade val="15000"/>
+                </a:schemeClr>
+              </a:lnRef>
+              <a:fillRef idx="1">
+                <a:schemeClr val="accent1"/>
+              </a:fillRef>
+              <a:effectRef idx="0">
+                <a:schemeClr val="accent1"/>
+              </a:effectRef>
+              <a:fontRef idx="minor">
+                <a:schemeClr val="lt1"/>
+              </a:fontRef>
+            </p:style>
+            <p:txBody>
+              <a:bodyPr rtlCol="0" anchor="ctr"/>
+              <a:lstStyle/>
+              <a:p>
+                <a:pPr algn="ctr"/>
+                <a:endParaRPr kumimoji="1" lang="ja-JP" altLang="en-US"/>
+              </a:p>
+            </p:txBody>
+          </p:sp>
+        </p:grpSp>
+      </p:grpSp>
+      <p:sp>
+        <p:nvSpPr>
+          <p:cNvPr id="162" name="正方形/長方形 161">
+            <a:extLst>
+              <a:ext uri="{FF2B5EF4-FFF2-40B4-BE49-F238E27FC236}">
+                <a16:creationId xmlns:a16="http://schemas.microsoft.com/office/drawing/2014/main" id="{EFC77D72-2D57-AC30-71F8-3D00CDC4D523}"/>
+              </a:ext>
+            </a:extLst>
+          </p:cNvPr>
+          <p:cNvSpPr/>
+          <p:nvPr/>
+        </p:nvSpPr>
+        <p:spPr>
+          <a:xfrm>
+            <a:off x="1638917" y="4736643"/>
+            <a:ext cx="1003226" cy="914400"/>
+          </a:xfrm>
+          <a:prstGeom prst="rect">
+            <a:avLst/>
+          </a:prstGeom>
+          <a:solidFill>
+            <a:srgbClr val="FFFFFF">
+              <a:alpha val="69804"/>
+            </a:srgbClr>
+          </a:solidFill>
+          <a:ln>
+            <a:noFill/>
+          </a:ln>
+        </p:spPr>
+        <p:style>
+          <a:lnRef idx="2">
+            <a:schemeClr val="accent1">
+              <a:shade val="15000"/>
+            </a:schemeClr>
+          </a:lnRef>
+          <a:fillRef idx="1">
+            <a:schemeClr val="accent1"/>
+          </a:fillRef>
+          <a:effectRef idx="0">
+            <a:schemeClr val="accent1"/>
+          </a:effectRef>
+          <a:fontRef idx="minor">
+            <a:schemeClr val="lt1"/>
+          </a:fontRef>
+        </p:style>
+        <p:txBody>
+          <a:bodyPr rtlCol="0" anchor="ctr"/>
+          <a:lstStyle/>
+          <a:p>
+            <a:pPr algn="ctr"/>
+            <a:endParaRPr kumimoji="1" lang="ja-JP" altLang="en-US"/>
+          </a:p>
+        </p:txBody>
+      </p:sp>
+      <p:sp>
+        <p:nvSpPr>
+          <p:cNvPr id="163" name="角丸四角形 162">
+            <a:extLst>
+              <a:ext uri="{FF2B5EF4-FFF2-40B4-BE49-F238E27FC236}">
+                <a16:creationId xmlns:a16="http://schemas.microsoft.com/office/drawing/2014/main" id="{56968E88-A1F4-0010-08F8-E9DCCBCE60F7}"/>
+              </a:ext>
+            </a:extLst>
+          </p:cNvPr>
+          <p:cNvSpPr>
+            <a:spLocks noChangeAspect="1"/>
+          </p:cNvSpPr>
+          <p:nvPr/>
+        </p:nvSpPr>
+        <p:spPr>
+          <a:xfrm>
+            <a:off x="1600130" y="3316920"/>
+            <a:ext cx="1080000" cy="1080000"/>
+          </a:xfrm>
+          <a:prstGeom prst="roundRect">
+            <a:avLst>
+              <a:gd name="adj" fmla="val 7374"/>
+            </a:avLst>
+          </a:prstGeom>
+          <a:solidFill>
+            <a:srgbClr val="00387D"/>
+          </a:solidFill>
+          <a:ln>
+            <a:solidFill>
+              <a:srgbClr val="00387D"/>
+            </a:solidFill>
+          </a:ln>
+        </p:spPr>
+        <p:style>
+          <a:lnRef idx="2">
+            <a:schemeClr val="accent1">
+              <a:shade val="15000"/>
+            </a:schemeClr>
+          </a:lnRef>
+          <a:fillRef idx="1">
+            <a:schemeClr val="accent1"/>
+          </a:fillRef>
+          <a:effectRef idx="0">
+            <a:schemeClr val="accent1"/>
+          </a:effectRef>
+          <a:fontRef idx="minor">
+            <a:schemeClr val="lt1"/>
+          </a:fontRef>
+        </p:style>
+        <p:txBody>
+          <a:bodyPr rtlCol="0" anchor="ctr"/>
+          <a:lstStyle/>
+          <a:p>
+            <a:pPr algn="ctr"/>
+            <a:endParaRPr kumimoji="1" lang="ja-JP" altLang="en-US"/>
+          </a:p>
+        </p:txBody>
+      </p:sp>
+      <p:grpSp>
+        <p:nvGrpSpPr>
+          <p:cNvPr id="164" name="グループ化 163">
+            <a:extLst>
+              <a:ext uri="{FF2B5EF4-FFF2-40B4-BE49-F238E27FC236}">
+                <a16:creationId xmlns:a16="http://schemas.microsoft.com/office/drawing/2014/main" id="{2AFCC35F-E853-87DB-B0DF-F0DF7EDDF1E4}"/>
+              </a:ext>
+            </a:extLst>
+          </p:cNvPr>
+          <p:cNvGrpSpPr/>
+          <p:nvPr/>
+        </p:nvGrpSpPr>
+        <p:grpSpPr>
+          <a:xfrm>
+            <a:off x="1691937" y="3460920"/>
+            <a:ext cx="896386" cy="792000"/>
+            <a:chOff x="1672682" y="4783874"/>
+            <a:chExt cx="896386" cy="792000"/>
+          </a:xfrm>
+          <a:solidFill>
+            <a:schemeClr val="bg1"/>
+          </a:solidFill>
+        </p:grpSpPr>
+        <p:grpSp>
+          <p:nvGrpSpPr>
+            <p:cNvPr id="165" name="グループ化 164">
+              <a:extLst>
+                <a:ext uri="{FF2B5EF4-FFF2-40B4-BE49-F238E27FC236}">
+                  <a16:creationId xmlns:a16="http://schemas.microsoft.com/office/drawing/2014/main" id="{CB781C92-6120-10E6-56BD-EBE7AD6FAF9D}"/>
+                </a:ext>
+              </a:extLst>
+            </p:cNvPr>
+            <p:cNvGrpSpPr/>
+            <p:nvPr/>
+          </p:nvGrpSpPr>
+          <p:grpSpPr>
+            <a:xfrm>
+              <a:off x="1672682" y="4783874"/>
+              <a:ext cx="252000" cy="792000"/>
+              <a:chOff x="1672682" y="4783874"/>
+              <a:chExt cx="252000" cy="792000"/>
+            </a:xfrm>
+            <a:grpFill/>
+          </p:grpSpPr>
+          <p:sp>
+            <p:nvSpPr>
+              <p:cNvPr id="172" name="円/楕円 171">
+                <a:extLst>
+                  <a:ext uri="{FF2B5EF4-FFF2-40B4-BE49-F238E27FC236}">
+                    <a16:creationId xmlns:a16="http://schemas.microsoft.com/office/drawing/2014/main" id="{61779F83-50B8-2C8B-9059-BCA1B85F39B4}"/>
+                  </a:ext>
+                </a:extLst>
+              </p:cNvPr>
+              <p:cNvSpPr>
+                <a:spLocks noChangeAspect="1"/>
+              </p:cNvSpPr>
+              <p:nvPr/>
+            </p:nvSpPr>
+            <p:spPr>
+              <a:xfrm>
+                <a:off x="1672682" y="4783874"/>
+                <a:ext cx="252000" cy="252000"/>
+              </a:xfrm>
+              <a:prstGeom prst="ellipse">
+                <a:avLst/>
+              </a:prstGeom>
+              <a:grpFill/>
+              <a:ln>
+                <a:noFill/>
+              </a:ln>
+            </p:spPr>
+            <p:style>
+              <a:lnRef idx="2">
+                <a:schemeClr val="accent1">
+                  <a:shade val="15000"/>
+                </a:schemeClr>
+              </a:lnRef>
+              <a:fillRef idx="1">
+                <a:schemeClr val="accent1"/>
+              </a:fillRef>
+              <a:effectRef idx="0">
+                <a:schemeClr val="accent1"/>
+              </a:effectRef>
+              <a:fontRef idx="minor">
+                <a:schemeClr val="lt1"/>
+              </a:fontRef>
+            </p:style>
+            <p:txBody>
+              <a:bodyPr rtlCol="0" anchor="ctr"/>
+              <a:lstStyle/>
+              <a:p>
+                <a:pPr algn="ctr"/>
+                <a:endParaRPr kumimoji="1" lang="ja-JP" altLang="en-US"/>
+              </a:p>
+            </p:txBody>
+          </p:sp>
+          <p:sp>
+            <p:nvSpPr>
+              <p:cNvPr id="173" name="片側の 2 つの角を丸めた四角形 172">
+                <a:extLst>
+                  <a:ext uri="{FF2B5EF4-FFF2-40B4-BE49-F238E27FC236}">
+                    <a16:creationId xmlns:a16="http://schemas.microsoft.com/office/drawing/2014/main" id="{BE58A455-B1E0-320E-0671-ED1C232C96AE}"/>
+                  </a:ext>
+                </a:extLst>
+              </p:cNvPr>
+              <p:cNvSpPr/>
+              <p:nvPr/>
+            </p:nvSpPr>
+            <p:spPr>
+              <a:xfrm>
+                <a:off x="1672682" y="5035874"/>
+                <a:ext cx="252000" cy="540000"/>
+              </a:xfrm>
+              <a:prstGeom prst="round2SameRect">
+                <a:avLst>
+                  <a:gd name="adj1" fmla="val 48873"/>
+                  <a:gd name="adj2" fmla="val 0"/>
+                </a:avLst>
+              </a:prstGeom>
+              <a:grpFill/>
+              <a:ln>
+                <a:noFill/>
+              </a:ln>
+            </p:spPr>
+            <p:style>
+              <a:lnRef idx="2">
+                <a:schemeClr val="accent1">
+                  <a:shade val="15000"/>
+                </a:schemeClr>
+              </a:lnRef>
+              <a:fillRef idx="1">
+                <a:schemeClr val="accent1"/>
+              </a:fillRef>
+              <a:effectRef idx="0">
+                <a:schemeClr val="accent1"/>
+              </a:effectRef>
+              <a:fontRef idx="minor">
+                <a:schemeClr val="lt1"/>
+              </a:fontRef>
+            </p:style>
+            <p:txBody>
+              <a:bodyPr rtlCol="0" anchor="ctr"/>
+              <a:lstStyle/>
+              <a:p>
+                <a:pPr algn="ctr"/>
+                <a:endParaRPr kumimoji="1" lang="ja-JP" altLang="en-US"/>
+              </a:p>
+            </p:txBody>
+          </p:sp>
+        </p:grpSp>
+        <p:grpSp>
+          <p:nvGrpSpPr>
+            <p:cNvPr id="166" name="グループ化 165">
+              <a:extLst>
+                <a:ext uri="{FF2B5EF4-FFF2-40B4-BE49-F238E27FC236}">
+                  <a16:creationId xmlns:a16="http://schemas.microsoft.com/office/drawing/2014/main" id="{199056D5-9711-E72A-8EC4-DF5ABFEB5B4B}"/>
+                </a:ext>
+              </a:extLst>
+            </p:cNvPr>
+            <p:cNvGrpSpPr/>
+            <p:nvPr/>
+          </p:nvGrpSpPr>
+          <p:grpSpPr>
+            <a:xfrm>
+              <a:off x="1994875" y="4783874"/>
+              <a:ext cx="252000" cy="792000"/>
+              <a:chOff x="1672682" y="4783874"/>
+              <a:chExt cx="252000" cy="792000"/>
+            </a:xfrm>
+            <a:grpFill/>
+          </p:grpSpPr>
+          <p:sp>
+            <p:nvSpPr>
+              <p:cNvPr id="170" name="円/楕円 169">
+                <a:extLst>
+                  <a:ext uri="{FF2B5EF4-FFF2-40B4-BE49-F238E27FC236}">
+                    <a16:creationId xmlns:a16="http://schemas.microsoft.com/office/drawing/2014/main" id="{28A5BBA7-058B-B001-0A97-C0425C42E9C6}"/>
+                  </a:ext>
+                </a:extLst>
+              </p:cNvPr>
+              <p:cNvSpPr>
+                <a:spLocks noChangeAspect="1"/>
+              </p:cNvSpPr>
+              <p:nvPr/>
+            </p:nvSpPr>
+            <p:spPr>
+              <a:xfrm>
+                <a:off x="1672682" y="4783874"/>
+                <a:ext cx="252000" cy="252000"/>
+              </a:xfrm>
+              <a:prstGeom prst="ellipse">
+                <a:avLst/>
+              </a:prstGeom>
+              <a:grpFill/>
+              <a:ln>
+                <a:noFill/>
+              </a:ln>
+            </p:spPr>
+            <p:style>
+              <a:lnRef idx="2">
+                <a:schemeClr val="accent1">
+                  <a:shade val="15000"/>
+                </a:schemeClr>
+              </a:lnRef>
+              <a:fillRef idx="1">
+                <a:schemeClr val="accent1"/>
+              </a:fillRef>
+              <a:effectRef idx="0">
+                <a:schemeClr val="accent1"/>
+              </a:effectRef>
+              <a:fontRef idx="minor">
+                <a:schemeClr val="lt1"/>
+              </a:fontRef>
+            </p:style>
+            <p:txBody>
+              <a:bodyPr rtlCol="0" anchor="ctr"/>
+              <a:lstStyle/>
+              <a:p>
+                <a:pPr algn="ctr"/>
+                <a:endParaRPr kumimoji="1" lang="ja-JP" altLang="en-US"/>
+              </a:p>
+            </p:txBody>
+          </p:sp>
+          <p:sp>
+            <p:nvSpPr>
+              <p:cNvPr id="171" name="片側の 2 つの角を丸めた四角形 170">
+                <a:extLst>
+                  <a:ext uri="{FF2B5EF4-FFF2-40B4-BE49-F238E27FC236}">
+                    <a16:creationId xmlns:a16="http://schemas.microsoft.com/office/drawing/2014/main" id="{5ABE2578-E8DC-AD1A-6161-EF0063E9B186}"/>
+                  </a:ext>
+                </a:extLst>
+              </p:cNvPr>
+              <p:cNvSpPr/>
+              <p:nvPr/>
+            </p:nvSpPr>
+            <p:spPr>
+              <a:xfrm>
+                <a:off x="1672682" y="5035874"/>
+                <a:ext cx="252000" cy="540000"/>
+              </a:xfrm>
+              <a:prstGeom prst="round2SameRect">
+                <a:avLst>
+                  <a:gd name="adj1" fmla="val 48873"/>
+                  <a:gd name="adj2" fmla="val 0"/>
+                </a:avLst>
+              </a:prstGeom>
+              <a:grpFill/>
+              <a:ln>
+                <a:noFill/>
+              </a:ln>
+            </p:spPr>
+            <p:style>
+              <a:lnRef idx="2">
+                <a:schemeClr val="accent1">
+                  <a:shade val="15000"/>
+                </a:schemeClr>
+              </a:lnRef>
+              <a:fillRef idx="1">
+                <a:schemeClr val="accent1"/>
+              </a:fillRef>
+              <a:effectRef idx="0">
+                <a:schemeClr val="accent1"/>
+              </a:effectRef>
+              <a:fontRef idx="minor">
+                <a:schemeClr val="lt1"/>
+              </a:fontRef>
+            </p:style>
+            <p:txBody>
+              <a:bodyPr rtlCol="0" anchor="ctr"/>
+              <a:lstStyle/>
+              <a:p>
+                <a:pPr algn="ctr"/>
+                <a:endParaRPr kumimoji="1" lang="ja-JP" altLang="en-US"/>
+              </a:p>
+            </p:txBody>
+          </p:sp>
+        </p:grpSp>
+        <p:grpSp>
+          <p:nvGrpSpPr>
+            <p:cNvPr id="167" name="グループ化 166">
+              <a:extLst>
+                <a:ext uri="{FF2B5EF4-FFF2-40B4-BE49-F238E27FC236}">
+                  <a16:creationId xmlns:a16="http://schemas.microsoft.com/office/drawing/2014/main" id="{D85523AE-54E0-08DA-DB96-936BC608F587}"/>
+                </a:ext>
+              </a:extLst>
+            </p:cNvPr>
+            <p:cNvGrpSpPr/>
+            <p:nvPr/>
+          </p:nvGrpSpPr>
+          <p:grpSpPr>
+            <a:xfrm>
+              <a:off x="2317068" y="4783874"/>
+              <a:ext cx="252000" cy="792000"/>
+              <a:chOff x="1672682" y="4783874"/>
+              <a:chExt cx="252000" cy="792000"/>
+            </a:xfrm>
+            <a:grpFill/>
+          </p:grpSpPr>
+          <p:sp>
+            <p:nvSpPr>
+              <p:cNvPr id="168" name="円/楕円 167">
+                <a:extLst>
+                  <a:ext uri="{FF2B5EF4-FFF2-40B4-BE49-F238E27FC236}">
+                    <a16:creationId xmlns:a16="http://schemas.microsoft.com/office/drawing/2014/main" id="{C7A55037-7B6E-7DD7-74F0-63C3196EB182}"/>
+                  </a:ext>
+                </a:extLst>
+              </p:cNvPr>
+              <p:cNvSpPr>
+                <a:spLocks noChangeAspect="1"/>
+              </p:cNvSpPr>
+              <p:nvPr/>
+            </p:nvSpPr>
+            <p:spPr>
+              <a:xfrm>
+                <a:off x="1672682" y="4783874"/>
+                <a:ext cx="252000" cy="252000"/>
+              </a:xfrm>
+              <a:prstGeom prst="ellipse">
+                <a:avLst/>
+              </a:prstGeom>
+              <a:grpFill/>
+              <a:ln>
+                <a:noFill/>
+              </a:ln>
+            </p:spPr>
+            <p:style>
+              <a:lnRef idx="2">
+                <a:schemeClr val="accent1">
+                  <a:shade val="15000"/>
+                </a:schemeClr>
+              </a:lnRef>
+              <a:fillRef idx="1">
+                <a:schemeClr val="accent1"/>
+              </a:fillRef>
+              <a:effectRef idx="0">
+                <a:schemeClr val="accent1"/>
+              </a:effectRef>
+              <a:fontRef idx="minor">
+                <a:schemeClr val="lt1"/>
+              </a:fontRef>
+            </p:style>
+            <p:txBody>
+              <a:bodyPr rtlCol="0" anchor="ctr"/>
+              <a:lstStyle/>
+              <a:p>
+                <a:pPr algn="ctr"/>
+                <a:endParaRPr kumimoji="1" lang="ja-JP" altLang="en-US"/>
+              </a:p>
+            </p:txBody>
+          </p:sp>
+          <p:sp>
+            <p:nvSpPr>
+              <p:cNvPr id="169" name="片側の 2 つの角を丸めた四角形 168">
+                <a:extLst>
+                  <a:ext uri="{FF2B5EF4-FFF2-40B4-BE49-F238E27FC236}">
+                    <a16:creationId xmlns:a16="http://schemas.microsoft.com/office/drawing/2014/main" id="{3E370CDA-83E0-DD66-F3AF-56FCA5186A28}"/>
+                  </a:ext>
+                </a:extLst>
+              </p:cNvPr>
+              <p:cNvSpPr/>
+              <p:nvPr/>
+            </p:nvSpPr>
+            <p:spPr>
+              <a:xfrm>
+                <a:off x="1672682" y="5035874"/>
+                <a:ext cx="252000" cy="540000"/>
+              </a:xfrm>
+              <a:prstGeom prst="round2SameRect">
+                <a:avLst>
+                  <a:gd name="adj1" fmla="val 48873"/>
+                  <a:gd name="adj2" fmla="val 0"/>
+                </a:avLst>
+              </a:prstGeom>
+              <a:grpFill/>
+              <a:ln>
+                <a:noFill/>
+              </a:ln>
+            </p:spPr>
+            <p:style>
+              <a:lnRef idx="2">
+                <a:schemeClr val="accent1">
+                  <a:shade val="15000"/>
+                </a:schemeClr>
+              </a:lnRef>
+              <a:fillRef idx="1">
+                <a:schemeClr val="accent1"/>
+              </a:fillRef>
+              <a:effectRef idx="0">
+                <a:schemeClr val="accent1"/>
+              </a:effectRef>
+              <a:fontRef idx="minor">
+                <a:schemeClr val="lt1"/>
+              </a:fontRef>
+            </p:style>
+            <p:txBody>
+              <a:bodyPr rtlCol="0" anchor="ctr"/>
+              <a:lstStyle/>
+              <a:p>
+                <a:pPr algn="ctr"/>
+                <a:endParaRPr kumimoji="1" lang="ja-JP" altLang="en-US"/>
+              </a:p>
+            </p:txBody>
+          </p:sp>
+        </p:grpSp>
+      </p:grpSp>
+      <p:sp>
+        <p:nvSpPr>
+          <p:cNvPr id="174" name="正方形/長方形 173">
+            <a:extLst>
+              <a:ext uri="{FF2B5EF4-FFF2-40B4-BE49-F238E27FC236}">
+                <a16:creationId xmlns:a16="http://schemas.microsoft.com/office/drawing/2014/main" id="{5D718F77-A8F4-D269-312E-F15825D625A5}"/>
+              </a:ext>
+            </a:extLst>
+          </p:cNvPr>
+          <p:cNvSpPr/>
+          <p:nvPr/>
+        </p:nvSpPr>
+        <p:spPr>
+          <a:xfrm>
+            <a:off x="1648149" y="3399720"/>
+            <a:ext cx="993993" cy="914400"/>
+          </a:xfrm>
+          <a:prstGeom prst="rect">
+            <a:avLst/>
+          </a:prstGeom>
+          <a:solidFill>
+            <a:srgbClr val="00387D">
+              <a:alpha val="69804"/>
+            </a:srgbClr>
+          </a:solidFill>
+          <a:ln>
+            <a:noFill/>
+          </a:ln>
+        </p:spPr>
+        <p:style>
+          <a:lnRef idx="2">
+            <a:schemeClr val="accent1">
+              <a:shade val="15000"/>
+            </a:schemeClr>
+          </a:lnRef>
+          <a:fillRef idx="1">
+            <a:schemeClr val="accent1"/>
+          </a:fillRef>
+          <a:effectRef idx="0">
+            <a:schemeClr val="accent1"/>
+          </a:effectRef>
+          <a:fontRef idx="minor">
+            <a:schemeClr val="lt1"/>
+          </a:fontRef>
+        </p:style>
+        <p:txBody>
+          <a:bodyPr rtlCol="0" anchor="ctr"/>
+          <a:lstStyle/>
+          <a:p>
+            <a:pPr algn="ctr"/>
+            <a:endParaRPr kumimoji="1" lang="ja-JP" altLang="en-US"/>
+          </a:p>
+        </p:txBody>
+      </p:sp>
     </p:spTree>
     <p:extLst>
       <p:ext uri="{BB962C8B-B14F-4D97-AF65-F5344CB8AC3E}">
